--- a/docs/ReSet_Presentation.pptx
+++ b/docs/ReSet_Presentation.pptx
@@ -6081,7 +6081,56 @@
             </a:r>
             <a:endParaRPr sz="1150">
               <a:solidFill>
-                <a:schemeClr val="dk1"/>
+                <a:srgbClr val="1E293B"/>
+              </a:solidFill>
+              <a:latin typeface="Calibri"/>
+              <a:ea typeface="Calibri"/>
+              <a:cs typeface="Calibri"/>
+              <a:sym typeface="Calibri"/>
+            </a:endParaRPr>
+          </a:p>
+          <a:p>
+            <a:pPr indent="-182563" lvl="0" marL="182563" marR="0" rtl="0" algn="l">
+              <a:spcBef>
+                <a:spcPts val="1200"/>
+              </a:spcBef>
+              <a:spcAft>
+                <a:spcPts val="0"/>
+              </a:spcAft>
+              <a:buClr>
+                <a:srgbClr val="1E293B"/>
+              </a:buClr>
+              <a:buSzPts val="1150"/>
+              <a:buFont typeface="Calibri"/>
+              <a:buChar char="✔"/>
+            </a:pPr>
+            <a:r>
+              <a:rPr lang="en-US" sz="1150">
+                <a:solidFill>
+                  <a:srgbClr val="1E293B"/>
+                </a:solidFill>
+                <a:latin typeface="Calibri"/>
+                <a:ea typeface="Calibri"/>
+                <a:cs typeface="Calibri"/>
+                <a:sym typeface="Calibri"/>
+              </a:rPr>
+              <a:t>T-SQL AST </a:t>
+            </a:r>
+            <a:r>
+              <a:rPr lang="en-US" sz="1150">
+                <a:solidFill>
+                  <a:srgbClr val="1E293B"/>
+                </a:solidFill>
+                <a:latin typeface="Calibri"/>
+                <a:ea typeface="Calibri"/>
+                <a:cs typeface="Calibri"/>
+                <a:sym typeface="Calibri"/>
+              </a:rPr>
+              <a:t>기반 정적 분석 (ScriptDom)</a:t>
+            </a:r>
+            <a:endParaRPr sz="1150">
+              <a:solidFill>
+                <a:srgbClr val="1E293B"/>
               </a:solidFill>
               <a:latin typeface="Calibri"/>
               <a:ea typeface="Calibri"/>
@@ -13397,6 +13446,285 @@
 </file>
 
 <file path=ppt/theme/theme1.xml><?xml version="1.0" encoding="utf-8"?>
+<a:theme xmlns:a="http://schemas.openxmlformats.org/drawingml/2006/main" xmlns:r="http://schemas.openxmlformats.org/officeDocument/2006/relationships" name="Office Theme">
+  <a:themeElements>
+    <a:clrScheme name="Office">
+      <a:dk1>
+        <a:srgbClr val="000000"/>
+      </a:dk1>
+      <a:lt1>
+        <a:srgbClr val="FFFFFF"/>
+      </a:lt1>
+      <a:dk2>
+        <a:srgbClr val="44546A"/>
+      </a:dk2>
+      <a:lt2>
+        <a:srgbClr val="E7E6E6"/>
+      </a:lt2>
+      <a:accent1>
+        <a:srgbClr val="4472C4"/>
+      </a:accent1>
+      <a:accent2>
+        <a:srgbClr val="ED7D31"/>
+      </a:accent2>
+      <a:accent3>
+        <a:srgbClr val="A5A5A5"/>
+      </a:accent3>
+      <a:accent4>
+        <a:srgbClr val="FFC000"/>
+      </a:accent4>
+      <a:accent5>
+        <a:srgbClr val="5B9BD5"/>
+      </a:accent5>
+      <a:accent6>
+        <a:srgbClr val="70AD47"/>
+      </a:accent6>
+      <a:hlink>
+        <a:srgbClr val="0563C1"/>
+      </a:hlink>
+      <a:folHlink>
+        <a:srgbClr val="954F72"/>
+      </a:folHlink>
+    </a:clrScheme>
+    <a:fontScheme name="Office">
+      <a:majorFont>
+        <a:latin typeface="Arial"/>
+        <a:ea typeface=""/>
+        <a:cs typeface=""/>
+        <a:font script="Jpan" typeface="ＭＳ Ｐゴシック"/>
+        <a:font script="Hang" typeface="맑은 고딕"/>
+        <a:font script="Hans" typeface="宋体"/>
+        <a:font script="Hant" typeface="新細明體"/>
+        <a:font script="Arab" typeface="Times New Roman"/>
+        <a:font script="Hebr" typeface="Times New Roman"/>
+        <a:font script="Thai" typeface="Angsana New"/>
+        <a:font script="Ethi" typeface="Nyala"/>
+        <a:font script="Beng" typeface="Vrinda"/>
+        <a:font script="Gujr" typeface="Shruti"/>
+        <a:font script="Khmr" typeface="MoolBoran"/>
+        <a:font script="Knda" typeface="Tunga"/>
+        <a:font script="Guru" typeface="Raavi"/>
+        <a:font script="Cans" typeface="Euphemia"/>
+        <a:font script="Cher" typeface="Plantagenet Cherokee"/>
+        <a:font script="Yiii" typeface="Microsoft Yi Baiti"/>
+        <a:font script="Tibt" typeface="Microsoft Himalaya"/>
+        <a:font script="Thaa" typeface="MV Boli"/>
+        <a:font script="Deva" typeface="Mangal"/>
+        <a:font script="Telu" typeface="Gautami"/>
+        <a:font script="Taml" typeface="Latha"/>
+        <a:font script="Syrc" typeface="Estrangelo Edessa"/>
+        <a:font script="Orya" typeface="Kalinga"/>
+        <a:font script="Mlym" typeface="Kartika"/>
+        <a:font script="Laoo" typeface="DokChampa"/>
+        <a:font script="Sinh" typeface="Iskoola Pota"/>
+        <a:font script="Mong" typeface="Mongolian Baiti"/>
+        <a:font script="Viet" typeface="Times New Roman"/>
+        <a:font script="Uigh" typeface="Microsoft Uighur"/>
+        <a:font script="Geor" typeface="Sylfaen"/>
+      </a:majorFont>
+      <a:minorFont>
+        <a:latin typeface="Arial"/>
+        <a:ea typeface=""/>
+        <a:cs typeface=""/>
+        <a:font script="Jpan" typeface="ＭＳ Ｐゴシック"/>
+        <a:font script="Hang" typeface="맑은 고딕"/>
+        <a:font script="Hans" typeface="宋体"/>
+        <a:font script="Hant" typeface="新細明體"/>
+        <a:font script="Arab" typeface="Arial"/>
+        <a:font script="Hebr" typeface="Arial"/>
+        <a:font script="Thai" typeface="Cordia New"/>
+        <a:font script="Ethi" typeface="Nyala"/>
+        <a:font script="Beng" typeface="Vrinda"/>
+        <a:font script="Gujr" typeface="Shruti"/>
+        <a:font script="Khmr" typeface="DaunPenh"/>
+        <a:font script="Knda" typeface="Tunga"/>
+        <a:font script="Guru" typeface="Raavi"/>
+        <a:font script="Cans" typeface="Euphemia"/>
+        <a:font script="Cher" typeface="Plantagenet Cherokee"/>
+        <a:font script="Yiii" typeface="Microsoft Yi Baiti"/>
+        <a:font script="Tibt" typeface="Microsoft Himalaya"/>
+        <a:font script="Thaa" typeface="MV Boli"/>
+        <a:font script="Deva" typeface="Mangal"/>
+        <a:font script="Telu" typeface="Gautami"/>
+        <a:font script="Taml" typeface="Latha"/>
+        <a:font script="Syrc" typeface="Estrangelo Edessa"/>
+        <a:font script="Orya" typeface="Kalinga"/>
+        <a:font script="Mlym" typeface="Kartika"/>
+        <a:font script="Laoo" typeface="DokChampa"/>
+        <a:font script="Sinh" typeface="Iskoola Pota"/>
+        <a:font script="Mong" typeface="Mongolian Baiti"/>
+        <a:font script="Viet" typeface="Arial"/>
+        <a:font script="Uigh" typeface="Microsoft Uighur"/>
+        <a:font script="Geor" typeface="Sylfaen"/>
+      </a:minorFont>
+    </a:fontScheme>
+    <a:fmtScheme name="Office">
+      <a:fillStyleLst>
+        <a:solidFill>
+          <a:schemeClr val="phClr"/>
+        </a:solidFill>
+        <a:gradFill rotWithShape="1">
+          <a:gsLst>
+            <a:gs pos="0">
+              <a:schemeClr val="phClr">
+                <a:tint val="50000"/>
+                <a:satMod val="300000"/>
+              </a:schemeClr>
+            </a:gs>
+            <a:gs pos="35000">
+              <a:schemeClr val="phClr">
+                <a:tint val="37000"/>
+                <a:satMod val="300000"/>
+              </a:schemeClr>
+            </a:gs>
+            <a:gs pos="100000">
+              <a:schemeClr val="phClr">
+                <a:tint val="15000"/>
+                <a:satMod val="350000"/>
+              </a:schemeClr>
+            </a:gs>
+          </a:gsLst>
+          <a:lin ang="16200000" scaled="1"/>
+        </a:gradFill>
+        <a:gradFill rotWithShape="1">
+          <a:gsLst>
+            <a:gs pos="0">
+              <a:schemeClr val="phClr">
+                <a:tint val="100000"/>
+                <a:shade val="100000"/>
+                <a:satMod val="130000"/>
+              </a:schemeClr>
+            </a:gs>
+            <a:gs pos="100000">
+              <a:schemeClr val="phClr">
+                <a:tint val="50000"/>
+                <a:shade val="100000"/>
+                <a:satMod val="350000"/>
+              </a:schemeClr>
+            </a:gs>
+          </a:gsLst>
+          <a:lin ang="16200000" scaled="0"/>
+        </a:gradFill>
+      </a:fillStyleLst>
+      <a:lnStyleLst>
+        <a:ln w="9525" cap="flat" cmpd="sng" algn="ctr">
+          <a:solidFill>
+            <a:schemeClr val="phClr">
+              <a:shade val="95000"/>
+              <a:satMod val="105000"/>
+            </a:schemeClr>
+          </a:solidFill>
+          <a:prstDash val="solid"/>
+        </a:ln>
+        <a:ln w="25400" cap="flat" cmpd="sng" algn="ctr">
+          <a:solidFill>
+            <a:schemeClr val="phClr"/>
+          </a:solidFill>
+          <a:prstDash val="solid"/>
+        </a:ln>
+        <a:ln w="38100" cap="flat" cmpd="sng" algn="ctr">
+          <a:solidFill>
+            <a:schemeClr val="phClr"/>
+          </a:solidFill>
+          <a:prstDash val="solid"/>
+        </a:ln>
+      </a:lnStyleLst>
+      <a:effectStyleLst>
+        <a:effectStyle>
+          <a:effectLst>
+            <a:outerShdw blurRad="40000" dist="20000" dir="5400000" rotWithShape="0">
+              <a:srgbClr val="000000">
+                <a:alpha val="38000"/>
+              </a:srgbClr>
+            </a:outerShdw>
+          </a:effectLst>
+        </a:effectStyle>
+        <a:effectStyle>
+          <a:effectLst>
+            <a:outerShdw blurRad="40000" dist="23000" dir="5400000" rotWithShape="0">
+              <a:srgbClr val="000000">
+                <a:alpha val="35000"/>
+              </a:srgbClr>
+            </a:outerShdw>
+          </a:effectLst>
+        </a:effectStyle>
+        <a:effectStyle>
+          <a:effectLst>
+            <a:outerShdw blurRad="40000" dist="23000" dir="5400000" rotWithShape="0">
+              <a:srgbClr val="000000">
+                <a:alpha val="35000"/>
+              </a:srgbClr>
+            </a:outerShdw>
+          </a:effectLst>
+          <a:scene3d>
+            <a:camera prst="orthographicFront">
+              <a:rot lat="0" lon="0" rev="0"/>
+            </a:camera>
+            <a:lightRig rig="threePt" dir="t">
+              <a:rot lat="0" lon="0" rev="1200000"/>
+            </a:lightRig>
+          </a:scene3d>
+          <a:sp3d>
+            <a:bevelT w="63500" h="25400"/>
+          </a:sp3d>
+        </a:effectStyle>
+      </a:effectStyleLst>
+      <a:bgFillStyleLst>
+        <a:solidFill>
+          <a:schemeClr val="phClr"/>
+        </a:solidFill>
+        <a:gradFill rotWithShape="1">
+          <a:gsLst>
+            <a:gs pos="0">
+              <a:schemeClr val="phClr">
+                <a:tint val="40000"/>
+                <a:satMod val="350000"/>
+              </a:schemeClr>
+            </a:gs>
+            <a:gs pos="40000">
+              <a:schemeClr val="phClr">
+                <a:tint val="45000"/>
+                <a:shade val="99000"/>
+                <a:satMod val="350000"/>
+              </a:schemeClr>
+            </a:gs>
+            <a:gs pos="100000">
+              <a:schemeClr val="phClr">
+                <a:shade val="20000"/>
+                <a:satMod val="255000"/>
+              </a:schemeClr>
+            </a:gs>
+          </a:gsLst>
+          <a:path path="circle">
+            <a:fillToRect l="50000" t="-80000" r="50000" b="180000"/>
+          </a:path>
+        </a:gradFill>
+        <a:gradFill rotWithShape="1">
+          <a:gsLst>
+            <a:gs pos="0">
+              <a:schemeClr val="phClr">
+                <a:tint val="80000"/>
+                <a:satMod val="300000"/>
+              </a:schemeClr>
+            </a:gs>
+            <a:gs pos="100000">
+              <a:schemeClr val="phClr">
+                <a:shade val="30000"/>
+                <a:satMod val="200000"/>
+              </a:schemeClr>
+            </a:gs>
+          </a:gsLst>
+          <a:path path="circle">
+            <a:fillToRect l="50000" t="50000" r="50000" b="50000"/>
+          </a:path>
+        </a:gradFill>
+      </a:bgFillStyleLst>
+    </a:fmtScheme>
+  </a:themeElements>
+</a:theme>
+</file>
+
+<file path=ppt/theme/theme2.xml><?xml version="1.0" encoding="utf-8"?>
 <a:theme xmlns:a="http://schemas.openxmlformats.org/drawingml/2006/main" xmlns:r="http://schemas.openxmlformats.org/officeDocument/2006/relationships" name="Office 테마">
   <a:themeElements>
     <a:clrScheme name="Office">
@@ -13673,283 +14001,4 @@
     </a:fmtScheme>
   </a:themeElements>
 </a:theme>
-</file>
-
-<file path=ppt/theme/theme2.xml><?xml version="1.0" encoding="utf-8"?>
-<a:theme xmlns:a="http://schemas.openxmlformats.org/drawingml/2006/main" xmlns:r="http://schemas.openxmlformats.org/officeDocument/2006/relationships" name="Office Theme">
-  <a:themeElements>
-    <a:clrScheme name="Office">
-      <a:dk1>
-        <a:srgbClr val="000000"/>
-      </a:dk1>
-      <a:lt1>
-        <a:srgbClr val="FFFFFF"/>
-      </a:lt1>
-      <a:dk2>
-        <a:srgbClr val="44546A"/>
-      </a:dk2>
-      <a:lt2>
-        <a:srgbClr val="E7E6E6"/>
-      </a:lt2>
-      <a:accent1>
-        <a:srgbClr val="4472C4"/>
-      </a:accent1>
-      <a:accent2>
-        <a:srgbClr val="ED7D31"/>
-      </a:accent2>
-      <a:accent3>
-        <a:srgbClr val="A5A5A5"/>
-      </a:accent3>
-      <a:accent4>
-        <a:srgbClr val="FFC000"/>
-      </a:accent4>
-      <a:accent5>
-        <a:srgbClr val="5B9BD5"/>
-      </a:accent5>
-      <a:accent6>
-        <a:srgbClr val="70AD47"/>
-      </a:accent6>
-      <a:hlink>
-        <a:srgbClr val="0563C1"/>
-      </a:hlink>
-      <a:folHlink>
-        <a:srgbClr val="954F72"/>
-      </a:folHlink>
-    </a:clrScheme>
-    <a:fontScheme name="Office">
-      <a:majorFont>
-        <a:latin typeface="Arial"/>
-        <a:ea typeface=""/>
-        <a:cs typeface=""/>
-        <a:font script="Jpan" typeface="ＭＳ Ｐゴシック"/>
-        <a:font script="Hang" typeface="맑은 고딕"/>
-        <a:font script="Hans" typeface="宋体"/>
-        <a:font script="Hant" typeface="新細明體"/>
-        <a:font script="Arab" typeface="Times New Roman"/>
-        <a:font script="Hebr" typeface="Times New Roman"/>
-        <a:font script="Thai" typeface="Angsana New"/>
-        <a:font script="Ethi" typeface="Nyala"/>
-        <a:font script="Beng" typeface="Vrinda"/>
-        <a:font script="Gujr" typeface="Shruti"/>
-        <a:font script="Khmr" typeface="MoolBoran"/>
-        <a:font script="Knda" typeface="Tunga"/>
-        <a:font script="Guru" typeface="Raavi"/>
-        <a:font script="Cans" typeface="Euphemia"/>
-        <a:font script="Cher" typeface="Plantagenet Cherokee"/>
-        <a:font script="Yiii" typeface="Microsoft Yi Baiti"/>
-        <a:font script="Tibt" typeface="Microsoft Himalaya"/>
-        <a:font script="Thaa" typeface="MV Boli"/>
-        <a:font script="Deva" typeface="Mangal"/>
-        <a:font script="Telu" typeface="Gautami"/>
-        <a:font script="Taml" typeface="Latha"/>
-        <a:font script="Syrc" typeface="Estrangelo Edessa"/>
-        <a:font script="Orya" typeface="Kalinga"/>
-        <a:font script="Mlym" typeface="Kartika"/>
-        <a:font script="Laoo" typeface="DokChampa"/>
-        <a:font script="Sinh" typeface="Iskoola Pota"/>
-        <a:font script="Mong" typeface="Mongolian Baiti"/>
-        <a:font script="Viet" typeface="Times New Roman"/>
-        <a:font script="Uigh" typeface="Microsoft Uighur"/>
-        <a:font script="Geor" typeface="Sylfaen"/>
-      </a:majorFont>
-      <a:minorFont>
-        <a:latin typeface="Arial"/>
-        <a:ea typeface=""/>
-        <a:cs typeface=""/>
-        <a:font script="Jpan" typeface="ＭＳ Ｐゴシック"/>
-        <a:font script="Hang" typeface="맑은 고딕"/>
-        <a:font script="Hans" typeface="宋体"/>
-        <a:font script="Hant" typeface="新細明體"/>
-        <a:font script="Arab" typeface="Arial"/>
-        <a:font script="Hebr" typeface="Arial"/>
-        <a:font script="Thai" typeface="Cordia New"/>
-        <a:font script="Ethi" typeface="Nyala"/>
-        <a:font script="Beng" typeface="Vrinda"/>
-        <a:font script="Gujr" typeface="Shruti"/>
-        <a:font script="Khmr" typeface="DaunPenh"/>
-        <a:font script="Knda" typeface="Tunga"/>
-        <a:font script="Guru" typeface="Raavi"/>
-        <a:font script="Cans" typeface="Euphemia"/>
-        <a:font script="Cher" typeface="Plantagenet Cherokee"/>
-        <a:font script="Yiii" typeface="Microsoft Yi Baiti"/>
-        <a:font script="Tibt" typeface="Microsoft Himalaya"/>
-        <a:font script="Thaa" typeface="MV Boli"/>
-        <a:font script="Deva" typeface="Mangal"/>
-        <a:font script="Telu" typeface="Gautami"/>
-        <a:font script="Taml" typeface="Latha"/>
-        <a:font script="Syrc" typeface="Estrangelo Edessa"/>
-        <a:font script="Orya" typeface="Kalinga"/>
-        <a:font script="Mlym" typeface="Kartika"/>
-        <a:font script="Laoo" typeface="DokChampa"/>
-        <a:font script="Sinh" typeface="Iskoola Pota"/>
-        <a:font script="Mong" typeface="Mongolian Baiti"/>
-        <a:font script="Viet" typeface="Arial"/>
-        <a:font script="Uigh" typeface="Microsoft Uighur"/>
-        <a:font script="Geor" typeface="Sylfaen"/>
-      </a:minorFont>
-    </a:fontScheme>
-    <a:fmtScheme name="Office">
-      <a:fillStyleLst>
-        <a:solidFill>
-          <a:schemeClr val="phClr"/>
-        </a:solidFill>
-        <a:gradFill rotWithShape="1">
-          <a:gsLst>
-            <a:gs pos="0">
-              <a:schemeClr val="phClr">
-                <a:tint val="50000"/>
-                <a:satMod val="300000"/>
-              </a:schemeClr>
-            </a:gs>
-            <a:gs pos="35000">
-              <a:schemeClr val="phClr">
-                <a:tint val="37000"/>
-                <a:satMod val="300000"/>
-              </a:schemeClr>
-            </a:gs>
-            <a:gs pos="100000">
-              <a:schemeClr val="phClr">
-                <a:tint val="15000"/>
-                <a:satMod val="350000"/>
-              </a:schemeClr>
-            </a:gs>
-          </a:gsLst>
-          <a:lin ang="16200000" scaled="1"/>
-        </a:gradFill>
-        <a:gradFill rotWithShape="1">
-          <a:gsLst>
-            <a:gs pos="0">
-              <a:schemeClr val="phClr">
-                <a:tint val="100000"/>
-                <a:shade val="100000"/>
-                <a:satMod val="130000"/>
-              </a:schemeClr>
-            </a:gs>
-            <a:gs pos="100000">
-              <a:schemeClr val="phClr">
-                <a:tint val="50000"/>
-                <a:shade val="100000"/>
-                <a:satMod val="350000"/>
-              </a:schemeClr>
-            </a:gs>
-          </a:gsLst>
-          <a:lin ang="16200000" scaled="0"/>
-        </a:gradFill>
-      </a:fillStyleLst>
-      <a:lnStyleLst>
-        <a:ln w="9525" cap="flat" cmpd="sng" algn="ctr">
-          <a:solidFill>
-            <a:schemeClr val="phClr">
-              <a:shade val="95000"/>
-              <a:satMod val="105000"/>
-            </a:schemeClr>
-          </a:solidFill>
-          <a:prstDash val="solid"/>
-        </a:ln>
-        <a:ln w="25400" cap="flat" cmpd="sng" algn="ctr">
-          <a:solidFill>
-            <a:schemeClr val="phClr"/>
-          </a:solidFill>
-          <a:prstDash val="solid"/>
-        </a:ln>
-        <a:ln w="38100" cap="flat" cmpd="sng" algn="ctr">
-          <a:solidFill>
-            <a:schemeClr val="phClr"/>
-          </a:solidFill>
-          <a:prstDash val="solid"/>
-        </a:ln>
-      </a:lnStyleLst>
-      <a:effectStyleLst>
-        <a:effectStyle>
-          <a:effectLst>
-            <a:outerShdw blurRad="40000" dist="20000" dir="5400000" rotWithShape="0">
-              <a:srgbClr val="000000">
-                <a:alpha val="38000"/>
-              </a:srgbClr>
-            </a:outerShdw>
-          </a:effectLst>
-        </a:effectStyle>
-        <a:effectStyle>
-          <a:effectLst>
-            <a:outerShdw blurRad="40000" dist="23000" dir="5400000" rotWithShape="0">
-              <a:srgbClr val="000000">
-                <a:alpha val="35000"/>
-              </a:srgbClr>
-            </a:outerShdw>
-          </a:effectLst>
-        </a:effectStyle>
-        <a:effectStyle>
-          <a:effectLst>
-            <a:outerShdw blurRad="40000" dist="23000" dir="5400000" rotWithShape="0">
-              <a:srgbClr val="000000">
-                <a:alpha val="35000"/>
-              </a:srgbClr>
-            </a:outerShdw>
-          </a:effectLst>
-          <a:scene3d>
-            <a:camera prst="orthographicFront">
-              <a:rot lat="0" lon="0" rev="0"/>
-            </a:camera>
-            <a:lightRig rig="threePt" dir="t">
-              <a:rot lat="0" lon="0" rev="1200000"/>
-            </a:lightRig>
-          </a:scene3d>
-          <a:sp3d>
-            <a:bevelT w="63500" h="25400"/>
-          </a:sp3d>
-        </a:effectStyle>
-      </a:effectStyleLst>
-      <a:bgFillStyleLst>
-        <a:solidFill>
-          <a:schemeClr val="phClr"/>
-        </a:solidFill>
-        <a:gradFill rotWithShape="1">
-          <a:gsLst>
-            <a:gs pos="0">
-              <a:schemeClr val="phClr">
-                <a:tint val="40000"/>
-                <a:satMod val="350000"/>
-              </a:schemeClr>
-            </a:gs>
-            <a:gs pos="40000">
-              <a:schemeClr val="phClr">
-                <a:tint val="45000"/>
-                <a:shade val="99000"/>
-                <a:satMod val="350000"/>
-              </a:schemeClr>
-            </a:gs>
-            <a:gs pos="100000">
-              <a:schemeClr val="phClr">
-                <a:shade val="20000"/>
-                <a:satMod val="255000"/>
-              </a:schemeClr>
-            </a:gs>
-          </a:gsLst>
-          <a:path path="circle">
-            <a:fillToRect l="50000" t="-80000" r="50000" b="180000"/>
-          </a:path>
-        </a:gradFill>
-        <a:gradFill rotWithShape="1">
-          <a:gsLst>
-            <a:gs pos="0">
-              <a:schemeClr val="phClr">
-                <a:tint val="80000"/>
-                <a:satMod val="300000"/>
-              </a:schemeClr>
-            </a:gs>
-            <a:gs pos="100000">
-              <a:schemeClr val="phClr">
-                <a:shade val="30000"/>
-                <a:satMod val="200000"/>
-              </a:schemeClr>
-            </a:gs>
-          </a:gsLst>
-          <a:path path="circle">
-            <a:fillToRect l="50000" t="50000" r="50000" b="50000"/>
-          </a:path>
-        </a:gradFill>
-      </a:bgFillStyleLst>
-    </a:fmtScheme>
-  </a:themeElements>
-</a:theme>
 </file>
--- a/docs/ReSet_Presentation.pptx
+++ b/docs/ReSet_Presentation.pptx
@@ -9345,7 +9345,7 @@
                 <a:cs typeface="Calibri"/>
                 <a:sym typeface="Calibri"/>
               </a:rPr>
-              <a:t>이종 Critic 에이전트의 4대 기준 평가 피드백 획득</a:t>
+              <a:t>이종 Critic 에이전트의 5대 기준 평가 피드백 획득</a:t>
             </a:r>
             <a:endParaRPr sz="1050">
               <a:solidFill>
@@ -11763,7 +11763,7 @@
                 <a:cs typeface="Calibri"/>
                 <a:sym typeface="Calibri"/>
               </a:rPr>
-              <a:t>C# 리플렉션 로드 후 DB 트랜잭션 Rollback 강제 적용 또는 Java 외부 프로세스 타임아웃 구동 결과 JSON 수집</a:t>
+              <a:t>동적 라이브러리 로딩 및 트랜잭션 강제 롤백을 통한 데이터베이스 격리, 또는 독립 프로세스 기동 및 타임아웃 제어를 통한 런타임 격리를 적용하여 대상 로직의 수행 결과를 JSON 포맷의 스트림으로 수집</a:t>
             </a:r>
             <a:endParaRPr sz="1050">
               <a:solidFill>
@@ -13275,7 +13275,7 @@
                 <a:cs typeface="Calibri"/>
                 <a:sym typeface="Calibri"/>
               </a:rPr>
-              <a:t>YAML TargetCode 기반 경로 매핑</a:t>
+              <a:t>Sandbox 결과 1:1 비교</a:t>
             </a:r>
             <a:endParaRPr sz="1050">
               <a:solidFill>
@@ -13312,7 +13312,7 @@
                 <a:cs typeface="Calibri"/>
                 <a:sym typeface="Calibri"/>
               </a:rPr>
-              <a:t>Sandbox 결과 1:1 비교</a:t>
+              <a:t>관계형 모의 데이터 적재/소거</a:t>
             </a:r>
             <a:endParaRPr sz="1050">
               <a:solidFill>
@@ -13349,7 +13349,7 @@
                 <a:cs typeface="Calibri"/>
                 <a:sym typeface="Calibri"/>
               </a:rPr>
-              <a:t>관계형 모의 데이터 적재/소거</a:t>
+              <a:t>양방향 실행 덤프 값 정밀 대조</a:t>
             </a:r>
             <a:endParaRPr sz="1050">
               <a:solidFill>
@@ -13386,7 +13386,7 @@
                 <a:cs typeface="Calibri"/>
                 <a:sym typeface="Calibri"/>
               </a:rPr>
-              <a:t>양방향 실행 덤프 값 정밀 대조</a:t>
+              <a:t>정합성 결함 시 3단계 복구 루프</a:t>
             </a:r>
             <a:endParaRPr sz="1050">
               <a:solidFill>
@@ -13399,7 +13399,7 @@
             </a:endParaRPr>
           </a:p>
           <a:p>
-            <a:pPr indent="-182563" lvl="0" marL="182563" marR="0" rtl="0" algn="l">
+            <a:pPr indent="-160338" lvl="0" marL="342900" rtl="0" algn="l">
               <a:spcBef>
                 <a:spcPts val="500"/>
               </a:spcBef>
@@ -13410,8 +13410,8 @@
                 <a:srgbClr val="1E293B"/>
               </a:buClr>
               <a:buSzPts val="1050"/>
-              <a:buFont typeface="Noto Sans Symbols"/>
-              <a:buChar char="✔"/>
+              <a:buFont typeface="Calibri"/>
+              <a:buChar char="•"/>
             </a:pPr>
             <a:r>
               <a:rPr lang="en-US" sz="1050">
@@ -13423,11 +13423,85 @@
                 <a:cs typeface="Calibri"/>
                 <a:sym typeface="Calibri"/>
               </a:rPr>
-              <a:t>정합성 결함 시 3단계 복구 루프</a:t>
+              <a:t>설계 재수립</a:t>
             </a:r>
             <a:endParaRPr sz="1050">
               <a:solidFill>
-                <a:schemeClr val="dk1"/>
+                <a:srgbClr val="1E293B"/>
+              </a:solidFill>
+              <a:latin typeface="Calibri"/>
+              <a:ea typeface="Calibri"/>
+              <a:cs typeface="Calibri"/>
+              <a:sym typeface="Calibri"/>
+            </a:endParaRPr>
+          </a:p>
+          <a:p>
+            <a:pPr indent="-160338" lvl="0" marL="342900" rtl="0" algn="l">
+              <a:spcBef>
+                <a:spcPts val="500"/>
+              </a:spcBef>
+              <a:spcAft>
+                <a:spcPts val="0"/>
+              </a:spcAft>
+              <a:buClr>
+                <a:srgbClr val="1E293B"/>
+              </a:buClr>
+              <a:buSzPts val="1050"/>
+              <a:buFont typeface="Calibri"/>
+              <a:buChar char="•"/>
+            </a:pPr>
+            <a:r>
+              <a:rPr lang="en-US" sz="1050">
+                <a:solidFill>
+                  <a:srgbClr val="1E293B"/>
+                </a:solidFill>
+                <a:latin typeface="Calibri"/>
+                <a:ea typeface="Calibri"/>
+                <a:cs typeface="Calibri"/>
+                <a:sym typeface="Calibri"/>
+              </a:rPr>
+              <a:t>소스코드 보완</a:t>
+            </a:r>
+            <a:endParaRPr sz="1050">
+              <a:solidFill>
+                <a:srgbClr val="1E293B"/>
+              </a:solidFill>
+              <a:latin typeface="Calibri"/>
+              <a:ea typeface="Calibri"/>
+              <a:cs typeface="Calibri"/>
+              <a:sym typeface="Calibri"/>
+            </a:endParaRPr>
+          </a:p>
+          <a:p>
+            <a:pPr indent="-160338" lvl="0" marL="342900" rtl="0" algn="l">
+              <a:spcBef>
+                <a:spcPts val="500"/>
+              </a:spcBef>
+              <a:spcAft>
+                <a:spcPts val="0"/>
+              </a:spcAft>
+              <a:buClr>
+                <a:srgbClr val="1E293B"/>
+              </a:buClr>
+              <a:buSzPts val="1050"/>
+              <a:buFont typeface="Calibri"/>
+              <a:buChar char="•"/>
+            </a:pPr>
+            <a:r>
+              <a:rPr lang="en-US" sz="1050">
+                <a:solidFill>
+                  <a:srgbClr val="1E293B"/>
+                </a:solidFill>
+                <a:latin typeface="Calibri"/>
+                <a:ea typeface="Calibri"/>
+                <a:cs typeface="Calibri"/>
+                <a:sym typeface="Calibri"/>
+              </a:rPr>
+              <a:t>테스트 튜닝</a:t>
+            </a:r>
+            <a:endParaRPr sz="1050">
+              <a:solidFill>
+                <a:srgbClr val="1E293B"/>
               </a:solidFill>
               <a:latin typeface="Calibri"/>
               <a:ea typeface="Calibri"/>

--- a/docs/ReSet_Presentation.pptx
+++ b/docs/ReSet_Presentation.pptx
@@ -3840,7 +3840,7 @@
                 <a:cs typeface="Trebuchet MS"/>
                 <a:sym typeface="Trebuchet MS"/>
               </a:rPr>
-              <a:t>분석 및 </a:t>
+              <a:t xml:space="preserve">분석 및 </a:t>
             </a:r>
             <a:r>
               <a:rPr b="1" lang="en-US" sz="1300">
@@ -4123,7 +4123,7 @@
                 <a:cs typeface="Trebuchet MS"/>
                 <a:sym typeface="Trebuchet MS"/>
               </a:rPr>
-              <a:t>설계 산출물 결함률 </a:t>
+              <a:t xml:space="preserve">설계 산출물 결함률 </a:t>
             </a:r>
             <a:r>
               <a:rPr b="1" lang="en-US" sz="1300">
@@ -4665,7 +4665,7 @@
                 <a:cs typeface="Calibri"/>
                 <a:sym typeface="Calibri"/>
               </a:rPr>
-              <a:t>레거시 DB의 내부 로직(SP) 현대화는 </a:t>
+              <a:t xml:space="preserve">레거시 DB의 내부 로직(SP) 현대화는 </a:t>
             </a:r>
             <a:r>
               <a:rPr lang="en-US" sz="1500">
@@ -6114,7 +6114,7 @@
                 <a:cs typeface="Calibri"/>
                 <a:sym typeface="Calibri"/>
               </a:rPr>
-              <a:t>T-SQL AST </a:t>
+              <a:t xml:space="preserve">T-SQL AST </a:t>
             </a:r>
             <a:r>
               <a:rPr lang="en-US" sz="1150">
@@ -6553,6 +6553,43 @@
                 <a:sym typeface="Calibri"/>
               </a:rPr>
               <a:t>양방향 런타임 결과 수집 및 1:1 값 정밀 대조</a:t>
+            </a:r>
+            <a:endParaRPr sz="1150">
+              <a:solidFill>
+                <a:schemeClr val="dk1"/>
+              </a:solidFill>
+              <a:latin typeface="Calibri"/>
+              <a:ea typeface="Calibri"/>
+              <a:cs typeface="Calibri"/>
+              <a:sym typeface="Calibri"/>
+            </a:endParaRPr>
+          </a:p>
+          <a:p>
+            <a:pPr indent="-182563" lvl="0" marL="182563" marR="0" rtl="0" algn="l">
+              <a:spcBef>
+                <a:spcPts val="1200"/>
+              </a:spcBef>
+              <a:spcAft>
+                <a:spcPts val="0"/>
+              </a:spcAft>
+              <a:buClr>
+                <a:srgbClr val="1E293B"/>
+              </a:buClr>
+              <a:buSzPts val="1150"/>
+              <a:buFont typeface="Noto Sans Symbols"/>
+              <a:buChar char="✔"/>
+            </a:pPr>
+            <a:r>
+              <a:rPr lang="en-US" sz="1150">
+                <a:solidFill>
+                  <a:srgbClr val="1E293B"/>
+                </a:solidFill>
+                <a:latin typeface="Calibri"/>
+                <a:ea typeface="Calibri"/>
+                <a:cs typeface="Calibri"/>
+                <a:sym typeface="Calibri"/>
+              </a:rPr>
+              <a:t>TDD용 단위 테스트 및 ArchUnit 아키텍처 규칙 검증 코드 자동 설계</a:t>
             </a:r>
             <a:endParaRPr sz="1150">
               <a:solidFill>
@@ -12972,6 +13009,43 @@
                 <a:sym typeface="Calibri"/>
               </a:rPr>
               <a:t>취소 시 좀비 방지 트리 강제 정리</a:t>
+            </a:r>
+            <a:endParaRPr sz="1050">
+              <a:solidFill>
+                <a:schemeClr val="dk1"/>
+              </a:solidFill>
+              <a:latin typeface="Calibri"/>
+              <a:ea typeface="Calibri"/>
+              <a:cs typeface="Calibri"/>
+              <a:sym typeface="Calibri"/>
+            </a:endParaRPr>
+          </a:p>
+          <a:p>
+            <a:pPr indent="-182563" lvl="0" marL="182563" marR="0" rtl="0" algn="l">
+              <a:spcBef>
+                <a:spcPts val="500"/>
+              </a:spcBef>
+              <a:spcAft>
+                <a:spcPts val="0"/>
+              </a:spcAft>
+              <a:buClr>
+                <a:srgbClr val="1E293B"/>
+              </a:buClr>
+              <a:buSzPts val="1050"/>
+              <a:buFont typeface="Noto Sans Symbols"/>
+              <a:buChar char="✔"/>
+            </a:pPr>
+            <a:r>
+              <a:rPr lang="en-US" sz="1050">
+                <a:solidFill>
+                  <a:srgbClr val="1E293B"/>
+                </a:solidFill>
+                <a:latin typeface="Calibri"/>
+                <a:ea typeface="Calibri"/>
+                <a:cs typeface="Calibri"/>
+                <a:sym typeface="Calibri"/>
+              </a:rPr>
+              <a:t>TDD 테스트 사전 공급 &amp; 자가 수정 피드백 루프</a:t>
             </a:r>
             <a:endParaRPr sz="1050">
               <a:solidFill>

--- a/docs/ReSet_Presentation.pptx
+++ b/docs/ReSet_Presentation.pptx
@@ -6077,31 +6077,31 @@
                 <a:cs typeface="Calibri"/>
                 <a:sym typeface="Calibri"/>
               </a:rPr>
-              <a:t>확장 속성(Description) 수집 및 설명 누락 AI 보완</a:t>
+              <a:t>T-SQL AST 기반 정적 분석 및 CRUD 테이블 기계적 분류 (ScriptDom)</a:t>
             </a:r>
             <a:endParaRPr sz="1150">
               <a:solidFill>
+                <a:schemeClr val="dk1"/>
+              </a:solidFill>
+              <a:latin typeface="Calibri"/>
+              <a:ea typeface="Calibri"/>
+              <a:cs typeface="Calibri"/>
+              <a:sym typeface="Calibri"/>
+            </a:endParaRPr>
+          </a:p>
+          <a:p>
+            <a:pPr indent="-182563" lvl="0" marL="182563" marR="0" rtl="0" algn="l">
+              <a:spcBef>
+                <a:spcPts val="1200"/>
+              </a:spcBef>
+              <a:spcAft>
+                <a:spcPts val="0"/>
+              </a:spcAft>
+              <a:buClr>
                 <a:srgbClr val="1E293B"/>
-              </a:solidFill>
-              <a:latin typeface="Calibri"/>
-              <a:ea typeface="Calibri"/>
-              <a:cs typeface="Calibri"/>
-              <a:sym typeface="Calibri"/>
-            </a:endParaRPr>
-          </a:p>
-          <a:p>
-            <a:pPr indent="-182563" lvl="0" marL="182563" marR="0" rtl="0" algn="l">
-              <a:spcBef>
-                <a:spcPts val="1200"/>
-              </a:spcBef>
-              <a:spcAft>
-                <a:spcPts val="0"/>
-              </a:spcAft>
-              <a:buClr>
-                <a:srgbClr val="1E293B"/>
               </a:buClr>
               <a:buSzPts val="1150"/>
-              <a:buFont typeface="Calibri"/>
+              <a:buFont typeface="Noto Sans Symbols"/>
               <a:buChar char="✔"/>
             </a:pPr>
             <a:r>
@@ -6114,8 +6114,33 @@
                 <a:cs typeface="Calibri"/>
                 <a:sym typeface="Calibri"/>
               </a:rPr>
-              <a:t xml:space="preserve">T-SQL AST </a:t>
-            </a:r>
+              <a:t>하이브리드 동적 SQL 및 Linked Server 원격 참조 정밀 탐지</a:t>
+            </a:r>
+            <a:endParaRPr sz="1150">
+              <a:solidFill>
+                <a:schemeClr val="dk1"/>
+              </a:solidFill>
+              <a:latin typeface="Calibri"/>
+              <a:ea typeface="Calibri"/>
+              <a:cs typeface="Calibri"/>
+              <a:sym typeface="Calibri"/>
+            </a:endParaRPr>
+          </a:p>
+          <a:p>
+            <a:pPr indent="-182563" lvl="0" marL="182563" marR="0" rtl="0" algn="l">
+              <a:spcBef>
+                <a:spcPts val="1200"/>
+              </a:spcBef>
+              <a:spcAft>
+                <a:spcPts val="0"/>
+              </a:spcAft>
+              <a:buClr>
+                <a:srgbClr val="1E293B"/>
+              </a:buClr>
+              <a:buSzPts val="1150"/>
+              <a:buFont typeface="Noto Sans Symbols"/>
+              <a:buChar char="✔"/>
+            </a:pPr>
             <a:r>
               <a:rPr lang="en-US" sz="1150">
                 <a:solidFill>
@@ -6126,11 +6151,11 @@
                 <a:cs typeface="Calibri"/>
                 <a:sym typeface="Calibri"/>
               </a:rPr>
-              <a:t>기반 정적 분석 (ScriptDom)</a:t>
+              <a:t>확장 속성(Description) 수집 및 설명 누락 AI 문맥 보완</a:t>
             </a:r>
             <a:endParaRPr sz="1150">
               <a:solidFill>
-                <a:srgbClr val="1E293B"/>
+                <a:schemeClr val="dk1"/>
               </a:solidFill>
               <a:latin typeface="Calibri"/>
               <a:ea typeface="Calibri"/>
@@ -6163,7 +6188,7 @@
                 <a:cs typeface="Calibri"/>
                 <a:sym typeface="Calibri"/>
               </a:rPr>
-              <a:t>코드-주석 불일치 감지 및 클렌징 SQL 스크립트 덤프</a:t>
+              <a:t>코드-주석 불일치 모순 감지 및 클렌징 SQL 스크립트 자동 덤프</a:t>
             </a:r>
             <a:endParaRPr sz="1150">
               <a:solidFill>
@@ -6200,7 +6225,7 @@
                 <a:cs typeface="Calibri"/>
                 <a:sym typeface="Calibri"/>
               </a:rPr>
-              <a:t>3단계 신뢰성 검증 파이프라인</a:t>
+              <a:t>3단계 신뢰성 검증 파이프라인 (L1 린터 ➔ L2 AI리뷰 ➔ L3 인간 승인)</a:t>
             </a:r>
             <a:endParaRPr sz="1150">
               <a:solidFill>
@@ -6441,7 +6466,7 @@
                 <a:cs typeface="Calibri"/>
                 <a:sym typeface="Calibri"/>
               </a:rPr>
-              <a:t>설계서 vs 신규 구현 소스코드 논리 Gap 분석</a:t>
+              <a:t>TDD용 단위 테스트 및 ArchUnit 아키텍처 제약 규칙 자동 설계 (선제 공급)</a:t>
             </a:r>
             <a:endParaRPr sz="1150">
               <a:solidFill>
@@ -6478,7 +6503,7 @@
                 <a:cs typeface="Calibri"/>
                 <a:sym typeface="Calibri"/>
               </a:rPr>
-              <a:t>테스트 케이스 및 참조 무결성 기반 모의 데이터 자동 설계</a:t>
+              <a:t>설계서 vs 신규 구현 소스코드 논리 Gap 분석 (L1/L2 구조 검증)</a:t>
             </a:r>
             <a:endParaRPr sz="1150">
               <a:solidFill>
@@ -6515,7 +6540,7 @@
                 <a:cs typeface="Calibri"/>
                 <a:sym typeface="Calibri"/>
               </a:rPr>
-              <a:t>샌드박스 DB Seeding 라이프사이클 격리 및 관리</a:t>
+              <a:t>테스트 케이스 및 참조 무결성 기반 모의 데이터 자동 설계</a:t>
             </a:r>
             <a:endParaRPr sz="1150">
               <a:solidFill>
@@ -6552,7 +6577,7 @@
                 <a:cs typeface="Calibri"/>
                 <a:sym typeface="Calibri"/>
               </a:rPr>
-              <a:t>양방향 런타임 결과 수집 및 1:1 값 정밀 대조</a:t>
+              <a:t>샌드박스 DB Seeding 및 Cleanup 라이프사이클 격리 관리</a:t>
             </a:r>
             <a:endParaRPr sz="1150">
               <a:solidFill>
@@ -6589,7 +6614,44 @@
                 <a:cs typeface="Calibri"/>
                 <a:sym typeface="Calibri"/>
               </a:rPr>
-              <a:t>TDD용 단위 테스트 및 ArchUnit 아키텍처 규칙 검증 코드 자동 설계</a:t>
+              <a:t>다형성 런타임 격리 실행 (C# 트랜잭션 롤백 및 Java IPC 통신)</a:t>
+            </a:r>
+            <a:endParaRPr sz="1150">
+              <a:solidFill>
+                <a:schemeClr val="dk1"/>
+              </a:solidFill>
+              <a:latin typeface="Calibri"/>
+              <a:ea typeface="Calibri"/>
+              <a:cs typeface="Calibri"/>
+              <a:sym typeface="Calibri"/>
+            </a:endParaRPr>
+          </a:p>
+          <a:p>
+            <a:pPr indent="-182563" lvl="0" marL="182563" marR="0" rtl="0" algn="l">
+              <a:spcBef>
+                <a:spcPts val="1200"/>
+              </a:spcBef>
+              <a:spcAft>
+                <a:spcPts val="0"/>
+              </a:spcAft>
+              <a:buClr>
+                <a:srgbClr val="1E293B"/>
+              </a:buClr>
+              <a:buSzPts val="1150"/>
+              <a:buFont typeface="Noto Sans Symbols"/>
+              <a:buChar char="✔"/>
+            </a:pPr>
+            <a:r>
+              <a:rPr lang="en-US" sz="1150">
+                <a:solidFill>
+                  <a:srgbClr val="1E293B"/>
+                </a:solidFill>
+                <a:latin typeface="Calibri"/>
+                <a:ea typeface="Calibri"/>
+                <a:cs typeface="Calibri"/>
+                <a:sym typeface="Calibri"/>
+              </a:rPr>
+              <a:t>양방향 런타임 결과 수집 및 1:1 값 정밀 대조 (DataComparison)</a:t>
             </a:r>
             <a:endParaRPr sz="1150">
               <a:solidFill>

--- a/docs/ReSet_Presentation.pptx
+++ b/docs/ReSet_Presentation.pptx
@@ -12433,7 +12433,7 @@
                 <a:cs typeface="Calibri"/>
                 <a:sym typeface="Calibri"/>
               </a:rPr>
-              <a:t>SP DDL &amp; 스키마 수집</a:t>
+              <a:t>SP DDL 및 스키마 정보 재귀 수집</a:t>
             </a:r>
             <a:endParaRPr sz="1050">
               <a:solidFill>
@@ -12470,7 +12470,7 @@
                 <a:cs typeface="Calibri"/>
                 <a:sym typeface="Calibri"/>
               </a:rPr>
-              <a:t>의존성 추적</a:t>
+              <a:t>DDL 해시 시그니처 기반 로컬 증분 분석 캐싱</a:t>
             </a:r>
             <a:endParaRPr sz="1050">
               <a:solidFill>
@@ -12483,33 +12483,28 @@
             </a:endParaRPr>
           </a:p>
           <a:p>
-            <a:pPr indent="-182563" lvl="0" marL="182563" marR="0" rtl="0" algn="l">
-              <a:spcBef>
-                <a:spcPts val="500"/>
-              </a:spcBef>
-              <a:spcAft>
-                <a:spcPts val="0"/>
-              </a:spcAft>
-              <a:buClr>
-                <a:srgbClr val="1E293B"/>
-              </a:buClr>
-              <a:buSzPts val="1050"/>
-              <a:buFont typeface="Noto Sans Symbols"/>
-              <a:buChar char="✔"/>
-            </a:pPr>
-            <a:r>
-              <a:rPr lang="en-US" sz="1050">
-                <a:solidFill>
-                  <a:srgbClr val="1E293B"/>
+            <a:pPr indent="-142875" lvl="1" marL="325438" marR="0" rtl="0" algn="l">
+              <a:spcBef>
+                <a:spcPts val="200"/>
+              </a:spcBef>
+              <a:spcAft>
+                <a:spcPts val="0"/>
+              </a:spcAft>
+              <a:buNone/>
+            </a:pPr>
+            <a:r>
+              <a:rPr lang="en-US" sz="950">
+                <a:solidFill>
+                  <a:srgbClr val="475569"/>
                 </a:solidFill>
                 <a:latin typeface="Calibri"/>
                 <a:ea typeface="Calibri"/>
                 <a:cs typeface="Calibri"/>
                 <a:sym typeface="Calibri"/>
               </a:rPr>
-              <a:t>3단계 신뢰성 검증 파이프라인</a:t>
-            </a:r>
-            <a:endParaRPr sz="1050">
+              <a:t>- API 토큰 비용 및 대기 시간 최소화</a:t>
+            </a:r>
+            <a:endParaRPr sz="950">
               <a:solidFill>
                 <a:schemeClr val="dk1"/>
               </a:solidFill>
@@ -12544,7 +12539,7 @@
                 <a:cs typeface="Calibri"/>
                 <a:sym typeface="Calibri"/>
               </a:rPr>
-              <a:t>L1/L2 자가보완 및 TUI 미리보기</a:t>
+              <a:t>3단계 신뢰성 검증 파이프라인 (L1~L3) 명세서 확정</a:t>
             </a:r>
             <a:endParaRPr sz="1050">
               <a:solidFill>
@@ -12581,44 +12576,7 @@
                 <a:cs typeface="Calibri"/>
                 <a:sym typeface="Calibri"/>
               </a:rPr>
-              <a:t>DDL 해시 증분 분석 캐싱</a:t>
-            </a:r>
-            <a:endParaRPr sz="1050">
-              <a:solidFill>
-                <a:schemeClr val="dk1"/>
-              </a:solidFill>
-              <a:latin typeface="Calibri"/>
-              <a:ea typeface="Calibri"/>
-              <a:cs typeface="Calibri"/>
-              <a:sym typeface="Calibri"/>
-            </a:endParaRPr>
-          </a:p>
-          <a:p>
-            <a:pPr indent="-182563" lvl="0" marL="182563" marR="0" rtl="0" algn="l">
-              <a:spcBef>
-                <a:spcPts val="500"/>
-              </a:spcBef>
-              <a:spcAft>
-                <a:spcPts val="0"/>
-              </a:spcAft>
-              <a:buClr>
-                <a:srgbClr val="1E293B"/>
-              </a:buClr>
-              <a:buSzPts val="1050"/>
-              <a:buFont typeface="Noto Sans Symbols"/>
-              <a:buChar char="✔"/>
-            </a:pPr>
-            <a:r>
-              <a:rPr lang="en-US" sz="1050">
-                <a:solidFill>
-                  <a:srgbClr val="1E293B"/>
-                </a:solidFill>
-                <a:latin typeface="Calibri"/>
-                <a:ea typeface="Calibri"/>
-                <a:cs typeface="Calibri"/>
-                <a:sym typeface="Calibri"/>
-              </a:rPr>
-              <a:t>API 토큰 비용 및 대기시간 최소화</a:t>
+              <a:t>상수 분기 및 데이터 프로파일링 기반 통합 정산 정책서 도출</a:t>
             </a:r>
             <a:endParaRPr sz="1050">
               <a:solidFill>
@@ -12885,7 +12843,7 @@
                 <a:cs typeface="Calibri"/>
                 <a:sym typeface="Calibri"/>
               </a:rPr>
-              <a:t>TUI 순차 선택 기반 배치 순서 확보</a:t>
+              <a:t>TUI 순차 선택 기반 배치 실행 단계 순서 확보</a:t>
             </a:r>
             <a:endParaRPr sz="1050">
               <a:solidFill>
@@ -12922,7 +12880,7 @@
                 <a:cs typeface="Calibri"/>
                 <a:sym typeface="Calibri"/>
               </a:rPr>
-              <a:t>작업 지시서 번들 패키징</a:t>
+              <a:t>마이그레이션 지시서 번들 패키징 (설계서, DDL, 스키마 통합)</a:t>
             </a:r>
             <a:endParaRPr sz="1050">
               <a:solidFill>
@@ -12959,7 +12917,7 @@
                 <a:cs typeface="Calibri"/>
                 <a:sym typeface="Calibri"/>
               </a:rPr>
-              <a:t>설계서 및 DB 메타데이터 번들화</a:t>
+              <a:t>TDD용 단위 테스트 및 ArchUnit 아키텍처 규칙 코드 선제 공급</a:t>
             </a:r>
             <a:endParaRPr sz="1050">
               <a:solidFill>
@@ -12996,7 +12954,7 @@
                 <a:cs typeface="Calibri"/>
                 <a:sym typeface="Calibri"/>
               </a:rPr>
-              <a:t>외부 코딩 에이전트 자동 기동</a:t>
+              <a:t>외부 코딩 에이전트 자동 기동 및 자가 수정 피드백 루프 가동</a:t>
             </a:r>
             <a:endParaRPr sz="1050">
               <a:solidFill>
@@ -13033,81 +12991,7 @@
                 <a:cs typeface="Calibri"/>
                 <a:sym typeface="Calibri"/>
               </a:rPr>
-              <a:t>부모 콘솔 상속 연동 및 양방향 제어</a:t>
-            </a:r>
-            <a:endParaRPr sz="1050">
-              <a:solidFill>
-                <a:schemeClr val="dk1"/>
-              </a:solidFill>
-              <a:latin typeface="Calibri"/>
-              <a:ea typeface="Calibri"/>
-              <a:cs typeface="Calibri"/>
-              <a:sym typeface="Calibri"/>
-            </a:endParaRPr>
-          </a:p>
-          <a:p>
-            <a:pPr indent="-182563" lvl="0" marL="182563" marR="0" rtl="0" algn="l">
-              <a:spcBef>
-                <a:spcPts val="500"/>
-              </a:spcBef>
-              <a:spcAft>
-                <a:spcPts val="0"/>
-              </a:spcAft>
-              <a:buClr>
-                <a:srgbClr val="1E293B"/>
-              </a:buClr>
-              <a:buSzPts val="1050"/>
-              <a:buFont typeface="Noto Sans Symbols"/>
-              <a:buChar char="✔"/>
-            </a:pPr>
-            <a:r>
-              <a:rPr lang="en-US" sz="1050">
-                <a:solidFill>
-                  <a:srgbClr val="1E293B"/>
-                </a:solidFill>
-                <a:latin typeface="Calibri"/>
-                <a:ea typeface="Calibri"/>
-                <a:cs typeface="Calibri"/>
-                <a:sym typeface="Calibri"/>
-              </a:rPr>
-              <a:t>취소 시 좀비 방지 트리 강제 정리</a:t>
-            </a:r>
-            <a:endParaRPr sz="1050">
-              <a:solidFill>
-                <a:schemeClr val="dk1"/>
-              </a:solidFill>
-              <a:latin typeface="Calibri"/>
-              <a:ea typeface="Calibri"/>
-              <a:cs typeface="Calibri"/>
-              <a:sym typeface="Calibri"/>
-            </a:endParaRPr>
-          </a:p>
-          <a:p>
-            <a:pPr indent="-182563" lvl="0" marL="182563" marR="0" rtl="0" algn="l">
-              <a:spcBef>
-                <a:spcPts val="500"/>
-              </a:spcBef>
-              <a:spcAft>
-                <a:spcPts val="0"/>
-              </a:spcAft>
-              <a:buClr>
-                <a:srgbClr val="1E293B"/>
-              </a:buClr>
-              <a:buSzPts val="1050"/>
-              <a:buFont typeface="Noto Sans Symbols"/>
-              <a:buChar char="✔"/>
-            </a:pPr>
-            <a:r>
-              <a:rPr lang="en-US" sz="1050">
-                <a:solidFill>
-                  <a:srgbClr val="1E293B"/>
-                </a:solidFill>
-                <a:latin typeface="Calibri"/>
-                <a:ea typeface="Calibri"/>
-                <a:cs typeface="Calibri"/>
-                <a:sym typeface="Calibri"/>
-              </a:rPr>
-              <a:t>TDD 테스트 사전 공급 &amp; 자가 수정 피드백 루프</a:t>
+              <a:t>부모 콘솔 상속 연동 및 좀비 프로세스 방지 트리 강제 정리</a:t>
             </a:r>
             <a:endParaRPr sz="1050">
               <a:solidFill>
@@ -13374,7 +13258,7 @@
                 <a:cs typeface="Calibri"/>
                 <a:sym typeface="Calibri"/>
               </a:rPr>
-              <a:t>소스코드-설계서 Gap 분석</a:t>
+              <a:t>소스코드 vs 설계서 구조 및 논리 일치성 Gap 분석</a:t>
             </a:r>
             <a:endParaRPr sz="1050">
               <a:solidFill>
@@ -13411,7 +13295,7 @@
                 <a:cs typeface="Calibri"/>
                 <a:sym typeface="Calibri"/>
               </a:rPr>
-              <a:t>Sandbox 결과 1:1 비교</a:t>
+              <a:t>관계지향 모의 데이터(Mock Data) 자동 설계 및 Sandbox DB 적재</a:t>
             </a:r>
             <a:endParaRPr sz="1050">
               <a:solidFill>
@@ -13448,7 +13332,7 @@
                 <a:cs typeface="Calibri"/>
                 <a:sym typeface="Calibri"/>
               </a:rPr>
-              <a:t>관계형 모의 데이터 적재/소거</a:t>
+              <a:t>양방향(Legacy vs Target) 실행 결과 데이터 수집 및 Sandbox Cleanup</a:t>
             </a:r>
             <a:endParaRPr sz="1050">
               <a:solidFill>
@@ -13485,7 +13369,7 @@
                 <a:cs typeface="Calibri"/>
                 <a:sym typeface="Calibri"/>
               </a:rPr>
-              <a:t>양방향 실행 덤프 값 정밀 대조</a:t>
+              <a:t>결과셋 데이터 1:1 정밀 대조 및 데이터 정합성 비교 보고서 발행</a:t>
             </a:r>
             <a:endParaRPr sz="1050">
               <a:solidFill>
@@ -13522,7 +13406,7 @@
                 <a:cs typeface="Calibri"/>
                 <a:sym typeface="Calibri"/>
               </a:rPr>
-              <a:t>정합성 결함 시 3단계 복구 루프</a:t>
+              <a:t>정합성 결함 발생 시 3단계 복구 피드백 루프 작동</a:t>
             </a:r>
             <a:endParaRPr sz="1050">
               <a:solidFill>
@@ -13559,7 +13443,7 @@
                 <a:cs typeface="Calibri"/>
                 <a:sym typeface="Calibri"/>
               </a:rPr>
-              <a:t>설계 재수립</a:t>
+              <a:t>루프 A (설계서 재수립)</a:t>
             </a:r>
             <a:endParaRPr sz="1050">
               <a:solidFill>
@@ -13596,7 +13480,7 @@
                 <a:cs typeface="Calibri"/>
                 <a:sym typeface="Calibri"/>
               </a:rPr>
-              <a:t>소스코드 보완</a:t>
+              <a:t>루프 B (소스코드 보완)</a:t>
             </a:r>
             <a:endParaRPr sz="1050">
               <a:solidFill>
@@ -13633,7 +13517,7 @@
                 <a:cs typeface="Calibri"/>
                 <a:sym typeface="Calibri"/>
               </a:rPr>
-              <a:t>테스트 튜닝</a:t>
+              <a:t>루프 C (테스트 튜닝)</a:t>
             </a:r>
             <a:endParaRPr sz="1050">
               <a:solidFill>

--- a/docs/ReSet_Presentation.pptx
+++ b/docs/ReSet_Presentation.pptx
@@ -348,104 +348,239 @@
             <a:noAutofit/>
           </a:bodyPr>
           <a:lstStyle>
-            <a:lvl1pPr indent="-298450" lvl="0" marL="457200">
-              <a:spcBef>
-                <a:spcPts val="0"/>
-              </a:spcBef>
-              <a:spcAft>
-                <a:spcPts val="0"/>
-              </a:spcAft>
+            <a:lvl1pPr indent="-298450" lvl="0" marL="457200" marR="0" rtl="0" algn="l">
+              <a:lnSpc>
+                <a:spcPct val="100000"/>
+              </a:lnSpc>
+              <a:spcBef>
+                <a:spcPts val="0"/>
+              </a:spcBef>
+              <a:spcAft>
+                <a:spcPts val="0"/>
+              </a:spcAft>
+              <a:buClr>
+                <a:srgbClr val="000000"/>
+              </a:buClr>
               <a:buSzPts val="1100"/>
+              <a:buFont typeface="Arial"/>
               <a:buChar char="●"/>
-              <a:defRPr sz="1100"/>
+              <a:defRPr b="0" i="0" sz="1100" u="none" cap="none" strike="noStrike">
+                <a:solidFill>
+                  <a:srgbClr val="000000"/>
+                </a:solidFill>
+                <a:latin typeface="Arial"/>
+                <a:ea typeface="Arial"/>
+                <a:cs typeface="Arial"/>
+                <a:sym typeface="Arial"/>
+              </a:defRPr>
             </a:lvl1pPr>
-            <a:lvl2pPr indent="-298450" lvl="1" marL="914400">
-              <a:spcBef>
-                <a:spcPts val="0"/>
-              </a:spcBef>
-              <a:spcAft>
-                <a:spcPts val="0"/>
-              </a:spcAft>
+            <a:lvl2pPr indent="-298450" lvl="1" marL="914400" marR="0" rtl="0" algn="l">
+              <a:lnSpc>
+                <a:spcPct val="100000"/>
+              </a:lnSpc>
+              <a:spcBef>
+                <a:spcPts val="0"/>
+              </a:spcBef>
+              <a:spcAft>
+                <a:spcPts val="0"/>
+              </a:spcAft>
+              <a:buClr>
+                <a:srgbClr val="000000"/>
+              </a:buClr>
               <a:buSzPts val="1100"/>
+              <a:buFont typeface="Arial"/>
               <a:buChar char="○"/>
-              <a:defRPr sz="1100"/>
+              <a:defRPr b="0" i="0" sz="1100" u="none" cap="none" strike="noStrike">
+                <a:solidFill>
+                  <a:srgbClr val="000000"/>
+                </a:solidFill>
+                <a:latin typeface="Arial"/>
+                <a:ea typeface="Arial"/>
+                <a:cs typeface="Arial"/>
+                <a:sym typeface="Arial"/>
+              </a:defRPr>
             </a:lvl2pPr>
-            <a:lvl3pPr indent="-298450" lvl="2" marL="1371600">
-              <a:spcBef>
-                <a:spcPts val="0"/>
-              </a:spcBef>
-              <a:spcAft>
-                <a:spcPts val="0"/>
-              </a:spcAft>
+            <a:lvl3pPr indent="-298450" lvl="2" marL="1371600" marR="0" rtl="0" algn="l">
+              <a:lnSpc>
+                <a:spcPct val="100000"/>
+              </a:lnSpc>
+              <a:spcBef>
+                <a:spcPts val="0"/>
+              </a:spcBef>
+              <a:spcAft>
+                <a:spcPts val="0"/>
+              </a:spcAft>
+              <a:buClr>
+                <a:srgbClr val="000000"/>
+              </a:buClr>
               <a:buSzPts val="1100"/>
+              <a:buFont typeface="Arial"/>
               <a:buChar char="■"/>
-              <a:defRPr sz="1100"/>
+              <a:defRPr b="0" i="0" sz="1100" u="none" cap="none" strike="noStrike">
+                <a:solidFill>
+                  <a:srgbClr val="000000"/>
+                </a:solidFill>
+                <a:latin typeface="Arial"/>
+                <a:ea typeface="Arial"/>
+                <a:cs typeface="Arial"/>
+                <a:sym typeface="Arial"/>
+              </a:defRPr>
             </a:lvl3pPr>
-            <a:lvl4pPr indent="-298450" lvl="3" marL="1828800">
-              <a:spcBef>
-                <a:spcPts val="0"/>
-              </a:spcBef>
-              <a:spcAft>
-                <a:spcPts val="0"/>
-              </a:spcAft>
+            <a:lvl4pPr indent="-298450" lvl="3" marL="1828800" marR="0" rtl="0" algn="l">
+              <a:lnSpc>
+                <a:spcPct val="100000"/>
+              </a:lnSpc>
+              <a:spcBef>
+                <a:spcPts val="0"/>
+              </a:spcBef>
+              <a:spcAft>
+                <a:spcPts val="0"/>
+              </a:spcAft>
+              <a:buClr>
+                <a:srgbClr val="000000"/>
+              </a:buClr>
               <a:buSzPts val="1100"/>
+              <a:buFont typeface="Arial"/>
               <a:buChar char="●"/>
-              <a:defRPr sz="1100"/>
+              <a:defRPr b="0" i="0" sz="1100" u="none" cap="none" strike="noStrike">
+                <a:solidFill>
+                  <a:srgbClr val="000000"/>
+                </a:solidFill>
+                <a:latin typeface="Arial"/>
+                <a:ea typeface="Arial"/>
+                <a:cs typeface="Arial"/>
+                <a:sym typeface="Arial"/>
+              </a:defRPr>
             </a:lvl4pPr>
-            <a:lvl5pPr indent="-298450" lvl="4" marL="2286000">
-              <a:spcBef>
-                <a:spcPts val="0"/>
-              </a:spcBef>
-              <a:spcAft>
-                <a:spcPts val="0"/>
-              </a:spcAft>
+            <a:lvl5pPr indent="-298450" lvl="4" marL="2286000" marR="0" rtl="0" algn="l">
+              <a:lnSpc>
+                <a:spcPct val="100000"/>
+              </a:lnSpc>
+              <a:spcBef>
+                <a:spcPts val="0"/>
+              </a:spcBef>
+              <a:spcAft>
+                <a:spcPts val="0"/>
+              </a:spcAft>
+              <a:buClr>
+                <a:srgbClr val="000000"/>
+              </a:buClr>
               <a:buSzPts val="1100"/>
+              <a:buFont typeface="Arial"/>
               <a:buChar char="○"/>
-              <a:defRPr sz="1100"/>
+              <a:defRPr b="0" i="0" sz="1100" u="none" cap="none" strike="noStrike">
+                <a:solidFill>
+                  <a:srgbClr val="000000"/>
+                </a:solidFill>
+                <a:latin typeface="Arial"/>
+                <a:ea typeface="Arial"/>
+                <a:cs typeface="Arial"/>
+                <a:sym typeface="Arial"/>
+              </a:defRPr>
             </a:lvl5pPr>
-            <a:lvl6pPr indent="-298450" lvl="5" marL="2743200">
-              <a:spcBef>
-                <a:spcPts val="0"/>
-              </a:spcBef>
-              <a:spcAft>
-                <a:spcPts val="0"/>
-              </a:spcAft>
+            <a:lvl6pPr indent="-298450" lvl="5" marL="2743200" marR="0" rtl="0" algn="l">
+              <a:lnSpc>
+                <a:spcPct val="100000"/>
+              </a:lnSpc>
+              <a:spcBef>
+                <a:spcPts val="0"/>
+              </a:spcBef>
+              <a:spcAft>
+                <a:spcPts val="0"/>
+              </a:spcAft>
+              <a:buClr>
+                <a:srgbClr val="000000"/>
+              </a:buClr>
               <a:buSzPts val="1100"/>
+              <a:buFont typeface="Arial"/>
               <a:buChar char="■"/>
-              <a:defRPr sz="1100"/>
+              <a:defRPr b="0" i="0" sz="1100" u="none" cap="none" strike="noStrike">
+                <a:solidFill>
+                  <a:srgbClr val="000000"/>
+                </a:solidFill>
+                <a:latin typeface="Arial"/>
+                <a:ea typeface="Arial"/>
+                <a:cs typeface="Arial"/>
+                <a:sym typeface="Arial"/>
+              </a:defRPr>
             </a:lvl6pPr>
-            <a:lvl7pPr indent="-298450" lvl="6" marL="3200400">
-              <a:spcBef>
-                <a:spcPts val="0"/>
-              </a:spcBef>
-              <a:spcAft>
-                <a:spcPts val="0"/>
-              </a:spcAft>
+            <a:lvl7pPr indent="-298450" lvl="6" marL="3200400" marR="0" rtl="0" algn="l">
+              <a:lnSpc>
+                <a:spcPct val="100000"/>
+              </a:lnSpc>
+              <a:spcBef>
+                <a:spcPts val="0"/>
+              </a:spcBef>
+              <a:spcAft>
+                <a:spcPts val="0"/>
+              </a:spcAft>
+              <a:buClr>
+                <a:srgbClr val="000000"/>
+              </a:buClr>
               <a:buSzPts val="1100"/>
+              <a:buFont typeface="Arial"/>
               <a:buChar char="●"/>
-              <a:defRPr sz="1100"/>
+              <a:defRPr b="0" i="0" sz="1100" u="none" cap="none" strike="noStrike">
+                <a:solidFill>
+                  <a:srgbClr val="000000"/>
+                </a:solidFill>
+                <a:latin typeface="Arial"/>
+                <a:ea typeface="Arial"/>
+                <a:cs typeface="Arial"/>
+                <a:sym typeface="Arial"/>
+              </a:defRPr>
             </a:lvl7pPr>
-            <a:lvl8pPr indent="-298450" lvl="7" marL="3657600">
-              <a:spcBef>
-                <a:spcPts val="0"/>
-              </a:spcBef>
-              <a:spcAft>
-                <a:spcPts val="0"/>
-              </a:spcAft>
+            <a:lvl8pPr indent="-298450" lvl="7" marL="3657600" marR="0" rtl="0" algn="l">
+              <a:lnSpc>
+                <a:spcPct val="100000"/>
+              </a:lnSpc>
+              <a:spcBef>
+                <a:spcPts val="0"/>
+              </a:spcBef>
+              <a:spcAft>
+                <a:spcPts val="0"/>
+              </a:spcAft>
+              <a:buClr>
+                <a:srgbClr val="000000"/>
+              </a:buClr>
               <a:buSzPts val="1100"/>
+              <a:buFont typeface="Arial"/>
               <a:buChar char="○"/>
-              <a:defRPr sz="1100"/>
+              <a:defRPr b="0" i="0" sz="1100" u="none" cap="none" strike="noStrike">
+                <a:solidFill>
+                  <a:srgbClr val="000000"/>
+                </a:solidFill>
+                <a:latin typeface="Arial"/>
+                <a:ea typeface="Arial"/>
+                <a:cs typeface="Arial"/>
+                <a:sym typeface="Arial"/>
+              </a:defRPr>
             </a:lvl8pPr>
-            <a:lvl9pPr indent="-298450" lvl="8" marL="4114800">
-              <a:spcBef>
-                <a:spcPts val="0"/>
-              </a:spcBef>
-              <a:spcAft>
-                <a:spcPts val="0"/>
-              </a:spcAft>
+            <a:lvl9pPr indent="-298450" lvl="8" marL="4114800" marR="0" rtl="0" algn="l">
+              <a:lnSpc>
+                <a:spcPct val="100000"/>
+              </a:lnSpc>
+              <a:spcBef>
+                <a:spcPts val="0"/>
+              </a:spcBef>
+              <a:spcAft>
+                <a:spcPts val="0"/>
+              </a:spcAft>
+              <a:buClr>
+                <a:srgbClr val="000000"/>
+              </a:buClr>
               <a:buSzPts val="1100"/>
+              <a:buFont typeface="Arial"/>
               <a:buChar char="■"/>
-              <a:defRPr sz="1100"/>
+              <a:defRPr b="0" i="0" sz="1100" u="none" cap="none" strike="noStrike">
+                <a:solidFill>
+                  <a:srgbClr val="000000"/>
+                </a:solidFill>
+                <a:latin typeface="Arial"/>
+                <a:ea typeface="Arial"/>
+                <a:cs typeface="Arial"/>
+                <a:sym typeface="Arial"/>
+              </a:defRPr>
             </a:lvl9pPr>
           </a:lstStyle>
           <a:p/>
@@ -770,12 +905,16 @@
           <a:lstStyle/>
           <a:p>
             <a:pPr indent="0" lvl="0" marL="0" marR="0" rtl="0" algn="l">
-              <a:spcBef>
-                <a:spcPts val="0"/>
-              </a:spcBef>
-              <a:spcAft>
-                <a:spcPts val="0"/>
-              </a:spcAft>
+              <a:lnSpc>
+                <a:spcPct val="100000"/>
+              </a:lnSpc>
+              <a:spcBef>
+                <a:spcPts val="0"/>
+              </a:spcBef>
+              <a:spcAft>
+                <a:spcPts val="0"/>
+              </a:spcAft>
+              <a:buSzPts val="1100"/>
               <a:buNone/>
             </a:pPr>
             <a:r>
@@ -821,16 +960,24 @@
           <a:lstStyle/>
           <a:p>
             <a:pPr indent="0" lvl="0" marL="0" marR="0" rtl="0" algn="l">
-              <a:spcBef>
-                <a:spcPts val="0"/>
-              </a:spcBef>
-              <a:spcAft>
-                <a:spcPts val="0"/>
-              </a:spcAft>
+              <a:lnSpc>
+                <a:spcPct val="100000"/>
+              </a:lnSpc>
+              <a:spcBef>
+                <a:spcPts val="0"/>
+              </a:spcBef>
+              <a:spcAft>
+                <a:spcPts val="0"/>
+              </a:spcAft>
+              <a:buClr>
+                <a:srgbClr val="000000"/>
+              </a:buClr>
+              <a:buSzPts val="1800"/>
+              <a:buFont typeface="Arial"/>
               <a:buNone/>
             </a:pPr>
             <a:fld id="{00000000-1234-1234-1234-123412341234}" type="slidenum">
-              <a:rPr lang="en-US" sz="1800">
+              <a:rPr b="0" i="0" lang="en-US" sz="1800" u="none" cap="none" strike="noStrike">
                 <a:solidFill>
                   <a:schemeClr val="dk1"/>
                 </a:solidFill>
@@ -841,7 +988,7 @@
               </a:rPr>
               <a:t>‹#›</a:t>
             </a:fld>
-            <a:endParaRPr sz="1800">
+            <a:endParaRPr b="0" i="0" sz="1800" u="none" cap="none" strike="noStrike">
               <a:solidFill>
                 <a:schemeClr val="dk1"/>
               </a:solidFill>
@@ -945,12 +1092,16 @@
           <a:lstStyle/>
           <a:p>
             <a:pPr indent="0" lvl="0" marL="0" marR="0" rtl="0" algn="l">
-              <a:spcBef>
-                <a:spcPts val="0"/>
-              </a:spcBef>
-              <a:spcAft>
-                <a:spcPts val="0"/>
-              </a:spcAft>
+              <a:lnSpc>
+                <a:spcPct val="100000"/>
+              </a:lnSpc>
+              <a:spcBef>
+                <a:spcPts val="0"/>
+              </a:spcBef>
+              <a:spcAft>
+                <a:spcPts val="0"/>
+              </a:spcAft>
+              <a:buSzPts val="1100"/>
               <a:buNone/>
             </a:pPr>
             <a:r>
@@ -996,16 +1147,24 @@
           <a:lstStyle/>
           <a:p>
             <a:pPr indent="0" lvl="0" marL="0" marR="0" rtl="0" algn="l">
-              <a:spcBef>
-                <a:spcPts val="0"/>
-              </a:spcBef>
-              <a:spcAft>
-                <a:spcPts val="0"/>
-              </a:spcAft>
+              <a:lnSpc>
+                <a:spcPct val="100000"/>
+              </a:lnSpc>
+              <a:spcBef>
+                <a:spcPts val="0"/>
+              </a:spcBef>
+              <a:spcAft>
+                <a:spcPts val="0"/>
+              </a:spcAft>
+              <a:buClr>
+                <a:srgbClr val="000000"/>
+              </a:buClr>
+              <a:buSzPts val="1800"/>
+              <a:buFont typeface="Arial"/>
               <a:buNone/>
             </a:pPr>
             <a:fld id="{00000000-1234-1234-1234-123412341234}" type="slidenum">
-              <a:rPr lang="en-US" sz="1800">
+              <a:rPr b="0" i="0" lang="en-US" sz="1800" u="none" cap="none" strike="noStrike">
                 <a:solidFill>
                   <a:schemeClr val="dk1"/>
                 </a:solidFill>
@@ -1016,7 +1175,7 @@
               </a:rPr>
               <a:t>‹#›</a:t>
             </a:fld>
-            <a:endParaRPr sz="1800">
+            <a:endParaRPr b="0" i="0" sz="1800" u="none" cap="none" strike="noStrike">
               <a:solidFill>
                 <a:schemeClr val="dk1"/>
               </a:solidFill>
@@ -1120,12 +1279,16 @@
           <a:lstStyle/>
           <a:p>
             <a:pPr indent="0" lvl="0" marL="0" marR="0" rtl="0" algn="l">
-              <a:spcBef>
-                <a:spcPts val="0"/>
-              </a:spcBef>
-              <a:spcAft>
-                <a:spcPts val="0"/>
-              </a:spcAft>
+              <a:lnSpc>
+                <a:spcPct val="100000"/>
+              </a:lnSpc>
+              <a:spcBef>
+                <a:spcPts val="0"/>
+              </a:spcBef>
+              <a:spcAft>
+                <a:spcPts val="0"/>
+              </a:spcAft>
+              <a:buSzPts val="1100"/>
               <a:buNone/>
             </a:pPr>
             <a:r>
@@ -1171,16 +1334,24 @@
           <a:lstStyle/>
           <a:p>
             <a:pPr indent="0" lvl="0" marL="0" marR="0" rtl="0" algn="l">
-              <a:spcBef>
-                <a:spcPts val="0"/>
-              </a:spcBef>
-              <a:spcAft>
-                <a:spcPts val="0"/>
-              </a:spcAft>
+              <a:lnSpc>
+                <a:spcPct val="100000"/>
+              </a:lnSpc>
+              <a:spcBef>
+                <a:spcPts val="0"/>
+              </a:spcBef>
+              <a:spcAft>
+                <a:spcPts val="0"/>
+              </a:spcAft>
+              <a:buClr>
+                <a:srgbClr val="000000"/>
+              </a:buClr>
+              <a:buSzPts val="1800"/>
+              <a:buFont typeface="Arial"/>
               <a:buNone/>
             </a:pPr>
             <a:fld id="{00000000-1234-1234-1234-123412341234}" type="slidenum">
-              <a:rPr lang="en-US" sz="1800">
+              <a:rPr b="0" i="0" lang="en-US" sz="1800" u="none" cap="none" strike="noStrike">
                 <a:solidFill>
                   <a:schemeClr val="dk1"/>
                 </a:solidFill>
@@ -1191,7 +1362,7 @@
               </a:rPr>
               <a:t>‹#›</a:t>
             </a:fld>
-            <a:endParaRPr sz="1800">
+            <a:endParaRPr b="0" i="0" sz="1800" u="none" cap="none" strike="noStrike">
               <a:solidFill>
                 <a:schemeClr val="dk1"/>
               </a:solidFill>
@@ -1295,12 +1466,16 @@
           <a:lstStyle/>
           <a:p>
             <a:pPr indent="0" lvl="0" marL="0" marR="0" rtl="0" algn="l">
-              <a:spcBef>
-                <a:spcPts val="0"/>
-              </a:spcBef>
-              <a:spcAft>
-                <a:spcPts val="0"/>
-              </a:spcAft>
+              <a:lnSpc>
+                <a:spcPct val="100000"/>
+              </a:lnSpc>
+              <a:spcBef>
+                <a:spcPts val="0"/>
+              </a:spcBef>
+              <a:spcAft>
+                <a:spcPts val="0"/>
+              </a:spcAft>
+              <a:buSzPts val="1100"/>
               <a:buNone/>
             </a:pPr>
             <a:r>
@@ -1346,16 +1521,24 @@
           <a:lstStyle/>
           <a:p>
             <a:pPr indent="0" lvl="0" marL="0" marR="0" rtl="0" algn="l">
-              <a:spcBef>
-                <a:spcPts val="0"/>
-              </a:spcBef>
-              <a:spcAft>
-                <a:spcPts val="0"/>
-              </a:spcAft>
+              <a:lnSpc>
+                <a:spcPct val="100000"/>
+              </a:lnSpc>
+              <a:spcBef>
+                <a:spcPts val="0"/>
+              </a:spcBef>
+              <a:spcAft>
+                <a:spcPts val="0"/>
+              </a:spcAft>
+              <a:buClr>
+                <a:srgbClr val="000000"/>
+              </a:buClr>
+              <a:buSzPts val="1800"/>
+              <a:buFont typeface="Arial"/>
               <a:buNone/>
             </a:pPr>
             <a:fld id="{00000000-1234-1234-1234-123412341234}" type="slidenum">
-              <a:rPr lang="en-US" sz="1800">
+              <a:rPr b="0" i="0" lang="en-US" sz="1800" u="none" cap="none" strike="noStrike">
                 <a:solidFill>
                   <a:schemeClr val="dk1"/>
                 </a:solidFill>
@@ -1366,7 +1549,7 @@
               </a:rPr>
               <a:t>‹#›</a:t>
             </a:fld>
-            <a:endParaRPr sz="1800">
+            <a:endParaRPr b="0" i="0" sz="1800" u="none" cap="none" strike="noStrike">
               <a:solidFill>
                 <a:schemeClr val="dk1"/>
               </a:solidFill>
@@ -1470,12 +1653,16 @@
           <a:lstStyle/>
           <a:p>
             <a:pPr indent="0" lvl="0" marL="0" marR="0" rtl="0" algn="l">
-              <a:spcBef>
-                <a:spcPts val="0"/>
-              </a:spcBef>
-              <a:spcAft>
-                <a:spcPts val="0"/>
-              </a:spcAft>
+              <a:lnSpc>
+                <a:spcPct val="100000"/>
+              </a:lnSpc>
+              <a:spcBef>
+                <a:spcPts val="0"/>
+              </a:spcBef>
+              <a:spcAft>
+                <a:spcPts val="0"/>
+              </a:spcAft>
+              <a:buSzPts val="1100"/>
               <a:buNone/>
             </a:pPr>
             <a:r>
@@ -1521,16 +1708,24 @@
           <a:lstStyle/>
           <a:p>
             <a:pPr indent="0" lvl="0" marL="0" marR="0" rtl="0" algn="l">
-              <a:spcBef>
-                <a:spcPts val="0"/>
-              </a:spcBef>
-              <a:spcAft>
-                <a:spcPts val="0"/>
-              </a:spcAft>
+              <a:lnSpc>
+                <a:spcPct val="100000"/>
+              </a:lnSpc>
+              <a:spcBef>
+                <a:spcPts val="0"/>
+              </a:spcBef>
+              <a:spcAft>
+                <a:spcPts val="0"/>
+              </a:spcAft>
+              <a:buClr>
+                <a:srgbClr val="000000"/>
+              </a:buClr>
+              <a:buSzPts val="1800"/>
+              <a:buFont typeface="Arial"/>
               <a:buNone/>
             </a:pPr>
             <a:fld id="{00000000-1234-1234-1234-123412341234}" type="slidenum">
-              <a:rPr lang="en-US" sz="1800">
+              <a:rPr b="0" i="0" lang="en-US" sz="1800" u="none" cap="none" strike="noStrike">
                 <a:solidFill>
                   <a:schemeClr val="dk1"/>
                 </a:solidFill>
@@ -1541,7 +1736,7 @@
               </a:rPr>
               <a:t>‹#›</a:t>
             </a:fld>
-            <a:endParaRPr sz="1800">
+            <a:endParaRPr b="0" i="0" sz="1800" u="none" cap="none" strike="noStrike">
               <a:solidFill>
                 <a:schemeClr val="dk1"/>
               </a:solidFill>
@@ -1645,12 +1840,16 @@
           <a:lstStyle/>
           <a:p>
             <a:pPr indent="0" lvl="0" marL="0" marR="0" rtl="0" algn="l">
-              <a:spcBef>
-                <a:spcPts val="0"/>
-              </a:spcBef>
-              <a:spcAft>
-                <a:spcPts val="0"/>
-              </a:spcAft>
+              <a:lnSpc>
+                <a:spcPct val="100000"/>
+              </a:lnSpc>
+              <a:spcBef>
+                <a:spcPts val="0"/>
+              </a:spcBef>
+              <a:spcAft>
+                <a:spcPts val="0"/>
+              </a:spcAft>
+              <a:buSzPts val="1100"/>
               <a:buNone/>
             </a:pPr>
             <a:r>
@@ -1696,16 +1895,24 @@
           <a:lstStyle/>
           <a:p>
             <a:pPr indent="0" lvl="0" marL="0" marR="0" rtl="0" algn="l">
-              <a:spcBef>
-                <a:spcPts val="0"/>
-              </a:spcBef>
-              <a:spcAft>
-                <a:spcPts val="0"/>
-              </a:spcAft>
+              <a:lnSpc>
+                <a:spcPct val="100000"/>
+              </a:lnSpc>
+              <a:spcBef>
+                <a:spcPts val="0"/>
+              </a:spcBef>
+              <a:spcAft>
+                <a:spcPts val="0"/>
+              </a:spcAft>
+              <a:buClr>
+                <a:srgbClr val="000000"/>
+              </a:buClr>
+              <a:buSzPts val="1800"/>
+              <a:buFont typeface="Arial"/>
               <a:buNone/>
             </a:pPr>
             <a:fld id="{00000000-1234-1234-1234-123412341234}" type="slidenum">
-              <a:rPr lang="en-US" sz="1800">
+              <a:rPr b="0" i="0" lang="en-US" sz="1800" u="none" cap="none" strike="noStrike">
                 <a:solidFill>
                   <a:schemeClr val="dk1"/>
                 </a:solidFill>
@@ -1716,7 +1923,7 @@
               </a:rPr>
               <a:t>‹#›</a:t>
             </a:fld>
-            <a:endParaRPr sz="1800">
+            <a:endParaRPr b="0" i="0" sz="1800" u="none" cap="none" strike="noStrike">
               <a:solidFill>
                 <a:schemeClr val="dk1"/>
               </a:solidFill>
@@ -1820,12 +2027,16 @@
           <a:lstStyle/>
           <a:p>
             <a:pPr indent="0" lvl="0" marL="0" marR="0" rtl="0" algn="l">
-              <a:spcBef>
-                <a:spcPts val="0"/>
-              </a:spcBef>
-              <a:spcAft>
-                <a:spcPts val="0"/>
-              </a:spcAft>
+              <a:lnSpc>
+                <a:spcPct val="100000"/>
+              </a:lnSpc>
+              <a:spcBef>
+                <a:spcPts val="0"/>
+              </a:spcBef>
+              <a:spcAft>
+                <a:spcPts val="0"/>
+              </a:spcAft>
+              <a:buSzPts val="1100"/>
               <a:buNone/>
             </a:pPr>
             <a:r>
@@ -1871,16 +2082,24 @@
           <a:lstStyle/>
           <a:p>
             <a:pPr indent="0" lvl="0" marL="0" marR="0" rtl="0" algn="l">
-              <a:spcBef>
-                <a:spcPts val="0"/>
-              </a:spcBef>
-              <a:spcAft>
-                <a:spcPts val="0"/>
-              </a:spcAft>
+              <a:lnSpc>
+                <a:spcPct val="100000"/>
+              </a:lnSpc>
+              <a:spcBef>
+                <a:spcPts val="0"/>
+              </a:spcBef>
+              <a:spcAft>
+                <a:spcPts val="0"/>
+              </a:spcAft>
+              <a:buClr>
+                <a:srgbClr val="000000"/>
+              </a:buClr>
+              <a:buSzPts val="1800"/>
+              <a:buFont typeface="Arial"/>
               <a:buNone/>
             </a:pPr>
             <a:fld id="{00000000-1234-1234-1234-123412341234}" type="slidenum">
-              <a:rPr lang="en-US" sz="1800">
+              <a:rPr b="0" i="0" lang="en-US" sz="1800" u="none" cap="none" strike="noStrike">
                 <a:solidFill>
                   <a:schemeClr val="dk1"/>
                 </a:solidFill>
@@ -1891,7 +2110,7 @@
               </a:rPr>
               <a:t>‹#›</a:t>
             </a:fld>
-            <a:endParaRPr sz="1800">
+            <a:endParaRPr b="0" i="0" sz="1800" u="none" cap="none" strike="noStrike">
               <a:solidFill>
                 <a:schemeClr val="dk1"/>
               </a:solidFill>
@@ -1995,12 +2214,16 @@
           <a:lstStyle/>
           <a:p>
             <a:pPr indent="0" lvl="0" marL="0" marR="0" rtl="0" algn="l">
-              <a:spcBef>
-                <a:spcPts val="0"/>
-              </a:spcBef>
-              <a:spcAft>
-                <a:spcPts val="0"/>
-              </a:spcAft>
+              <a:lnSpc>
+                <a:spcPct val="100000"/>
+              </a:lnSpc>
+              <a:spcBef>
+                <a:spcPts val="0"/>
+              </a:spcBef>
+              <a:spcAft>
+                <a:spcPts val="0"/>
+              </a:spcAft>
+              <a:buSzPts val="1100"/>
               <a:buNone/>
             </a:pPr>
             <a:r>
@@ -2046,16 +2269,24 @@
           <a:lstStyle/>
           <a:p>
             <a:pPr indent="0" lvl="0" marL="0" marR="0" rtl="0" algn="l">
-              <a:spcBef>
-                <a:spcPts val="0"/>
-              </a:spcBef>
-              <a:spcAft>
-                <a:spcPts val="0"/>
-              </a:spcAft>
+              <a:lnSpc>
+                <a:spcPct val="100000"/>
+              </a:lnSpc>
+              <a:spcBef>
+                <a:spcPts val="0"/>
+              </a:spcBef>
+              <a:spcAft>
+                <a:spcPts val="0"/>
+              </a:spcAft>
+              <a:buClr>
+                <a:srgbClr val="000000"/>
+              </a:buClr>
+              <a:buSzPts val="1800"/>
+              <a:buFont typeface="Arial"/>
               <a:buNone/>
             </a:pPr>
             <a:fld id="{00000000-1234-1234-1234-123412341234}" type="slidenum">
-              <a:rPr lang="en-US" sz="1800">
+              <a:rPr b="0" i="0" lang="en-US" sz="1800" u="none" cap="none" strike="noStrike">
                 <a:solidFill>
                   <a:schemeClr val="dk1"/>
                 </a:solidFill>
@@ -2066,7 +2297,7 @@
               </a:rPr>
               <a:t>‹#›</a:t>
             </a:fld>
-            <a:endParaRPr sz="1800">
+            <a:endParaRPr b="0" i="0" sz="1800" u="none" cap="none" strike="noStrike">
               <a:solidFill>
                 <a:schemeClr val="dk1"/>
               </a:solidFill>
@@ -2170,12 +2401,16 @@
           <a:lstStyle/>
           <a:p>
             <a:pPr indent="0" lvl="0" marL="0" marR="0" rtl="0" algn="l">
-              <a:spcBef>
-                <a:spcPts val="0"/>
-              </a:spcBef>
-              <a:spcAft>
-                <a:spcPts val="0"/>
-              </a:spcAft>
+              <a:lnSpc>
+                <a:spcPct val="100000"/>
+              </a:lnSpc>
+              <a:spcBef>
+                <a:spcPts val="0"/>
+              </a:spcBef>
+              <a:spcAft>
+                <a:spcPts val="0"/>
+              </a:spcAft>
+              <a:buSzPts val="1100"/>
               <a:buNone/>
             </a:pPr>
             <a:r>
@@ -2221,16 +2456,24 @@
           <a:lstStyle/>
           <a:p>
             <a:pPr indent="0" lvl="0" marL="0" marR="0" rtl="0" algn="l">
-              <a:spcBef>
-                <a:spcPts val="0"/>
-              </a:spcBef>
-              <a:spcAft>
-                <a:spcPts val="0"/>
-              </a:spcAft>
+              <a:lnSpc>
+                <a:spcPct val="100000"/>
+              </a:lnSpc>
+              <a:spcBef>
+                <a:spcPts val="0"/>
+              </a:spcBef>
+              <a:spcAft>
+                <a:spcPts val="0"/>
+              </a:spcAft>
+              <a:buClr>
+                <a:srgbClr val="000000"/>
+              </a:buClr>
+              <a:buSzPts val="1800"/>
+              <a:buFont typeface="Arial"/>
               <a:buNone/>
             </a:pPr>
             <a:fld id="{00000000-1234-1234-1234-123412341234}" type="slidenum">
-              <a:rPr lang="en-US" sz="1800">
+              <a:rPr b="0" i="0" lang="en-US" sz="1800" u="none" cap="none" strike="noStrike">
                 <a:solidFill>
                   <a:schemeClr val="dk1"/>
                 </a:solidFill>
@@ -2241,7 +2484,7 @@
               </a:rPr>
               <a:t>‹#›</a:t>
             </a:fld>
-            <a:endParaRPr sz="1800">
+            <a:endParaRPr b="0" i="0" sz="1800" u="none" cap="none" strike="noStrike">
               <a:solidFill>
                 <a:schemeClr val="dk1"/>
               </a:solidFill>
@@ -2345,12 +2588,16 @@
           <a:lstStyle/>
           <a:p>
             <a:pPr indent="0" lvl="0" marL="0" marR="0" rtl="0" algn="l">
-              <a:spcBef>
-                <a:spcPts val="0"/>
-              </a:spcBef>
-              <a:spcAft>
-                <a:spcPts val="0"/>
-              </a:spcAft>
+              <a:lnSpc>
+                <a:spcPct val="100000"/>
+              </a:lnSpc>
+              <a:spcBef>
+                <a:spcPts val="0"/>
+              </a:spcBef>
+              <a:spcAft>
+                <a:spcPts val="0"/>
+              </a:spcAft>
+              <a:buSzPts val="1100"/>
               <a:buNone/>
             </a:pPr>
             <a:r>
@@ -2396,16 +2643,24 @@
           <a:lstStyle/>
           <a:p>
             <a:pPr indent="0" lvl="0" marL="0" marR="0" rtl="0" algn="l">
-              <a:spcBef>
-                <a:spcPts val="0"/>
-              </a:spcBef>
-              <a:spcAft>
-                <a:spcPts val="0"/>
-              </a:spcAft>
+              <a:lnSpc>
+                <a:spcPct val="100000"/>
+              </a:lnSpc>
+              <a:spcBef>
+                <a:spcPts val="0"/>
+              </a:spcBef>
+              <a:spcAft>
+                <a:spcPts val="0"/>
+              </a:spcAft>
+              <a:buClr>
+                <a:srgbClr val="000000"/>
+              </a:buClr>
+              <a:buSzPts val="1800"/>
+              <a:buFont typeface="Arial"/>
               <a:buNone/>
             </a:pPr>
             <a:fld id="{00000000-1234-1234-1234-123412341234}" type="slidenum">
-              <a:rPr lang="en-US" sz="1800">
+              <a:rPr b="0" i="0" lang="en-US" sz="1800" u="none" cap="none" strike="noStrike">
                 <a:solidFill>
                   <a:schemeClr val="dk1"/>
                 </a:solidFill>
@@ -2416,7 +2671,7 @@
               </a:rPr>
               <a:t>‹#›</a:t>
             </a:fld>
-            <a:endParaRPr sz="1800">
+            <a:endParaRPr b="0" i="0" sz="1800" u="none" cap="none" strike="noStrike">
               <a:solidFill>
                 <a:schemeClr val="dk1"/>
               </a:solidFill>
@@ -3243,18 +3498,26 @@
           <a:lstStyle/>
           <a:p>
             <a:pPr indent="0" lvl="0" marL="0" marR="0" rtl="0" algn="l">
-              <a:spcBef>
-                <a:spcPts val="0"/>
-              </a:spcBef>
-              <a:spcAft>
-                <a:spcPts val="0"/>
-              </a:spcAft>
+              <a:lnSpc>
+                <a:spcPct val="100000"/>
+              </a:lnSpc>
+              <a:spcBef>
+                <a:spcPts val="0"/>
+              </a:spcBef>
+              <a:spcAft>
+                <a:spcPts val="0"/>
+              </a:spcAft>
+              <a:buClr>
+                <a:srgbClr val="000000"/>
+              </a:buClr>
+              <a:buSzPts val="1800"/>
+              <a:buFont typeface="Arial"/>
               <a:buNone/>
             </a:pPr>
             <a:r>
               <a:t/>
             </a:r>
-            <a:endParaRPr sz="1800">
+            <a:endParaRPr b="0" i="0" sz="1800" u="none" cap="none" strike="noStrike">
               <a:solidFill>
                 <a:schemeClr val="dk1"/>
               </a:solidFill>
@@ -3292,6 +3555,9 @@
           <a:lstStyle/>
           <a:p>
             <a:pPr indent="0" lvl="0" marL="0" marR="0" rtl="0" algn="l">
+              <a:lnSpc>
+                <a:spcPct val="100000"/>
+              </a:lnSpc>
               <a:spcBef>
                 <a:spcPts val="0"/>
               </a:spcBef>
@@ -3306,7 +3572,7 @@
               <a:buNone/>
             </a:pPr>
             <a:r>
-              <a:rPr b="1" lang="en-US" sz="4800">
+              <a:rPr b="1" i="0" lang="en-US" sz="4800" u="none" cap="none" strike="noStrike">
                 <a:solidFill>
                   <a:srgbClr val="02B9AD"/>
                 </a:solidFill>
@@ -3317,7 +3583,7 @@
               </a:rPr>
               <a:t>ReSet</a:t>
             </a:r>
-            <a:endParaRPr sz="4800">
+            <a:endParaRPr b="0" i="0" sz="4800" u="none" cap="none" strike="noStrike">
               <a:solidFill>
                 <a:schemeClr val="dk1"/>
               </a:solidFill>
@@ -3355,6 +3621,9 @@
           <a:lstStyle/>
           <a:p>
             <a:pPr indent="0" lvl="0" marL="0" marR="0" rtl="0" algn="l">
+              <a:lnSpc>
+                <a:spcPct val="100000"/>
+              </a:lnSpc>
               <a:spcBef>
                 <a:spcPts val="0"/>
               </a:spcBef>
@@ -3369,7 +3638,7 @@
               <a:buNone/>
             </a:pPr>
             <a:r>
-              <a:rPr b="1" lang="en-US" sz="2000">
+              <a:rPr b="1" i="0" lang="en-US" sz="2000" u="none" cap="none" strike="noStrike">
                 <a:solidFill>
                   <a:srgbClr val="FFFFFF"/>
                 </a:solidFill>
@@ -3380,7 +3649,7 @@
               </a:rPr>
               <a:t>REverse engineering SETtlement</a:t>
             </a:r>
-            <a:endParaRPr sz="2000">
+            <a:endParaRPr b="0" i="0" sz="2000" u="none" cap="none" strike="noStrike">
               <a:solidFill>
                 <a:schemeClr val="dk1"/>
               </a:solidFill>
@@ -3420,18 +3689,26 @@
           <a:lstStyle/>
           <a:p>
             <a:pPr indent="0" lvl="0" marL="0" marR="0" rtl="0" algn="l">
-              <a:spcBef>
-                <a:spcPts val="0"/>
-              </a:spcBef>
-              <a:spcAft>
-                <a:spcPts val="0"/>
-              </a:spcAft>
+              <a:lnSpc>
+                <a:spcPct val="100000"/>
+              </a:lnSpc>
+              <a:spcBef>
+                <a:spcPts val="0"/>
+              </a:spcBef>
+              <a:spcAft>
+                <a:spcPts val="0"/>
+              </a:spcAft>
+              <a:buClr>
+                <a:srgbClr val="000000"/>
+              </a:buClr>
+              <a:buSzPts val="1800"/>
+              <a:buFont typeface="Arial"/>
               <a:buNone/>
             </a:pPr>
             <a:r>
               <a:t/>
             </a:r>
-            <a:endParaRPr sz="1800">
+            <a:endParaRPr b="0" i="0" sz="1800" u="none" cap="none" strike="noStrike">
               <a:solidFill>
                 <a:schemeClr val="dk1"/>
               </a:solidFill>
@@ -3469,6 +3746,9 @@
           <a:lstStyle/>
           <a:p>
             <a:pPr indent="0" lvl="0" marL="0" marR="0" rtl="0" algn="l">
+              <a:lnSpc>
+                <a:spcPct val="100000"/>
+              </a:lnSpc>
               <a:spcBef>
                 <a:spcPts val="0"/>
               </a:spcBef>
@@ -3483,7 +3763,7 @@
               <a:buNone/>
             </a:pPr>
             <a:r>
-              <a:rPr lang="en-US" sz="1400">
+              <a:rPr b="0" i="0" lang="en-US" sz="1400" u="none" cap="none" strike="noStrike">
                 <a:solidFill>
                   <a:srgbClr val="F59E0B"/>
                 </a:solidFill>
@@ -3494,7 +3774,7 @@
               </a:rPr>
               <a:t>정산 배치 SP AI Reverse Engineering Agent – 분석 / 코드 생성 / 검증</a:t>
             </a:r>
-            <a:endParaRPr sz="1400">
+            <a:endParaRPr b="0" i="0" sz="1400" u="none" cap="none" strike="noStrike">
               <a:solidFill>
                 <a:schemeClr val="dk1"/>
               </a:solidFill>
@@ -3532,6 +3812,9 @@
           <a:lstStyle/>
           <a:p>
             <a:pPr indent="0" lvl="0" marL="0" marR="0" rtl="0" algn="l">
+              <a:lnSpc>
+                <a:spcPct val="100000"/>
+              </a:lnSpc>
               <a:spcBef>
                 <a:spcPts val="0"/>
               </a:spcBef>
@@ -3546,7 +3829,7 @@
               <a:buNone/>
             </a:pPr>
             <a:r>
-              <a:rPr lang="en-US" sz="1200">
+              <a:rPr b="0" i="0" lang="en-US" sz="1200" u="none" cap="none" strike="noStrike">
                 <a:solidFill>
                   <a:srgbClr val="94A3B8"/>
                 </a:solidFill>
@@ -3557,7 +3840,7 @@
               </a:rPr>
               <a:t>System Architecture &amp; Roadmap</a:t>
             </a:r>
-            <a:endParaRPr sz="1200">
+            <a:endParaRPr b="0" i="0" sz="1200" u="none" cap="none" strike="noStrike">
               <a:solidFill>
                 <a:schemeClr val="dk1"/>
               </a:solidFill>
@@ -3627,6 +3910,9 @@
           <a:lstStyle/>
           <a:p>
             <a:pPr indent="0" lvl="0" marL="0" marR="0" rtl="0" algn="l">
+              <a:lnSpc>
+                <a:spcPct val="100000"/>
+              </a:lnSpc>
               <a:spcBef>
                 <a:spcPts val="0"/>
               </a:spcBef>
@@ -3641,7 +3927,7 @@
               <a:buNone/>
             </a:pPr>
             <a:r>
-              <a:rPr b="1" lang="en-US" sz="2400">
+              <a:rPr b="1" i="0" lang="en-US" sz="2400" u="none" cap="none" strike="noStrike">
                 <a:solidFill>
                   <a:srgbClr val="FFFFFF"/>
                 </a:solidFill>
@@ -3652,7 +3938,7 @@
               </a:rPr>
               <a:t>ReSet 도입 기대 효과 및 성공 지표</a:t>
             </a:r>
-            <a:endParaRPr sz="2400">
+            <a:endParaRPr b="0" i="0" sz="2400" u="none" cap="none" strike="noStrike">
               <a:solidFill>
                 <a:schemeClr val="dk1"/>
               </a:solidFill>
@@ -3705,18 +3991,26 @@
           <a:lstStyle/>
           <a:p>
             <a:pPr indent="0" lvl="0" marL="0" marR="0" rtl="0" algn="l">
-              <a:spcBef>
-                <a:spcPts val="0"/>
-              </a:spcBef>
-              <a:spcAft>
-                <a:spcPts val="0"/>
-              </a:spcAft>
+              <a:lnSpc>
+                <a:spcPct val="100000"/>
+              </a:lnSpc>
+              <a:spcBef>
+                <a:spcPts val="0"/>
+              </a:spcBef>
+              <a:spcAft>
+                <a:spcPts val="0"/>
+              </a:spcAft>
+              <a:buClr>
+                <a:srgbClr val="000000"/>
+              </a:buClr>
+              <a:buSzPts val="1800"/>
+              <a:buFont typeface="Arial"/>
               <a:buNone/>
             </a:pPr>
             <a:r>
               <a:t/>
             </a:r>
-            <a:endParaRPr sz="1800">
+            <a:endParaRPr b="0" i="0" sz="1800" u="none" cap="none" strike="noStrike">
               <a:solidFill>
                 <a:schemeClr val="dk1"/>
               </a:solidFill>
@@ -3754,6 +4048,9 @@
           <a:lstStyle/>
           <a:p>
             <a:pPr indent="0" lvl="0" marL="0" marR="0" rtl="0" algn="ctr">
+              <a:lnSpc>
+                <a:spcPct val="100000"/>
+              </a:lnSpc>
               <a:spcBef>
                 <a:spcPts val="0"/>
               </a:spcBef>
@@ -3768,7 +4065,7 @@
               <a:buNone/>
             </a:pPr>
             <a:r>
-              <a:rPr b="1" lang="en-US" sz="5400">
+              <a:rPr b="1" i="0" lang="en-US" sz="5400" u="none" cap="none" strike="noStrike">
                 <a:solidFill>
                   <a:srgbClr val="02B9AD"/>
                 </a:solidFill>
@@ -3779,7 +4076,7 @@
               </a:rPr>
               <a:t>90%+</a:t>
             </a:r>
-            <a:endParaRPr sz="5400">
+            <a:endParaRPr b="0" i="0" sz="5400" u="none" cap="none" strike="noStrike">
               <a:solidFill>
                 <a:schemeClr val="dk1"/>
               </a:solidFill>
@@ -3817,6 +4114,9 @@
           <a:lstStyle/>
           <a:p>
             <a:pPr indent="0" lvl="0" marL="0" marR="0" rtl="0" algn="ctr">
+              <a:lnSpc>
+                <a:spcPct val="100000"/>
+              </a:lnSpc>
               <a:spcBef>
                 <a:spcPts val="0"/>
               </a:spcBef>
@@ -3831,7 +4131,7 @@
               <a:buNone/>
             </a:pPr>
             <a:r>
-              <a:rPr b="1" lang="en-US" sz="1300">
+              <a:rPr b="1" i="0" lang="en-US" sz="1300" u="none" cap="none" strike="noStrike">
                 <a:solidFill>
                   <a:srgbClr val="FFFFFF"/>
                 </a:solidFill>
@@ -3840,21 +4140,9 @@
                 <a:cs typeface="Trebuchet MS"/>
                 <a:sym typeface="Trebuchet MS"/>
               </a:rPr>
-              <a:t xml:space="preserve">분석 및 </a:t>
-            </a:r>
-            <a:r>
-              <a:rPr b="1" lang="en-US" sz="1300">
-                <a:solidFill>
-                  <a:srgbClr val="FFFFFF"/>
-                </a:solidFill>
-                <a:latin typeface="Trebuchet MS"/>
-                <a:ea typeface="Trebuchet MS"/>
-                <a:cs typeface="Trebuchet MS"/>
-                <a:sym typeface="Trebuchet MS"/>
-              </a:rPr>
-              <a:t>개발 공수 단축</a:t>
-            </a:r>
-            <a:endParaRPr sz="1300">
+              <a:t>분석 및 개발 공수 단축</a:t>
+            </a:r>
+            <a:endParaRPr b="0" i="0" sz="1300" u="none" cap="none" strike="noStrike">
               <a:solidFill>
                 <a:schemeClr val="dk1"/>
               </a:solidFill>
@@ -3892,18 +4180,26 @@
           <a:lstStyle/>
           <a:p>
             <a:pPr indent="0" lvl="0" marL="0" marR="0" rtl="0" algn="l">
-              <a:spcBef>
-                <a:spcPts val="0"/>
-              </a:spcBef>
-              <a:spcAft>
-                <a:spcPts val="0"/>
-              </a:spcAft>
+              <a:lnSpc>
+                <a:spcPct val="100000"/>
+              </a:lnSpc>
+              <a:spcBef>
+                <a:spcPts val="0"/>
+              </a:spcBef>
+              <a:spcAft>
+                <a:spcPts val="0"/>
+              </a:spcAft>
+              <a:buClr>
+                <a:srgbClr val="000000"/>
+              </a:buClr>
+              <a:buSzPts val="1000"/>
+              <a:buFont typeface="Arial"/>
               <a:buNone/>
             </a:pPr>
             <a:r>
               <a:t/>
             </a:r>
-            <a:endParaRPr sz="1000">
+            <a:endParaRPr b="0" i="0" sz="1000" u="none" cap="none" strike="noStrike">
               <a:solidFill>
                 <a:srgbClr val="CADCFC"/>
               </a:solidFill>
@@ -3915,16 +4211,24 @@
           </a:p>
           <a:p>
             <a:pPr indent="0" lvl="0" marL="0" marR="0" rtl="0" algn="l">
-              <a:spcBef>
-                <a:spcPts val="0"/>
-              </a:spcBef>
-              <a:spcAft>
-                <a:spcPts val="0"/>
-              </a:spcAft>
+              <a:lnSpc>
+                <a:spcPct val="100000"/>
+              </a:lnSpc>
+              <a:spcBef>
+                <a:spcPts val="0"/>
+              </a:spcBef>
+              <a:spcAft>
+                <a:spcPts val="0"/>
+              </a:spcAft>
+              <a:buClr>
+                <a:srgbClr val="000000"/>
+              </a:buClr>
+              <a:buSzPts val="1000"/>
+              <a:buFont typeface="Arial"/>
               <a:buNone/>
             </a:pPr>
             <a:r>
-              <a:rPr lang="en-US" sz="1000">
+              <a:rPr b="0" i="0" lang="en-US" sz="1000" u="none" cap="none" strike="noStrike">
                 <a:solidFill>
                   <a:srgbClr val="CADCFC"/>
                 </a:solidFill>
@@ -3935,7 +4239,7 @@
               </a:rPr>
               <a:t>레거시 비즈니스 로직 파악과 문서화에 소요되는 시간 및 인적 리소스를 혁신적으로 단축(90% 이상 절감)합니다.</a:t>
             </a:r>
-            <a:endParaRPr sz="1000">
+            <a:endParaRPr b="0" i="0" sz="1000" u="none" cap="none" strike="noStrike">
               <a:solidFill>
                 <a:schemeClr val="dk1"/>
               </a:solidFill>
@@ -3988,18 +4292,26 @@
           <a:lstStyle/>
           <a:p>
             <a:pPr indent="0" lvl="0" marL="0" marR="0" rtl="0" algn="l">
-              <a:spcBef>
-                <a:spcPts val="0"/>
-              </a:spcBef>
-              <a:spcAft>
-                <a:spcPts val="0"/>
-              </a:spcAft>
+              <a:lnSpc>
+                <a:spcPct val="100000"/>
+              </a:lnSpc>
+              <a:spcBef>
+                <a:spcPts val="0"/>
+              </a:spcBef>
+              <a:spcAft>
+                <a:spcPts val="0"/>
+              </a:spcAft>
+              <a:buClr>
+                <a:srgbClr val="000000"/>
+              </a:buClr>
+              <a:buSzPts val="1800"/>
+              <a:buFont typeface="Arial"/>
               <a:buNone/>
             </a:pPr>
             <a:r>
               <a:t/>
             </a:r>
-            <a:endParaRPr sz="1800">
+            <a:endParaRPr b="0" i="0" sz="1800" u="none" cap="none" strike="noStrike">
               <a:solidFill>
                 <a:schemeClr val="dk1"/>
               </a:solidFill>
@@ -4037,6 +4349,9 @@
           <a:lstStyle/>
           <a:p>
             <a:pPr indent="0" lvl="0" marL="0" marR="0" rtl="0" algn="ctr">
+              <a:lnSpc>
+                <a:spcPct val="100000"/>
+              </a:lnSpc>
               <a:spcBef>
                 <a:spcPts val="0"/>
               </a:spcBef>
@@ -4051,7 +4366,7 @@
               <a:buNone/>
             </a:pPr>
             <a:r>
-              <a:rPr b="1" lang="en-US" sz="5400">
+              <a:rPr b="1" i="0" lang="en-US" sz="5400" u="none" cap="none" strike="noStrike">
                 <a:solidFill>
                   <a:srgbClr val="F59E0B"/>
                 </a:solidFill>
@@ -4062,7 +4377,7 @@
               </a:rPr>
               <a:t>0%</a:t>
             </a:r>
-            <a:endParaRPr sz="5400">
+            <a:endParaRPr b="0" i="0" sz="5400" u="none" cap="none" strike="noStrike">
               <a:solidFill>
                 <a:schemeClr val="dk1"/>
               </a:solidFill>
@@ -4100,6 +4415,9 @@
           <a:lstStyle/>
           <a:p>
             <a:pPr indent="0" lvl="0" marL="0" marR="0" rtl="0" algn="ctr">
+              <a:lnSpc>
+                <a:spcPct val="100000"/>
+              </a:lnSpc>
               <a:spcBef>
                 <a:spcPts val="0"/>
               </a:spcBef>
@@ -4114,7 +4432,7 @@
               <a:buNone/>
             </a:pPr>
             <a:r>
-              <a:rPr b="1" lang="en-US" sz="1300">
+              <a:rPr b="1" i="0" lang="en-US" sz="1300" u="none" cap="none" strike="noStrike">
                 <a:solidFill>
                   <a:srgbClr val="FFFFFF"/>
                 </a:solidFill>
@@ -4123,21 +4441,9 @@
                 <a:cs typeface="Trebuchet MS"/>
                 <a:sym typeface="Trebuchet MS"/>
               </a:rPr>
-              <a:t xml:space="preserve">설계 산출물 결함률 </a:t>
-            </a:r>
-            <a:r>
-              <a:rPr b="1" lang="en-US" sz="1300">
-                <a:solidFill>
-                  <a:srgbClr val="FFFFFF"/>
-                </a:solidFill>
-                <a:latin typeface="Trebuchet MS"/>
-                <a:ea typeface="Trebuchet MS"/>
-                <a:cs typeface="Trebuchet MS"/>
-                <a:sym typeface="Trebuchet MS"/>
-              </a:rPr>
-              <a:t>제로</a:t>
-            </a:r>
-            <a:endParaRPr sz="1300">
+              <a:t>설계 산출물 결함률 제로</a:t>
+            </a:r>
+            <a:endParaRPr b="0" i="0" sz="1300" u="none" cap="none" strike="noStrike">
               <a:solidFill>
                 <a:schemeClr val="dk1"/>
               </a:solidFill>
@@ -4175,6 +4481,9 @@
           <a:lstStyle/>
           <a:p>
             <a:pPr indent="0" lvl="0" marL="0" marR="0" rtl="0" algn="ctr">
+              <a:lnSpc>
+                <a:spcPct val="100000"/>
+              </a:lnSpc>
               <a:spcBef>
                 <a:spcPts val="0"/>
               </a:spcBef>
@@ -4191,7 +4500,7 @@
             <a:r>
               <a:t/>
             </a:r>
-            <a:endParaRPr sz="1000">
+            <a:endParaRPr b="0" i="0" sz="1000" u="none" cap="none" strike="noStrike">
               <a:solidFill>
                 <a:srgbClr val="CADCFC"/>
               </a:solidFill>
@@ -4203,6 +4512,9 @@
           </a:p>
           <a:p>
             <a:pPr indent="0" lvl="0" marL="0" marR="0" rtl="0" algn="l">
+              <a:lnSpc>
+                <a:spcPct val="100000"/>
+              </a:lnSpc>
               <a:spcBef>
                 <a:spcPts val="0"/>
               </a:spcBef>
@@ -4217,7 +4529,7 @@
               <a:buNone/>
             </a:pPr>
             <a:r>
-              <a:rPr lang="en-US" sz="1000">
+              <a:rPr b="0" i="0" lang="en-US" sz="1000" u="none" cap="none" strike="noStrike">
                 <a:solidFill>
                   <a:srgbClr val="CADCFC"/>
                 </a:solidFill>
@@ -4228,7 +4540,7 @@
               </a:rPr>
               <a:t>Mermaid 다이어그램 컴파일 린팅 및 L1/L2 AI 자가 교정 피드백 루프를 통해 산출물 오류 발생률 0%를 달성합니다.</a:t>
             </a:r>
-            <a:endParaRPr sz="1000">
+            <a:endParaRPr b="0" i="0" sz="1000" u="none" cap="none" strike="noStrike">
               <a:solidFill>
                 <a:schemeClr val="dk1"/>
               </a:solidFill>
@@ -4281,18 +4593,26 @@
           <a:lstStyle/>
           <a:p>
             <a:pPr indent="0" lvl="0" marL="0" marR="0" rtl="0" algn="l">
-              <a:spcBef>
-                <a:spcPts val="0"/>
-              </a:spcBef>
-              <a:spcAft>
-                <a:spcPts val="0"/>
-              </a:spcAft>
+              <a:lnSpc>
+                <a:spcPct val="100000"/>
+              </a:lnSpc>
+              <a:spcBef>
+                <a:spcPts val="0"/>
+              </a:spcBef>
+              <a:spcAft>
+                <a:spcPts val="0"/>
+              </a:spcAft>
+              <a:buClr>
+                <a:srgbClr val="000000"/>
+              </a:buClr>
+              <a:buSzPts val="1800"/>
+              <a:buFont typeface="Arial"/>
               <a:buNone/>
             </a:pPr>
             <a:r>
               <a:t/>
             </a:r>
-            <a:endParaRPr sz="1800">
+            <a:endParaRPr b="0" i="0" sz="1800" u="none" cap="none" strike="noStrike">
               <a:solidFill>
                 <a:schemeClr val="dk1"/>
               </a:solidFill>
@@ -4330,6 +4650,9 @@
           <a:lstStyle/>
           <a:p>
             <a:pPr indent="0" lvl="0" marL="0" marR="0" rtl="0" algn="ctr">
+              <a:lnSpc>
+                <a:spcPct val="100000"/>
+              </a:lnSpc>
               <a:spcBef>
                 <a:spcPts val="0"/>
               </a:spcBef>
@@ -4344,7 +4667,7 @@
               <a:buNone/>
             </a:pPr>
             <a:r>
-              <a:rPr b="1" lang="en-US" sz="5400">
+              <a:rPr b="1" i="0" lang="en-US" sz="5400" u="none" cap="none" strike="noStrike">
                 <a:solidFill>
                   <a:srgbClr val="02B9AD"/>
                 </a:solidFill>
@@ -4355,7 +4678,7 @@
               </a:rPr>
               <a:t>100%</a:t>
             </a:r>
-            <a:endParaRPr sz="5400">
+            <a:endParaRPr b="0" i="0" sz="5400" u="none" cap="none" strike="noStrike">
               <a:solidFill>
                 <a:schemeClr val="dk1"/>
               </a:solidFill>
@@ -4393,6 +4716,9 @@
           <a:lstStyle/>
           <a:p>
             <a:pPr indent="0" lvl="0" marL="0" marR="0" rtl="0" algn="ctr">
+              <a:lnSpc>
+                <a:spcPct val="100000"/>
+              </a:lnSpc>
               <a:spcBef>
                 <a:spcPts val="0"/>
               </a:spcBef>
@@ -4407,7 +4733,7 @@
               <a:buNone/>
             </a:pPr>
             <a:r>
-              <a:rPr b="1" lang="en-US" sz="1300">
+              <a:rPr b="1" i="0" lang="en-US" sz="1300" u="none" cap="none" strike="noStrike">
                 <a:solidFill>
                   <a:srgbClr val="FFFFFF"/>
                 </a:solidFill>
@@ -4418,7 +4744,7 @@
               </a:rPr>
               <a:t>런타임 로직 정합성 보장</a:t>
             </a:r>
-            <a:endParaRPr sz="1300">
+            <a:endParaRPr b="0" i="0" sz="1300" u="none" cap="none" strike="noStrike">
               <a:solidFill>
                 <a:schemeClr val="dk1"/>
               </a:solidFill>
@@ -4456,6 +4782,9 @@
           <a:lstStyle/>
           <a:p>
             <a:pPr indent="0" lvl="0" marL="0" marR="0" rtl="0" algn="ctr">
+              <a:lnSpc>
+                <a:spcPct val="100000"/>
+              </a:lnSpc>
               <a:spcBef>
                 <a:spcPts val="0"/>
               </a:spcBef>
@@ -4472,7 +4801,7 @@
             <a:r>
               <a:t/>
             </a:r>
-            <a:endParaRPr sz="1000">
+            <a:endParaRPr b="0" i="0" sz="1000" u="none" cap="none" strike="noStrike">
               <a:solidFill>
                 <a:srgbClr val="CADCFC"/>
               </a:solidFill>
@@ -4484,6 +4813,9 @@
           </a:p>
           <a:p>
             <a:pPr indent="0" lvl="0" marL="0" marR="0" rtl="0" algn="l">
+              <a:lnSpc>
+                <a:spcPct val="100000"/>
+              </a:lnSpc>
               <a:spcBef>
                 <a:spcPts val="0"/>
               </a:spcBef>
@@ -4498,7 +4830,7 @@
               <a:buNone/>
             </a:pPr>
             <a:r>
-              <a:rPr lang="en-US" sz="1000">
+              <a:rPr b="0" i="0" lang="en-US" sz="1000" u="none" cap="none" strike="noStrike">
                 <a:solidFill>
                   <a:srgbClr val="CADCFC"/>
                 </a:solidFill>
@@ -4509,7 +4841,7 @@
               </a:rPr>
               <a:t>Sandbox DB 환경에서 1:1로 실제 데이터 실행 결과를 정밀 비교 대조함으로써, 이관 과정의 휴먼 에러를 완전 배제합니다.</a:t>
             </a:r>
-            <a:endParaRPr sz="1000">
+            <a:endParaRPr b="0" i="0" sz="1000" u="none" cap="none" strike="noStrike">
               <a:solidFill>
                 <a:schemeClr val="dk1"/>
               </a:solidFill>
@@ -4579,6 +4911,9 @@
           <a:lstStyle/>
           <a:p>
             <a:pPr indent="0" lvl="0" marL="0" marR="0" rtl="0" algn="l">
+              <a:lnSpc>
+                <a:spcPct val="100000"/>
+              </a:lnSpc>
               <a:spcBef>
                 <a:spcPts val="0"/>
               </a:spcBef>
@@ -4593,7 +4928,7 @@
               <a:buNone/>
             </a:pPr>
             <a:r>
-              <a:rPr b="1" lang="en-US" sz="2400">
+              <a:rPr b="1" i="0" lang="en-US" sz="2400" u="none" cap="none" strike="noStrike">
                 <a:solidFill>
                   <a:srgbClr val="00294B"/>
                 </a:solidFill>
@@ -4604,7 +4939,7 @@
               </a:rPr>
               <a:t>Stored Procedure 마이그레이션의 어려움</a:t>
             </a:r>
-            <a:endParaRPr sz="2400">
+            <a:endParaRPr b="0" i="0" sz="2400" u="none" cap="none" strike="noStrike">
               <a:solidFill>
                 <a:schemeClr val="dk1"/>
               </a:solidFill>
@@ -4642,6 +4977,9 @@
           <a:lstStyle/>
           <a:p>
             <a:pPr indent="0" lvl="0" marL="0" marR="0" rtl="0" algn="l">
+              <a:lnSpc>
+                <a:spcPct val="100000"/>
+              </a:lnSpc>
               <a:spcBef>
                 <a:spcPts val="0"/>
               </a:spcBef>
@@ -4656,7 +4994,7 @@
               <a:buNone/>
             </a:pPr>
             <a:r>
-              <a:rPr b="1" lang="en-US" sz="1500">
+              <a:rPr b="1" i="0" lang="en-US" sz="1500" u="none" cap="none" strike="noStrike">
                 <a:solidFill>
                   <a:srgbClr val="1E293B"/>
                 </a:solidFill>
@@ -4665,10 +5003,10 @@
                 <a:cs typeface="Calibri"/>
                 <a:sym typeface="Calibri"/>
               </a:rPr>
-              <a:t xml:space="preserve">레거시 DB의 내부 로직(SP) 현대화는 </a:t>
-            </a:r>
-            <a:r>
-              <a:rPr lang="en-US" sz="1500">
+              <a:t>레거시 DB의 내부 로직(SP) 현대화는 </a:t>
+            </a:r>
+            <a:r>
+              <a:rPr b="0" i="0" lang="en-US" sz="1500" u="none" cap="none" strike="noStrike">
                 <a:solidFill>
                   <a:srgbClr val="1E293B"/>
                 </a:solidFill>
@@ -4679,7 +5017,7 @@
               </a:rPr>
               <a:t>복잡한 의존성과 검증의 한계로 인해 높은 리스크를 가집니다.</a:t>
             </a:r>
-            <a:endParaRPr sz="1500">
+            <a:endParaRPr b="0" i="0" sz="1500" u="none" cap="none" strike="noStrike">
               <a:solidFill>
                 <a:schemeClr val="dk1"/>
               </a:solidFill>
@@ -4717,6 +5055,9 @@
           <a:lstStyle/>
           <a:p>
             <a:pPr indent="0" lvl="0" marL="0" marR="0" rtl="0" algn="l">
+              <a:lnSpc>
+                <a:spcPct val="100000"/>
+              </a:lnSpc>
               <a:spcBef>
                 <a:spcPts val="0"/>
               </a:spcBef>
@@ -4731,7 +5072,7 @@
               <a:buNone/>
             </a:pPr>
             <a:r>
-              <a:rPr i="1" lang="en-US" sz="1300">
+              <a:rPr b="0" i="1" lang="en-US" sz="1300" u="none" cap="none" strike="noStrike">
                 <a:solidFill>
                   <a:srgbClr val="02B9AD"/>
                 </a:solidFill>
@@ -4742,7 +5083,7 @@
               </a:rPr>
               <a:t>수동 공수 90% 절감과 100% 검증 정합성 달성을 위한 AI 에이전트가 필요합니다.</a:t>
             </a:r>
-            <a:endParaRPr sz="1300">
+            <a:endParaRPr b="0" i="0" sz="1300" u="none" cap="none" strike="noStrike">
               <a:solidFill>
                 <a:schemeClr val="dk1"/>
               </a:solidFill>
@@ -4795,18 +5136,26 @@
           <a:lstStyle/>
           <a:p>
             <a:pPr indent="0" lvl="0" marL="0" marR="0" rtl="0" algn="l">
-              <a:spcBef>
-                <a:spcPts val="0"/>
-              </a:spcBef>
-              <a:spcAft>
-                <a:spcPts val="0"/>
-              </a:spcAft>
+              <a:lnSpc>
+                <a:spcPct val="100000"/>
+              </a:lnSpc>
+              <a:spcBef>
+                <a:spcPts val="0"/>
+              </a:spcBef>
+              <a:spcAft>
+                <a:spcPts val="0"/>
+              </a:spcAft>
+              <a:buClr>
+                <a:srgbClr val="000000"/>
+              </a:buClr>
+              <a:buSzPts val="1800"/>
+              <a:buFont typeface="Arial"/>
               <a:buNone/>
             </a:pPr>
             <a:r>
               <a:t/>
             </a:r>
-            <a:endParaRPr sz="1800">
+            <a:endParaRPr b="0" i="0" sz="1800" u="none" cap="none" strike="noStrike">
               <a:solidFill>
                 <a:schemeClr val="dk1"/>
               </a:solidFill>
@@ -4846,18 +5195,26 @@
           <a:lstStyle/>
           <a:p>
             <a:pPr indent="0" lvl="0" marL="0" marR="0" rtl="0" algn="l">
-              <a:spcBef>
-                <a:spcPts val="0"/>
-              </a:spcBef>
-              <a:spcAft>
-                <a:spcPts val="0"/>
-              </a:spcAft>
+              <a:lnSpc>
+                <a:spcPct val="100000"/>
+              </a:lnSpc>
+              <a:spcBef>
+                <a:spcPts val="0"/>
+              </a:spcBef>
+              <a:spcAft>
+                <a:spcPts val="0"/>
+              </a:spcAft>
+              <a:buClr>
+                <a:srgbClr val="000000"/>
+              </a:buClr>
+              <a:buSzPts val="1800"/>
+              <a:buFont typeface="Arial"/>
               <a:buNone/>
             </a:pPr>
             <a:r>
               <a:t/>
             </a:r>
-            <a:endParaRPr sz="1800">
+            <a:endParaRPr b="0" i="0" sz="1800" u="none" cap="none" strike="noStrike">
               <a:solidFill>
                 <a:schemeClr val="dk1"/>
               </a:solidFill>
@@ -4895,6 +5252,9 @@
           <a:lstStyle/>
           <a:p>
             <a:pPr indent="0" lvl="0" marL="0" marR="0" rtl="0" algn="l">
+              <a:lnSpc>
+                <a:spcPct val="100000"/>
+              </a:lnSpc>
               <a:spcBef>
                 <a:spcPts val="0"/>
               </a:spcBef>
@@ -4909,7 +5269,7 @@
               <a:buNone/>
             </a:pPr>
             <a:r>
-              <a:rPr b="1" lang="en-US" sz="1300">
+              <a:rPr b="1" i="0" lang="en-US" sz="1300" u="none" cap="none" strike="noStrike">
                 <a:solidFill>
                   <a:srgbClr val="00294B"/>
                 </a:solidFill>
@@ -4920,7 +5280,7 @@
               </a:rPr>
               <a:t>1. 유지보수성 저하</a:t>
             </a:r>
-            <a:endParaRPr sz="1300">
+            <a:endParaRPr b="0" i="0" sz="1300" u="none" cap="none" strike="noStrike">
               <a:solidFill>
                 <a:schemeClr val="dk1"/>
               </a:solidFill>
@@ -4958,6 +5318,9 @@
           <a:lstStyle/>
           <a:p>
             <a:pPr indent="0" lvl="0" marL="0" marR="0" rtl="0" algn="l">
+              <a:lnSpc>
+                <a:spcPct val="100000"/>
+              </a:lnSpc>
               <a:spcBef>
                 <a:spcPts val="0"/>
               </a:spcBef>
@@ -4972,7 +5335,7 @@
               <a:buNone/>
             </a:pPr>
             <a:r>
-              <a:rPr lang="en-US" sz="1000">
+              <a:rPr b="0" i="0" lang="en-US" sz="1000" u="none" cap="none" strike="noStrike">
                 <a:solidFill>
                   <a:srgbClr val="64748B"/>
                 </a:solidFill>
@@ -4983,7 +5346,7 @@
               </a:rPr>
               <a:t>수천 라인의 SQL 코드와 복잡한 의존성으로 영향도 분석 어려움</a:t>
             </a:r>
-            <a:endParaRPr sz="1000">
+            <a:endParaRPr b="0" i="0" sz="1000" u="none" cap="none" strike="noStrike">
               <a:solidFill>
                 <a:schemeClr val="dk1"/>
               </a:solidFill>
@@ -5036,18 +5399,26 @@
           <a:lstStyle/>
           <a:p>
             <a:pPr indent="0" lvl="0" marL="0" marR="0" rtl="0" algn="l">
-              <a:spcBef>
-                <a:spcPts val="0"/>
-              </a:spcBef>
-              <a:spcAft>
-                <a:spcPts val="0"/>
-              </a:spcAft>
+              <a:lnSpc>
+                <a:spcPct val="100000"/>
+              </a:lnSpc>
+              <a:spcBef>
+                <a:spcPts val="0"/>
+              </a:spcBef>
+              <a:spcAft>
+                <a:spcPts val="0"/>
+              </a:spcAft>
+              <a:buClr>
+                <a:srgbClr val="000000"/>
+              </a:buClr>
+              <a:buSzPts val="1800"/>
+              <a:buFont typeface="Arial"/>
               <a:buNone/>
             </a:pPr>
             <a:r>
               <a:t/>
             </a:r>
-            <a:endParaRPr sz="1800">
+            <a:endParaRPr b="0" i="0" sz="1800" u="none" cap="none" strike="noStrike">
               <a:solidFill>
                 <a:schemeClr val="dk1"/>
               </a:solidFill>
@@ -5087,18 +5458,26 @@
           <a:lstStyle/>
           <a:p>
             <a:pPr indent="0" lvl="0" marL="0" marR="0" rtl="0" algn="l">
-              <a:spcBef>
-                <a:spcPts val="0"/>
-              </a:spcBef>
-              <a:spcAft>
-                <a:spcPts val="0"/>
-              </a:spcAft>
+              <a:lnSpc>
+                <a:spcPct val="100000"/>
+              </a:lnSpc>
+              <a:spcBef>
+                <a:spcPts val="0"/>
+              </a:spcBef>
+              <a:spcAft>
+                <a:spcPts val="0"/>
+              </a:spcAft>
+              <a:buClr>
+                <a:srgbClr val="000000"/>
+              </a:buClr>
+              <a:buSzPts val="1800"/>
+              <a:buFont typeface="Arial"/>
               <a:buNone/>
             </a:pPr>
             <a:r>
               <a:t/>
             </a:r>
-            <a:endParaRPr sz="1800">
+            <a:endParaRPr b="0" i="0" sz="1800" u="none" cap="none" strike="noStrike">
               <a:solidFill>
                 <a:schemeClr val="dk1"/>
               </a:solidFill>
@@ -5136,6 +5515,9 @@
           <a:lstStyle/>
           <a:p>
             <a:pPr indent="0" lvl="0" marL="0" marR="0" rtl="0" algn="l">
+              <a:lnSpc>
+                <a:spcPct val="100000"/>
+              </a:lnSpc>
               <a:spcBef>
                 <a:spcPts val="0"/>
               </a:spcBef>
@@ -5150,7 +5532,7 @@
               <a:buNone/>
             </a:pPr>
             <a:r>
-              <a:rPr b="1" lang="en-US" sz="1300">
+              <a:rPr b="1" i="0" lang="en-US" sz="1300" u="none" cap="none" strike="noStrike">
                 <a:solidFill>
                   <a:srgbClr val="00294B"/>
                 </a:solidFill>
@@ -5161,7 +5543,7 @@
               </a:rPr>
               <a:t>2. 수동 전환 리스크</a:t>
             </a:r>
-            <a:endParaRPr sz="1300">
+            <a:endParaRPr b="0" i="0" sz="1300" u="none" cap="none" strike="noStrike">
               <a:solidFill>
                 <a:schemeClr val="dk1"/>
               </a:solidFill>
@@ -5199,6 +5581,9 @@
           <a:lstStyle/>
           <a:p>
             <a:pPr indent="0" lvl="0" marL="0" marR="0" rtl="0" algn="l">
+              <a:lnSpc>
+                <a:spcPct val="100000"/>
+              </a:lnSpc>
               <a:spcBef>
                 <a:spcPts val="0"/>
               </a:spcBef>
@@ -5213,7 +5598,7 @@
               <a:buNone/>
             </a:pPr>
             <a:r>
-              <a:rPr lang="en-US" sz="1000">
+              <a:rPr b="0" i="0" lang="en-US" sz="1000" u="none" cap="none" strike="noStrike">
                 <a:solidFill>
                   <a:srgbClr val="64748B"/>
                 </a:solidFill>
@@ -5224,7 +5609,7 @@
               </a:rPr>
               <a:t>C#/Java 수동 재작성 시 비즈니스 규칙 누락 및 휴먼 에러 발생</a:t>
             </a:r>
-            <a:endParaRPr sz="1000">
+            <a:endParaRPr b="0" i="0" sz="1000" u="none" cap="none" strike="noStrike">
               <a:solidFill>
                 <a:schemeClr val="dk1"/>
               </a:solidFill>
@@ -5277,18 +5662,26 @@
           <a:lstStyle/>
           <a:p>
             <a:pPr indent="0" lvl="0" marL="0" marR="0" rtl="0" algn="l">
-              <a:spcBef>
-                <a:spcPts val="0"/>
-              </a:spcBef>
-              <a:spcAft>
-                <a:spcPts val="0"/>
-              </a:spcAft>
+              <a:lnSpc>
+                <a:spcPct val="100000"/>
+              </a:lnSpc>
+              <a:spcBef>
+                <a:spcPts val="0"/>
+              </a:spcBef>
+              <a:spcAft>
+                <a:spcPts val="0"/>
+              </a:spcAft>
+              <a:buClr>
+                <a:srgbClr val="000000"/>
+              </a:buClr>
+              <a:buSzPts val="1800"/>
+              <a:buFont typeface="Arial"/>
               <a:buNone/>
             </a:pPr>
             <a:r>
               <a:t/>
             </a:r>
-            <a:endParaRPr sz="1800">
+            <a:endParaRPr b="0" i="0" sz="1800" u="none" cap="none" strike="noStrike">
               <a:solidFill>
                 <a:schemeClr val="dk1"/>
               </a:solidFill>
@@ -5328,18 +5721,26 @@
           <a:lstStyle/>
           <a:p>
             <a:pPr indent="0" lvl="0" marL="0" marR="0" rtl="0" algn="l">
-              <a:spcBef>
-                <a:spcPts val="0"/>
-              </a:spcBef>
-              <a:spcAft>
-                <a:spcPts val="0"/>
-              </a:spcAft>
+              <a:lnSpc>
+                <a:spcPct val="100000"/>
+              </a:lnSpc>
+              <a:spcBef>
+                <a:spcPts val="0"/>
+              </a:spcBef>
+              <a:spcAft>
+                <a:spcPts val="0"/>
+              </a:spcAft>
+              <a:buClr>
+                <a:srgbClr val="000000"/>
+              </a:buClr>
+              <a:buSzPts val="1800"/>
+              <a:buFont typeface="Arial"/>
               <a:buNone/>
             </a:pPr>
             <a:r>
               <a:t/>
             </a:r>
-            <a:endParaRPr sz="1800">
+            <a:endParaRPr b="0" i="0" sz="1800" u="none" cap="none" strike="noStrike">
               <a:solidFill>
                 <a:schemeClr val="dk1"/>
               </a:solidFill>
@@ -5377,6 +5778,9 @@
           <a:lstStyle/>
           <a:p>
             <a:pPr indent="0" lvl="0" marL="0" marR="0" rtl="0" algn="l">
+              <a:lnSpc>
+                <a:spcPct val="100000"/>
+              </a:lnSpc>
               <a:spcBef>
                 <a:spcPts val="0"/>
               </a:spcBef>
@@ -5391,7 +5795,7 @@
               <a:buNone/>
             </a:pPr>
             <a:r>
-              <a:rPr b="1" lang="en-US" sz="1300">
+              <a:rPr b="1" i="0" lang="en-US" sz="1300" u="none" cap="none" strike="noStrike">
                 <a:solidFill>
                   <a:srgbClr val="00294B"/>
                 </a:solidFill>
@@ -5402,7 +5806,7 @@
               </a:rPr>
               <a:t>3. 검증의 한계</a:t>
             </a:r>
-            <a:endParaRPr sz="1300">
+            <a:endParaRPr b="0" i="0" sz="1300" u="none" cap="none" strike="noStrike">
               <a:solidFill>
                 <a:schemeClr val="dk1"/>
               </a:solidFill>
@@ -5440,6 +5844,9 @@
           <a:lstStyle/>
           <a:p>
             <a:pPr indent="0" lvl="0" marL="0" marR="0" rtl="0" algn="l">
+              <a:lnSpc>
+                <a:spcPct val="100000"/>
+              </a:lnSpc>
               <a:spcBef>
                 <a:spcPts val="0"/>
               </a:spcBef>
@@ -5454,7 +5861,7 @@
               <a:buNone/>
             </a:pPr>
             <a:r>
-              <a:rPr lang="en-US" sz="1000">
+              <a:rPr b="0" i="0" lang="en-US" sz="1000" u="none" cap="none" strike="noStrike">
                 <a:solidFill>
                   <a:srgbClr val="64748B"/>
                 </a:solidFill>
@@ -5465,7 +5872,7 @@
               </a:rPr>
               <a:t>재구현 코드와 레거시의 데이터 1:1 일치 여부 검증 어려움</a:t>
             </a:r>
-            <a:endParaRPr sz="1000">
+            <a:endParaRPr b="0" i="0" sz="1000" u="none" cap="none" strike="noStrike">
               <a:solidFill>
                 <a:schemeClr val="dk1"/>
               </a:solidFill>
@@ -5518,18 +5925,26 @@
           <a:lstStyle/>
           <a:p>
             <a:pPr indent="0" lvl="0" marL="0" marR="0" rtl="0" algn="l">
-              <a:spcBef>
-                <a:spcPts val="0"/>
-              </a:spcBef>
-              <a:spcAft>
-                <a:spcPts val="0"/>
-              </a:spcAft>
+              <a:lnSpc>
+                <a:spcPct val="100000"/>
+              </a:lnSpc>
+              <a:spcBef>
+                <a:spcPts val="0"/>
+              </a:spcBef>
+              <a:spcAft>
+                <a:spcPts val="0"/>
+              </a:spcAft>
+              <a:buClr>
+                <a:srgbClr val="000000"/>
+              </a:buClr>
+              <a:buSzPts val="1800"/>
+              <a:buFont typeface="Arial"/>
               <a:buNone/>
             </a:pPr>
             <a:r>
               <a:t/>
             </a:r>
-            <a:endParaRPr sz="1800">
+            <a:endParaRPr b="0" i="0" sz="1800" u="none" cap="none" strike="noStrike">
               <a:solidFill>
                 <a:schemeClr val="dk1"/>
               </a:solidFill>
@@ -5569,18 +5984,26 @@
           <a:lstStyle/>
           <a:p>
             <a:pPr indent="0" lvl="0" marL="0" marR="0" rtl="0" algn="l">
-              <a:spcBef>
-                <a:spcPts val="0"/>
-              </a:spcBef>
-              <a:spcAft>
-                <a:spcPts val="0"/>
-              </a:spcAft>
+              <a:lnSpc>
+                <a:spcPct val="100000"/>
+              </a:lnSpc>
+              <a:spcBef>
+                <a:spcPts val="0"/>
+              </a:spcBef>
+              <a:spcAft>
+                <a:spcPts val="0"/>
+              </a:spcAft>
+              <a:buClr>
+                <a:srgbClr val="000000"/>
+              </a:buClr>
+              <a:buSzPts val="1800"/>
+              <a:buFont typeface="Arial"/>
               <a:buNone/>
             </a:pPr>
             <a:r>
               <a:t/>
             </a:r>
-            <a:endParaRPr sz="1800">
+            <a:endParaRPr b="0" i="0" sz="1800" u="none" cap="none" strike="noStrike">
               <a:solidFill>
                 <a:schemeClr val="dk1"/>
               </a:solidFill>
@@ -5618,6 +6041,9 @@
           <a:lstStyle/>
           <a:p>
             <a:pPr indent="0" lvl="0" marL="0" marR="0" rtl="0" algn="l">
+              <a:lnSpc>
+                <a:spcPct val="100000"/>
+              </a:lnSpc>
               <a:spcBef>
                 <a:spcPts val="0"/>
               </a:spcBef>
@@ -5632,7 +6058,7 @@
               <a:buNone/>
             </a:pPr>
             <a:r>
-              <a:rPr b="1" lang="en-US" sz="1300">
+              <a:rPr b="1" i="0" lang="en-US" sz="1300" u="none" cap="none" strike="noStrike">
                 <a:solidFill>
                   <a:srgbClr val="00294B"/>
                 </a:solidFill>
@@ -5643,7 +6069,7 @@
               </a:rPr>
               <a:t>4. 지식 파편화</a:t>
             </a:r>
-            <a:endParaRPr sz="1300">
+            <a:endParaRPr b="0" i="0" sz="1300" u="none" cap="none" strike="noStrike">
               <a:solidFill>
                 <a:schemeClr val="dk1"/>
               </a:solidFill>
@@ -5681,6 +6107,9 @@
           <a:lstStyle/>
           <a:p>
             <a:pPr indent="0" lvl="0" marL="0" marR="0" rtl="0" algn="l">
+              <a:lnSpc>
+                <a:spcPct val="100000"/>
+              </a:lnSpc>
               <a:spcBef>
                 <a:spcPts val="0"/>
               </a:spcBef>
@@ -5695,7 +6124,7 @@
               <a:buNone/>
             </a:pPr>
             <a:r>
-              <a:rPr lang="en-US" sz="1000">
+              <a:rPr b="0" i="0" lang="en-US" sz="1000" u="none" cap="none" strike="noStrike">
                 <a:solidFill>
                   <a:srgbClr val="64748B"/>
                 </a:solidFill>
@@ -5706,7 +6135,7 @@
               </a:rPr>
               <a:t>DB 설명 유실 및 실제 작동 쿼리와 노후화된 주석의 모순 발생</a:t>
             </a:r>
-            <a:endParaRPr sz="1000">
+            <a:endParaRPr b="0" i="0" sz="1000" u="none" cap="none" strike="noStrike">
               <a:solidFill>
                 <a:schemeClr val="dk1"/>
               </a:solidFill>
@@ -5776,6 +6205,9 @@
           <a:lstStyle/>
           <a:p>
             <a:pPr indent="0" lvl="0" marL="0" marR="0" rtl="0" algn="l">
+              <a:lnSpc>
+                <a:spcPct val="100000"/>
+              </a:lnSpc>
               <a:spcBef>
                 <a:spcPts val="0"/>
               </a:spcBef>
@@ -5790,7 +6222,7 @@
               <a:buNone/>
             </a:pPr>
             <a:r>
-              <a:rPr b="1" lang="en-US" sz="2400">
+              <a:rPr b="1" i="0" lang="en-US" sz="2400" u="none" cap="none" strike="noStrike">
                 <a:solidFill>
                   <a:srgbClr val="00294B"/>
                 </a:solidFill>
@@ -5801,7 +6233,7 @@
               </a:rPr>
               <a:t>ReSet 시스템 아키텍처 및 구성</a:t>
             </a:r>
-            <a:endParaRPr sz="2400">
+            <a:endParaRPr b="0" i="0" sz="2400" u="none" cap="none" strike="noStrike">
               <a:solidFill>
                 <a:schemeClr val="dk1"/>
               </a:solidFill>
@@ -5854,18 +6286,26 @@
           <a:lstStyle/>
           <a:p>
             <a:pPr indent="0" lvl="0" marL="0" marR="0" rtl="0" algn="l">
-              <a:spcBef>
-                <a:spcPts val="0"/>
-              </a:spcBef>
-              <a:spcAft>
-                <a:spcPts val="0"/>
-              </a:spcAft>
+              <a:lnSpc>
+                <a:spcPct val="100000"/>
+              </a:lnSpc>
+              <a:spcBef>
+                <a:spcPts val="0"/>
+              </a:spcBef>
+              <a:spcAft>
+                <a:spcPts val="0"/>
+              </a:spcAft>
+              <a:buClr>
+                <a:srgbClr val="000000"/>
+              </a:buClr>
+              <a:buSzPts val="1800"/>
+              <a:buFont typeface="Arial"/>
               <a:buNone/>
             </a:pPr>
             <a:r>
               <a:t/>
             </a:r>
-            <a:endParaRPr sz="1800">
+            <a:endParaRPr b="0" i="0" sz="1800" u="none" cap="none" strike="noStrike">
               <a:solidFill>
                 <a:schemeClr val="dk1"/>
               </a:solidFill>
@@ -5905,18 +6345,26 @@
           <a:lstStyle/>
           <a:p>
             <a:pPr indent="0" lvl="0" marL="0" marR="0" rtl="0" algn="l">
-              <a:spcBef>
-                <a:spcPts val="0"/>
-              </a:spcBef>
-              <a:spcAft>
-                <a:spcPts val="0"/>
-              </a:spcAft>
+              <a:lnSpc>
+                <a:spcPct val="100000"/>
+              </a:lnSpc>
+              <a:spcBef>
+                <a:spcPts val="0"/>
+              </a:spcBef>
+              <a:spcAft>
+                <a:spcPts val="0"/>
+              </a:spcAft>
+              <a:buClr>
+                <a:srgbClr val="000000"/>
+              </a:buClr>
+              <a:buSzPts val="1800"/>
+              <a:buFont typeface="Arial"/>
               <a:buNone/>
             </a:pPr>
             <a:r>
               <a:t/>
             </a:r>
-            <a:endParaRPr sz="1800">
+            <a:endParaRPr b="0" i="0" sz="1800" u="none" cap="none" strike="noStrike">
               <a:solidFill>
                 <a:schemeClr val="dk1"/>
               </a:solidFill>
@@ -5954,6 +6402,9 @@
           <a:lstStyle/>
           <a:p>
             <a:pPr indent="0" lvl="0" marL="0" marR="0" rtl="0" algn="l">
+              <a:lnSpc>
+                <a:spcPct val="100000"/>
+              </a:lnSpc>
               <a:spcBef>
                 <a:spcPts val="0"/>
               </a:spcBef>
@@ -5968,7 +6419,7 @@
               <a:buNone/>
             </a:pPr>
             <a:r>
-              <a:rPr b="1" lang="en-US" sz="1700">
+              <a:rPr b="1" i="0" lang="en-US" sz="1700" u="none" cap="none" strike="noStrike">
                 <a:solidFill>
                   <a:srgbClr val="00294B"/>
                 </a:solidFill>
@@ -5979,7 +6430,7 @@
               </a:rPr>
               <a:t>지능형 역공학 엔진 (Analyzer)</a:t>
             </a:r>
-            <a:endParaRPr sz="1700">
+            <a:endParaRPr b="0" i="0" sz="1700" u="none" cap="none" strike="noStrike">
               <a:solidFill>
                 <a:schemeClr val="dk1"/>
               </a:solidFill>
@@ -6017,6 +6468,9 @@
           <a:lstStyle/>
           <a:p>
             <a:pPr indent="-182563" lvl="0" marL="182563" marR="0" rtl="0" algn="l">
+              <a:lnSpc>
+                <a:spcPct val="115000"/>
+              </a:lnSpc>
               <a:spcBef>
                 <a:spcPts val="0"/>
               </a:spcBef>
@@ -6031,7 +6485,7 @@
               <a:buChar char="✔"/>
             </a:pPr>
             <a:r>
-              <a:rPr lang="en-US" sz="1150">
+              <a:rPr b="0" i="0" lang="en-US" sz="1150" u="none" cap="none" strike="noStrike">
                 <a:solidFill>
                   <a:srgbClr val="1E293B"/>
                 </a:solidFill>
@@ -6042,7 +6496,7 @@
               </a:rPr>
               <a:t>재귀적 의존성 탐색 (SP / 테이블 / 뷰 / UDF)</a:t>
             </a:r>
-            <a:endParaRPr sz="1150">
+            <a:endParaRPr b="0" i="0" sz="1150" u="none" cap="none" strike="noStrike">
               <a:solidFill>
                 <a:schemeClr val="dk1"/>
               </a:solidFill>
@@ -6054,8 +6508,11 @@
           </a:p>
           <a:p>
             <a:pPr indent="-182563" lvl="0" marL="182563" marR="0" rtl="0" algn="l">
-              <a:spcBef>
-                <a:spcPts val="1200"/>
+              <a:lnSpc>
+                <a:spcPct val="115000"/>
+              </a:lnSpc>
+              <a:spcBef>
+                <a:spcPts val="0"/>
               </a:spcBef>
               <a:spcAft>
                 <a:spcPts val="0"/>
@@ -6068,7 +6525,7 @@
               <a:buChar char="✔"/>
             </a:pPr>
             <a:r>
-              <a:rPr lang="en-US" sz="1150">
+              <a:rPr b="0" i="0" lang="en-US" sz="1150" u="none" cap="none" strike="noStrike">
                 <a:solidFill>
                   <a:srgbClr val="1E293B"/>
                 </a:solidFill>
@@ -6079,7 +6536,7 @@
               </a:rPr>
               <a:t>T-SQL AST 기반 정적 분석 및 CRUD 테이블 기계적 분류 (ScriptDom)</a:t>
             </a:r>
-            <a:endParaRPr sz="1150">
+            <a:endParaRPr b="0" i="0" sz="1150" u="none" cap="none" strike="noStrike">
               <a:solidFill>
                 <a:schemeClr val="dk1"/>
               </a:solidFill>
@@ -6091,8 +6548,11 @@
           </a:p>
           <a:p>
             <a:pPr indent="-182563" lvl="0" marL="182563" marR="0" rtl="0" algn="l">
-              <a:spcBef>
-                <a:spcPts val="1200"/>
+              <a:lnSpc>
+                <a:spcPct val="115000"/>
+              </a:lnSpc>
+              <a:spcBef>
+                <a:spcPts val="0"/>
               </a:spcBef>
               <a:spcAft>
                 <a:spcPts val="0"/>
@@ -6105,7 +6565,7 @@
               <a:buChar char="✔"/>
             </a:pPr>
             <a:r>
-              <a:rPr lang="en-US" sz="1150">
+              <a:rPr b="0" i="0" lang="en-US" sz="1150" u="none" cap="none" strike="noStrike">
                 <a:solidFill>
                   <a:srgbClr val="1E293B"/>
                 </a:solidFill>
@@ -6116,7 +6576,7 @@
               </a:rPr>
               <a:t>하이브리드 동적 SQL 및 Linked Server 원격 참조 정밀 탐지</a:t>
             </a:r>
-            <a:endParaRPr sz="1150">
+            <a:endParaRPr b="0" i="0" sz="1150" u="none" cap="none" strike="noStrike">
               <a:solidFill>
                 <a:schemeClr val="dk1"/>
               </a:solidFill>
@@ -6128,8 +6588,11 @@
           </a:p>
           <a:p>
             <a:pPr indent="-182563" lvl="0" marL="182563" marR="0" rtl="0" algn="l">
-              <a:spcBef>
-                <a:spcPts val="1200"/>
+              <a:lnSpc>
+                <a:spcPct val="115000"/>
+              </a:lnSpc>
+              <a:spcBef>
+                <a:spcPts val="0"/>
               </a:spcBef>
               <a:spcAft>
                 <a:spcPts val="0"/>
@@ -6142,7 +6605,7 @@
               <a:buChar char="✔"/>
             </a:pPr>
             <a:r>
-              <a:rPr lang="en-US" sz="1150">
+              <a:rPr b="0" i="0" lang="en-US" sz="1150" u="none" cap="none" strike="noStrike">
                 <a:solidFill>
                   <a:srgbClr val="1E293B"/>
                 </a:solidFill>
@@ -6153,7 +6616,7 @@
               </a:rPr>
               <a:t>확장 속성(Description) 수집 및 설명 누락 AI 문맥 보완</a:t>
             </a:r>
-            <a:endParaRPr sz="1150">
+            <a:endParaRPr b="0" i="0" sz="1150" u="none" cap="none" strike="noStrike">
               <a:solidFill>
                 <a:schemeClr val="dk1"/>
               </a:solidFill>
@@ -6165,8 +6628,11 @@
           </a:p>
           <a:p>
             <a:pPr indent="-182563" lvl="0" marL="182563" marR="0" rtl="0" algn="l">
-              <a:spcBef>
-                <a:spcPts val="1200"/>
+              <a:lnSpc>
+                <a:spcPct val="115000"/>
+              </a:lnSpc>
+              <a:spcBef>
+                <a:spcPts val="0"/>
               </a:spcBef>
               <a:spcAft>
                 <a:spcPts val="0"/>
@@ -6179,7 +6645,7 @@
               <a:buChar char="✔"/>
             </a:pPr>
             <a:r>
-              <a:rPr lang="en-US" sz="1150">
+              <a:rPr b="0" i="0" lang="en-US" sz="1150" u="none" cap="none" strike="noStrike">
                 <a:solidFill>
                   <a:srgbClr val="1E293B"/>
                 </a:solidFill>
@@ -6190,7 +6656,7 @@
               </a:rPr>
               <a:t>코드-주석 불일치 모순 감지 및 클렌징 SQL 스크립트 자동 덤프</a:t>
             </a:r>
-            <a:endParaRPr sz="1150">
+            <a:endParaRPr b="0" i="0" sz="1150" u="none" cap="none" strike="noStrike">
               <a:solidFill>
                 <a:schemeClr val="dk1"/>
               </a:solidFill>
@@ -6202,8 +6668,11 @@
           </a:p>
           <a:p>
             <a:pPr indent="-182563" lvl="0" marL="182563" marR="0" rtl="0" algn="l">
-              <a:spcBef>
-                <a:spcPts val="1200"/>
+              <a:lnSpc>
+                <a:spcPct val="115000"/>
+              </a:lnSpc>
+              <a:spcBef>
+                <a:spcPts val="0"/>
               </a:spcBef>
               <a:spcAft>
                 <a:spcPts val="0"/>
@@ -6216,7 +6685,7 @@
               <a:buChar char="✔"/>
             </a:pPr>
             <a:r>
-              <a:rPr lang="en-US" sz="1150">
+              <a:rPr b="0" i="0" lang="en-US" sz="1150" u="none" cap="none" strike="noStrike">
                 <a:solidFill>
                   <a:srgbClr val="1E293B"/>
                 </a:solidFill>
@@ -6227,7 +6696,7 @@
               </a:rPr>
               <a:t>3단계 신뢰성 검증 파이프라인 (L1 린터 ➔ L2 AI리뷰 ➔ L3 인간 승인)</a:t>
             </a:r>
-            <a:endParaRPr sz="1150">
+            <a:endParaRPr b="0" i="0" sz="1150" u="none" cap="none" strike="noStrike">
               <a:solidFill>
                 <a:schemeClr val="dk1"/>
               </a:solidFill>
@@ -6280,18 +6749,26 @@
           <a:lstStyle/>
           <a:p>
             <a:pPr indent="0" lvl="0" marL="0" marR="0" rtl="0" algn="l">
-              <a:spcBef>
-                <a:spcPts val="0"/>
-              </a:spcBef>
-              <a:spcAft>
-                <a:spcPts val="0"/>
-              </a:spcAft>
+              <a:lnSpc>
+                <a:spcPct val="100000"/>
+              </a:lnSpc>
+              <a:spcBef>
+                <a:spcPts val="0"/>
+              </a:spcBef>
+              <a:spcAft>
+                <a:spcPts val="0"/>
+              </a:spcAft>
+              <a:buClr>
+                <a:srgbClr val="000000"/>
+              </a:buClr>
+              <a:buSzPts val="1800"/>
+              <a:buFont typeface="Arial"/>
               <a:buNone/>
             </a:pPr>
             <a:r>
               <a:t/>
             </a:r>
-            <a:endParaRPr sz="1800">
+            <a:endParaRPr b="0" i="0" sz="1800" u="none" cap="none" strike="noStrike">
               <a:solidFill>
                 <a:schemeClr val="dk1"/>
               </a:solidFill>
@@ -6331,18 +6808,26 @@
           <a:lstStyle/>
           <a:p>
             <a:pPr indent="0" lvl="0" marL="0" marR="0" rtl="0" algn="l">
-              <a:spcBef>
-                <a:spcPts val="0"/>
-              </a:spcBef>
-              <a:spcAft>
-                <a:spcPts val="0"/>
-              </a:spcAft>
+              <a:lnSpc>
+                <a:spcPct val="100000"/>
+              </a:lnSpc>
+              <a:spcBef>
+                <a:spcPts val="0"/>
+              </a:spcBef>
+              <a:spcAft>
+                <a:spcPts val="0"/>
+              </a:spcAft>
+              <a:buClr>
+                <a:srgbClr val="000000"/>
+              </a:buClr>
+              <a:buSzPts val="1800"/>
+              <a:buFont typeface="Arial"/>
               <a:buNone/>
             </a:pPr>
             <a:r>
               <a:t/>
             </a:r>
-            <a:endParaRPr sz="1800">
+            <a:endParaRPr b="0" i="0" sz="1800" u="none" cap="none" strike="noStrike">
               <a:solidFill>
                 <a:schemeClr val="dk1"/>
               </a:solidFill>
@@ -6380,6 +6865,9 @@
           <a:lstStyle/>
           <a:p>
             <a:pPr indent="0" lvl="0" marL="0" marR="0" rtl="0" algn="l">
+              <a:lnSpc>
+                <a:spcPct val="100000"/>
+              </a:lnSpc>
               <a:spcBef>
                 <a:spcPts val="0"/>
               </a:spcBef>
@@ -6394,7 +6882,7 @@
               <a:buNone/>
             </a:pPr>
             <a:r>
-              <a:rPr b="1" lang="en-US" sz="1700">
+              <a:rPr b="1" i="0" lang="en-US" sz="1700" u="none" cap="none" strike="noStrike">
                 <a:solidFill>
                   <a:srgbClr val="00294B"/>
                 </a:solidFill>
@@ -6405,7 +6893,7 @@
               </a:rPr>
               <a:t>정합성 검증 엔진 (Validator)</a:t>
             </a:r>
-            <a:endParaRPr sz="1700">
+            <a:endParaRPr b="0" i="0" sz="1700" u="none" cap="none" strike="noStrike">
               <a:solidFill>
                 <a:schemeClr val="dk1"/>
               </a:solidFill>
@@ -6443,6 +6931,9 @@
           <a:lstStyle/>
           <a:p>
             <a:pPr indent="-182563" lvl="0" marL="182563" marR="0" rtl="0" algn="l">
+              <a:lnSpc>
+                <a:spcPct val="115000"/>
+              </a:lnSpc>
               <a:spcBef>
                 <a:spcPts val="0"/>
               </a:spcBef>
@@ -6457,7 +6948,7 @@
               <a:buChar char="✔"/>
             </a:pPr>
             <a:r>
-              <a:rPr lang="en-US" sz="1150">
+              <a:rPr b="0" i="0" lang="en-US" sz="1150" u="none" cap="none" strike="noStrike">
                 <a:solidFill>
                   <a:srgbClr val="1E293B"/>
                 </a:solidFill>
@@ -6468,7 +6959,7 @@
               </a:rPr>
               <a:t>TDD용 단위 테스트 및 ArchUnit 아키텍처 제약 규칙 자동 설계 (선제 공급)</a:t>
             </a:r>
-            <a:endParaRPr sz="1150">
+            <a:endParaRPr b="0" i="0" sz="1150" u="none" cap="none" strike="noStrike">
               <a:solidFill>
                 <a:schemeClr val="dk1"/>
               </a:solidFill>
@@ -6480,8 +6971,11 @@
           </a:p>
           <a:p>
             <a:pPr indent="-182563" lvl="0" marL="182563" marR="0" rtl="0" algn="l">
-              <a:spcBef>
-                <a:spcPts val="1200"/>
+              <a:lnSpc>
+                <a:spcPct val="115000"/>
+              </a:lnSpc>
+              <a:spcBef>
+                <a:spcPts val="0"/>
               </a:spcBef>
               <a:spcAft>
                 <a:spcPts val="0"/>
@@ -6494,7 +6988,7 @@
               <a:buChar char="✔"/>
             </a:pPr>
             <a:r>
-              <a:rPr lang="en-US" sz="1150">
+              <a:rPr b="0" i="0" lang="en-US" sz="1150" u="none" cap="none" strike="noStrike">
                 <a:solidFill>
                   <a:srgbClr val="1E293B"/>
                 </a:solidFill>
@@ -6505,7 +6999,7 @@
               </a:rPr>
               <a:t>설계서 vs 신규 구현 소스코드 논리 Gap 분석 (L1/L2 구조 검증)</a:t>
             </a:r>
-            <a:endParaRPr sz="1150">
+            <a:endParaRPr b="0" i="0" sz="1150" u="none" cap="none" strike="noStrike">
               <a:solidFill>
                 <a:schemeClr val="dk1"/>
               </a:solidFill>
@@ -6517,8 +7011,11 @@
           </a:p>
           <a:p>
             <a:pPr indent="-182563" lvl="0" marL="182563" marR="0" rtl="0" algn="l">
-              <a:spcBef>
-                <a:spcPts val="1200"/>
+              <a:lnSpc>
+                <a:spcPct val="115000"/>
+              </a:lnSpc>
+              <a:spcBef>
+                <a:spcPts val="0"/>
               </a:spcBef>
               <a:spcAft>
                 <a:spcPts val="0"/>
@@ -6531,7 +7028,7 @@
               <a:buChar char="✔"/>
             </a:pPr>
             <a:r>
-              <a:rPr lang="en-US" sz="1150">
+              <a:rPr b="0" i="0" lang="en-US" sz="1150" u="none" cap="none" strike="noStrike">
                 <a:solidFill>
                   <a:srgbClr val="1E293B"/>
                 </a:solidFill>
@@ -6542,7 +7039,7 @@
               </a:rPr>
               <a:t>테스트 케이스 및 참조 무결성 기반 모의 데이터 자동 설계</a:t>
             </a:r>
-            <a:endParaRPr sz="1150">
+            <a:endParaRPr b="0" i="0" sz="1150" u="none" cap="none" strike="noStrike">
               <a:solidFill>
                 <a:schemeClr val="dk1"/>
               </a:solidFill>
@@ -6554,8 +7051,11 @@
           </a:p>
           <a:p>
             <a:pPr indent="-182563" lvl="0" marL="182563" marR="0" rtl="0" algn="l">
-              <a:spcBef>
-                <a:spcPts val="1200"/>
+              <a:lnSpc>
+                <a:spcPct val="115000"/>
+              </a:lnSpc>
+              <a:spcBef>
+                <a:spcPts val="0"/>
               </a:spcBef>
               <a:spcAft>
                 <a:spcPts val="0"/>
@@ -6568,7 +7068,7 @@
               <a:buChar char="✔"/>
             </a:pPr>
             <a:r>
-              <a:rPr lang="en-US" sz="1150">
+              <a:rPr b="0" i="0" lang="en-US" sz="1150" u="none" cap="none" strike="noStrike">
                 <a:solidFill>
                   <a:srgbClr val="1E293B"/>
                 </a:solidFill>
@@ -6579,7 +7079,7 @@
               </a:rPr>
               <a:t>샌드박스 DB Seeding 및 Cleanup 라이프사이클 격리 관리</a:t>
             </a:r>
-            <a:endParaRPr sz="1150">
+            <a:endParaRPr b="0" i="0" sz="1150" u="none" cap="none" strike="noStrike">
               <a:solidFill>
                 <a:schemeClr val="dk1"/>
               </a:solidFill>
@@ -6591,8 +7091,11 @@
           </a:p>
           <a:p>
             <a:pPr indent="-182563" lvl="0" marL="182563" marR="0" rtl="0" algn="l">
-              <a:spcBef>
-                <a:spcPts val="1200"/>
+              <a:lnSpc>
+                <a:spcPct val="115000"/>
+              </a:lnSpc>
+              <a:spcBef>
+                <a:spcPts val="0"/>
               </a:spcBef>
               <a:spcAft>
                 <a:spcPts val="0"/>
@@ -6605,7 +7108,7 @@
               <a:buChar char="✔"/>
             </a:pPr>
             <a:r>
-              <a:rPr lang="en-US" sz="1150">
+              <a:rPr b="0" i="0" lang="en-US" sz="1150" u="none" cap="none" strike="noStrike">
                 <a:solidFill>
                   <a:srgbClr val="1E293B"/>
                 </a:solidFill>
@@ -6616,7 +7119,7 @@
               </a:rPr>
               <a:t>다형성 런타임 격리 실행 (C# 트랜잭션 롤백 및 Java IPC 통신)</a:t>
             </a:r>
-            <a:endParaRPr sz="1150">
+            <a:endParaRPr b="0" i="0" sz="1150" u="none" cap="none" strike="noStrike">
               <a:solidFill>
                 <a:schemeClr val="dk1"/>
               </a:solidFill>
@@ -6628,8 +7131,11 @@
           </a:p>
           <a:p>
             <a:pPr indent="-182563" lvl="0" marL="182563" marR="0" rtl="0" algn="l">
-              <a:spcBef>
-                <a:spcPts val="1200"/>
+              <a:lnSpc>
+                <a:spcPct val="115000"/>
+              </a:lnSpc>
+              <a:spcBef>
+                <a:spcPts val="0"/>
               </a:spcBef>
               <a:spcAft>
                 <a:spcPts val="0"/>
@@ -6642,7 +7148,7 @@
               <a:buChar char="✔"/>
             </a:pPr>
             <a:r>
-              <a:rPr lang="en-US" sz="1150">
+              <a:rPr b="0" i="0" lang="en-US" sz="1150" u="none" cap="none" strike="noStrike">
                 <a:solidFill>
                   <a:srgbClr val="1E293B"/>
                 </a:solidFill>
@@ -6653,7 +7159,7 @@
               </a:rPr>
               <a:t>양방향 런타임 결과 수집 및 1:1 값 정밀 대조 (DataComparison)</a:t>
             </a:r>
-            <a:endParaRPr sz="1150">
+            <a:endParaRPr b="0" i="0" sz="1150" u="none" cap="none" strike="noStrike">
               <a:solidFill>
                 <a:schemeClr val="dk1"/>
               </a:solidFill>
@@ -6723,6 +7229,9 @@
           <a:lstStyle/>
           <a:p>
             <a:pPr indent="0" lvl="0" marL="0" marR="0" rtl="0" algn="l">
+              <a:lnSpc>
+                <a:spcPct val="100000"/>
+              </a:lnSpc>
               <a:spcBef>
                 <a:spcPts val="0"/>
               </a:spcBef>
@@ -6737,7 +7246,7 @@
               <a:buNone/>
             </a:pPr>
             <a:r>
-              <a:rPr b="1" lang="en-US" sz="2400">
+              <a:rPr b="1" i="0" lang="en-US" sz="2400" u="none" cap="none" strike="noStrike">
                 <a:solidFill>
                   <a:srgbClr val="00294B"/>
                 </a:solidFill>
@@ -6748,7 +7257,7 @@
               </a:rPr>
               <a:t>재귀적 의존성 분석 메커니즘</a:t>
             </a:r>
-            <a:endParaRPr sz="2400">
+            <a:endParaRPr b="0" i="0" sz="2400" u="none" cap="none" strike="noStrike">
               <a:solidFill>
                 <a:schemeClr val="dk1"/>
               </a:solidFill>
@@ -6801,18 +7310,26 @@
           <a:lstStyle/>
           <a:p>
             <a:pPr indent="0" lvl="0" marL="0" marR="0" rtl="0" algn="l">
-              <a:spcBef>
-                <a:spcPts val="0"/>
-              </a:spcBef>
-              <a:spcAft>
-                <a:spcPts val="0"/>
-              </a:spcAft>
+              <a:lnSpc>
+                <a:spcPct val="100000"/>
+              </a:lnSpc>
+              <a:spcBef>
+                <a:spcPts val="0"/>
+              </a:spcBef>
+              <a:spcAft>
+                <a:spcPts val="0"/>
+              </a:spcAft>
+              <a:buClr>
+                <a:srgbClr val="000000"/>
+              </a:buClr>
+              <a:buSzPts val="1800"/>
+              <a:buFont typeface="Arial"/>
               <a:buNone/>
             </a:pPr>
             <a:r>
               <a:t/>
             </a:r>
-            <a:endParaRPr sz="1800">
+            <a:endParaRPr b="0" i="0" sz="1800" u="none" cap="none" strike="noStrike">
               <a:solidFill>
                 <a:schemeClr val="dk1"/>
               </a:solidFill>
@@ -6852,18 +7369,26 @@
           <a:lstStyle/>
           <a:p>
             <a:pPr indent="0" lvl="0" marL="0" marR="0" rtl="0" algn="l">
-              <a:spcBef>
-                <a:spcPts val="0"/>
-              </a:spcBef>
-              <a:spcAft>
-                <a:spcPts val="0"/>
-              </a:spcAft>
+              <a:lnSpc>
+                <a:spcPct val="100000"/>
+              </a:lnSpc>
+              <a:spcBef>
+                <a:spcPts val="0"/>
+              </a:spcBef>
+              <a:spcAft>
+                <a:spcPts val="0"/>
+              </a:spcAft>
+              <a:buClr>
+                <a:srgbClr val="000000"/>
+              </a:buClr>
+              <a:buSzPts val="1800"/>
+              <a:buFont typeface="Arial"/>
               <a:buNone/>
             </a:pPr>
             <a:r>
               <a:t/>
             </a:r>
-            <a:endParaRPr sz="1800">
+            <a:endParaRPr b="0" i="0" sz="1800" u="none" cap="none" strike="noStrike">
               <a:solidFill>
                 <a:schemeClr val="dk1"/>
               </a:solidFill>
@@ -6901,6 +7426,9 @@
           <a:lstStyle/>
           <a:p>
             <a:pPr indent="0" lvl="0" marL="0" marR="0" rtl="0" algn="l">
+              <a:lnSpc>
+                <a:spcPct val="100000"/>
+              </a:lnSpc>
               <a:spcBef>
                 <a:spcPts val="0"/>
               </a:spcBef>
@@ -6915,7 +7443,7 @@
               <a:buNone/>
             </a:pPr>
             <a:r>
-              <a:rPr b="1" lang="en-US" sz="1600">
+              <a:rPr b="1" i="0" lang="en-US" sz="1600" u="none" cap="none" strike="noStrike">
                 <a:solidFill>
                   <a:srgbClr val="00294B"/>
                 </a:solidFill>
@@ -6926,7 +7454,7 @@
               </a:rPr>
               <a:t>재귀적 의존성 분석</a:t>
             </a:r>
-            <a:endParaRPr sz="1600">
+            <a:endParaRPr b="0" i="0" sz="1600" u="none" cap="none" strike="noStrike">
               <a:solidFill>
                 <a:schemeClr val="dk1"/>
               </a:solidFill>
@@ -6964,6 +7492,9 @@
           <a:lstStyle/>
           <a:p>
             <a:pPr indent="-171450" lvl="0" marL="171450" marR="0" rtl="0" algn="l">
+              <a:lnSpc>
+                <a:spcPct val="100000"/>
+              </a:lnSpc>
               <a:spcBef>
                 <a:spcPts val="0"/>
               </a:spcBef>
@@ -6978,7 +7509,7 @@
               <a:buChar char="✔"/>
             </a:pPr>
             <a:r>
-              <a:rPr b="1" lang="en-US" sz="1050">
+              <a:rPr b="1" i="0" lang="en-US" sz="1050" u="none" cap="none" strike="noStrike">
                 <a:solidFill>
                   <a:srgbClr val="1E293B"/>
                 </a:solidFill>
@@ -6989,7 +7520,7 @@
               </a:rPr>
               <a:t>재귀적 DFS 탐색 수집</a:t>
             </a:r>
-            <a:endParaRPr sz="1050">
+            <a:endParaRPr b="0" i="0" sz="1050" u="none" cap="none" strike="noStrike">
               <a:solidFill>
                 <a:schemeClr val="dk1"/>
               </a:solidFill>
@@ -7001,6 +7532,9 @@
           </a:p>
           <a:p>
             <a:pPr indent="-177800" lvl="0" marL="358775" marR="0" rtl="0" algn="l">
+              <a:lnSpc>
+                <a:spcPct val="100000"/>
+              </a:lnSpc>
               <a:spcBef>
                 <a:spcPts val="500"/>
               </a:spcBef>
@@ -7015,7 +7549,7 @@
               <a:buChar char="•"/>
             </a:pPr>
             <a:r>
-              <a:rPr lang="en-US" sz="1050">
+              <a:rPr b="0" i="0" lang="en-US" sz="1050" u="none" cap="none" strike="noStrike">
                 <a:solidFill>
                   <a:srgbClr val="1E293B"/>
                 </a:solidFill>
@@ -7026,7 +7560,7 @@
               </a:rPr>
               <a:t>sys.sql_expression_dependencies 활용, 연관 DB 객체 자동 탐색</a:t>
             </a:r>
-            <a:endParaRPr sz="1050">
+            <a:endParaRPr b="0" i="0" sz="1050" u="none" cap="none" strike="noStrike">
               <a:solidFill>
                 <a:srgbClr val="1E293B"/>
               </a:solidFill>
@@ -7038,18 +7572,26 @@
           </a:p>
           <a:p>
             <a:pPr indent="0" lvl="0" marL="0" marR="0" rtl="0" algn="l">
+              <a:lnSpc>
+                <a:spcPct val="100000"/>
+              </a:lnSpc>
               <a:spcBef>
                 <a:spcPts val="500"/>
               </a:spcBef>
               <a:spcAft>
                 <a:spcPts val="0"/>
               </a:spcAft>
+              <a:buClr>
+                <a:srgbClr val="000000"/>
+              </a:buClr>
+              <a:buSzPts val="1050"/>
+              <a:buFont typeface="Arial"/>
               <a:buNone/>
             </a:pPr>
             <a:r>
               <a:t/>
             </a:r>
-            <a:endParaRPr sz="1050">
+            <a:endParaRPr b="0" i="0" sz="1050" u="none" cap="none" strike="noStrike">
               <a:solidFill>
                 <a:schemeClr val="dk1"/>
               </a:solidFill>
@@ -7061,6 +7603,9 @@
           </a:p>
           <a:p>
             <a:pPr indent="-171450" lvl="0" marL="171450" marR="0" rtl="0" algn="l">
+              <a:lnSpc>
+                <a:spcPct val="100000"/>
+              </a:lnSpc>
               <a:spcBef>
                 <a:spcPts val="500"/>
               </a:spcBef>
@@ -7075,7 +7620,7 @@
               <a:buChar char="✔"/>
             </a:pPr>
             <a:r>
-              <a:rPr b="1" lang="en-US" sz="1050">
+              <a:rPr b="1" i="0" lang="en-US" sz="1050" u="none" cap="none" strike="noStrike">
                 <a:solidFill>
                   <a:srgbClr val="1E293B"/>
                 </a:solidFill>
@@ -7086,7 +7631,7 @@
               </a:rPr>
               <a:t>동적 SQL Regex 2차 스캔</a:t>
             </a:r>
-            <a:endParaRPr sz="1050">
+            <a:endParaRPr b="0" i="0" sz="1050" u="none" cap="none" strike="noStrike">
               <a:solidFill>
                 <a:schemeClr val="dk1"/>
               </a:solidFill>
@@ -7098,6 +7643,9 @@
           </a:p>
           <a:p>
             <a:pPr indent="-176213" lvl="0" marL="358775" marR="0" rtl="0" algn="l">
+              <a:lnSpc>
+                <a:spcPct val="100000"/>
+              </a:lnSpc>
               <a:spcBef>
                 <a:spcPts val="500"/>
               </a:spcBef>
@@ -7112,7 +7660,7 @@
               <a:buChar char="•"/>
             </a:pPr>
             <a:r>
-              <a:rPr lang="en-US" sz="1050">
+              <a:rPr b="0" i="0" lang="en-US" sz="1050" u="none" cap="none" strike="noStrike">
                 <a:solidFill>
                   <a:srgbClr val="1E293B"/>
                 </a:solidFill>
@@ -7123,7 +7671,7 @@
               </a:rPr>
               <a:t>EXEC, sp_executesql 등 카탈로그 뷰 예외 구문 탐지 및 수집 병합</a:t>
             </a:r>
-            <a:endParaRPr sz="1050">
+            <a:endParaRPr b="0" i="0" sz="1050" u="none" cap="none" strike="noStrike">
               <a:solidFill>
                 <a:srgbClr val="1E293B"/>
               </a:solidFill>
@@ -7135,18 +7683,26 @@
           </a:p>
           <a:p>
             <a:pPr indent="0" lvl="0" marL="0" marR="0" rtl="0" algn="l">
+              <a:lnSpc>
+                <a:spcPct val="100000"/>
+              </a:lnSpc>
               <a:spcBef>
                 <a:spcPts val="500"/>
               </a:spcBef>
               <a:spcAft>
                 <a:spcPts val="0"/>
               </a:spcAft>
+              <a:buClr>
+                <a:srgbClr val="000000"/>
+              </a:buClr>
+              <a:buSzPts val="1050"/>
+              <a:buFont typeface="Arial"/>
               <a:buNone/>
             </a:pPr>
             <a:r>
               <a:t/>
             </a:r>
-            <a:endParaRPr sz="1050">
+            <a:endParaRPr b="0" i="0" sz="1050" u="none" cap="none" strike="noStrike">
               <a:solidFill>
                 <a:schemeClr val="dk1"/>
               </a:solidFill>
@@ -7158,6 +7714,9 @@
           </a:p>
           <a:p>
             <a:pPr indent="-171450" lvl="0" marL="171450" marR="0" rtl="0" algn="l">
+              <a:lnSpc>
+                <a:spcPct val="100000"/>
+              </a:lnSpc>
               <a:spcBef>
                 <a:spcPts val="500"/>
               </a:spcBef>
@@ -7172,7 +7731,7 @@
               <a:buChar char="✔"/>
             </a:pPr>
             <a:r>
-              <a:rPr b="1" lang="en-US" sz="1050">
+              <a:rPr b="1" i="0" lang="en-US" sz="1050" u="none" cap="none" strike="noStrike">
                 <a:solidFill>
                   <a:srgbClr val="1E293B"/>
                 </a:solidFill>
@@ -7183,7 +7742,7 @@
               </a:rPr>
               <a:t>순환 참조 방지 설계</a:t>
             </a:r>
-            <a:endParaRPr sz="1050">
+            <a:endParaRPr b="0" i="0" sz="1050" u="none" cap="none" strike="noStrike">
               <a:solidFill>
                 <a:schemeClr val="dk1"/>
               </a:solidFill>
@@ -7195,6 +7754,9 @@
           </a:p>
           <a:p>
             <a:pPr indent="-171450" lvl="0" marL="358775" marR="0" rtl="0" algn="l">
+              <a:lnSpc>
+                <a:spcPct val="100000"/>
+              </a:lnSpc>
               <a:spcBef>
                 <a:spcPts val="500"/>
               </a:spcBef>
@@ -7209,7 +7771,7 @@
               <a:buChar char="•"/>
             </a:pPr>
             <a:r>
-              <a:rPr lang="en-US" sz="1050">
+              <a:rPr b="0" i="0" lang="en-US" sz="1050" u="none" cap="none" strike="noStrike">
                 <a:solidFill>
                   <a:srgbClr val="1E293B"/>
                 </a:solidFill>
@@ -7220,7 +7782,7 @@
               </a:rPr>
               <a:t>HashSet 기반의 무한 루프 차단 및 DB 부하 방지</a:t>
             </a:r>
-            <a:endParaRPr sz="1050">
+            <a:endParaRPr b="0" i="0" sz="1050" u="none" cap="none" strike="noStrike">
               <a:solidFill>
                 <a:schemeClr val="dk1"/>
               </a:solidFill>
@@ -7273,18 +7835,26 @@
           <a:lstStyle/>
           <a:p>
             <a:pPr indent="0" lvl="0" marL="0" marR="0" rtl="0" algn="l">
-              <a:spcBef>
-                <a:spcPts val="0"/>
-              </a:spcBef>
-              <a:spcAft>
-                <a:spcPts val="0"/>
-              </a:spcAft>
+              <a:lnSpc>
+                <a:spcPct val="100000"/>
+              </a:lnSpc>
+              <a:spcBef>
+                <a:spcPts val="0"/>
+              </a:spcBef>
+              <a:spcAft>
+                <a:spcPts val="0"/>
+              </a:spcAft>
+              <a:buClr>
+                <a:srgbClr val="000000"/>
+              </a:buClr>
+              <a:buSzPts val="1800"/>
+              <a:buFont typeface="Arial"/>
               <a:buNone/>
             </a:pPr>
             <a:r>
               <a:t/>
             </a:r>
-            <a:endParaRPr sz="1800">
+            <a:endParaRPr b="0" i="0" sz="1800" u="none" cap="none" strike="noStrike">
               <a:solidFill>
                 <a:schemeClr val="dk1"/>
               </a:solidFill>
@@ -7324,18 +7894,26 @@
           <a:lstStyle/>
           <a:p>
             <a:pPr indent="0" lvl="0" marL="0" marR="0" rtl="0" algn="l">
-              <a:spcBef>
-                <a:spcPts val="0"/>
-              </a:spcBef>
-              <a:spcAft>
-                <a:spcPts val="0"/>
-              </a:spcAft>
+              <a:lnSpc>
+                <a:spcPct val="100000"/>
+              </a:lnSpc>
+              <a:spcBef>
+                <a:spcPts val="0"/>
+              </a:spcBef>
+              <a:spcAft>
+                <a:spcPts val="0"/>
+              </a:spcAft>
+              <a:buClr>
+                <a:srgbClr val="000000"/>
+              </a:buClr>
+              <a:buSzPts val="1800"/>
+              <a:buFont typeface="Arial"/>
               <a:buNone/>
             </a:pPr>
             <a:r>
               <a:t/>
             </a:r>
-            <a:endParaRPr sz="1800">
+            <a:endParaRPr b="0" i="0" sz="1800" u="none" cap="none" strike="noStrike">
               <a:solidFill>
                 <a:schemeClr val="dk1"/>
               </a:solidFill>
@@ -7373,6 +7951,9 @@
           <a:lstStyle/>
           <a:p>
             <a:pPr indent="0" lvl="0" marL="0" marR="0" rtl="0" algn="l">
+              <a:lnSpc>
+                <a:spcPct val="100000"/>
+              </a:lnSpc>
               <a:spcBef>
                 <a:spcPts val="0"/>
               </a:spcBef>
@@ -7387,7 +7968,7 @@
               <a:buNone/>
             </a:pPr>
             <a:r>
-              <a:rPr b="1" lang="en-US" sz="1600">
+              <a:rPr b="1" i="0" lang="en-US" sz="1600" u="none" cap="none" strike="noStrike">
                 <a:solidFill>
                   <a:srgbClr val="00294B"/>
                 </a:solidFill>
@@ -7398,7 +7979,7 @@
               </a:rPr>
               <a:t>메타데이터 수집</a:t>
             </a:r>
-            <a:endParaRPr sz="1600">
+            <a:endParaRPr b="0" i="0" sz="1600" u="none" cap="none" strike="noStrike">
               <a:solidFill>
                 <a:schemeClr val="dk1"/>
               </a:solidFill>
@@ -7436,6 +8017,9 @@
           <a:lstStyle/>
           <a:p>
             <a:pPr indent="-171450" lvl="0" marL="171450" marR="0" rtl="0" algn="l">
+              <a:lnSpc>
+                <a:spcPct val="100000"/>
+              </a:lnSpc>
               <a:spcBef>
                 <a:spcPts val="0"/>
               </a:spcBef>
@@ -7450,7 +8034,7 @@
               <a:buChar char="✔"/>
             </a:pPr>
             <a:r>
-              <a:rPr b="1" lang="en-US" sz="1050">
+              <a:rPr b="1" i="0" lang="en-US" sz="1050" u="none" cap="none" strike="noStrike">
                 <a:solidFill>
                   <a:srgbClr val="1E293B"/>
                 </a:solidFill>
@@ -7461,7 +8045,7 @@
               </a:rPr>
               <a:t>정밀 스키마 정보 추출</a:t>
             </a:r>
-            <a:endParaRPr sz="1050">
+            <a:endParaRPr b="0" i="0" sz="1050" u="none" cap="none" strike="noStrike">
               <a:solidFill>
                 <a:schemeClr val="dk1"/>
               </a:solidFill>
@@ -7473,6 +8057,9 @@
           </a:p>
           <a:p>
             <a:pPr indent="-171450" lvl="0" marL="358775" marR="0" rtl="0" algn="l">
+              <a:lnSpc>
+                <a:spcPct val="100000"/>
+              </a:lnSpc>
               <a:spcBef>
                 <a:spcPts val="500"/>
               </a:spcBef>
@@ -7487,7 +8074,7 @@
               <a:buChar char="•"/>
             </a:pPr>
             <a:r>
-              <a:rPr lang="en-US" sz="1050">
+              <a:rPr b="0" i="0" lang="en-US" sz="1050" u="none" cap="none" strike="noStrike">
                 <a:solidFill>
                   <a:srgbClr val="1E293B"/>
                 </a:solidFill>
@@ -7498,7 +8085,7 @@
               </a:rPr>
               <a:t>타입, Null여부, PK/FK, DefaultValue, Identity 및 인덱스 정보 수집</a:t>
             </a:r>
-            <a:endParaRPr sz="1050">
+            <a:endParaRPr b="0" i="0" sz="1050" u="none" cap="none" strike="noStrike">
               <a:solidFill>
                 <a:srgbClr val="1E293B"/>
               </a:solidFill>
@@ -7510,18 +8097,26 @@
           </a:p>
           <a:p>
             <a:pPr indent="0" lvl="0" marL="0" marR="0" rtl="0" algn="l">
+              <a:lnSpc>
+                <a:spcPct val="100000"/>
+              </a:lnSpc>
               <a:spcBef>
                 <a:spcPts val="500"/>
               </a:spcBef>
               <a:spcAft>
                 <a:spcPts val="0"/>
               </a:spcAft>
+              <a:buClr>
+                <a:srgbClr val="000000"/>
+              </a:buClr>
+              <a:buSzPts val="1050"/>
+              <a:buFont typeface="Arial"/>
               <a:buNone/>
             </a:pPr>
             <a:r>
               <a:t/>
             </a:r>
-            <a:endParaRPr sz="1050">
+            <a:endParaRPr b="0" i="0" sz="1050" u="none" cap="none" strike="noStrike">
               <a:solidFill>
                 <a:schemeClr val="dk1"/>
               </a:solidFill>
@@ -7533,6 +8128,9 @@
           </a:p>
           <a:p>
             <a:pPr indent="-171450" lvl="0" marL="171450" marR="0" rtl="0" algn="l">
+              <a:lnSpc>
+                <a:spcPct val="100000"/>
+              </a:lnSpc>
               <a:spcBef>
                 <a:spcPts val="500"/>
               </a:spcBef>
@@ -7547,7 +8145,7 @@
               <a:buChar char="✔"/>
             </a:pPr>
             <a:r>
-              <a:rPr b="1" lang="en-US" sz="1050">
+              <a:rPr b="1" i="0" lang="en-US" sz="1050" u="none" cap="none" strike="noStrike">
                 <a:solidFill>
                   <a:srgbClr val="1E293B"/>
                 </a:solidFill>
@@ -7558,7 +8156,7 @@
               </a:rPr>
               <a:t>한글 도메인 지식 맵핑</a:t>
             </a:r>
-            <a:endParaRPr sz="1050">
+            <a:endParaRPr b="0" i="0" sz="1050" u="none" cap="none" strike="noStrike">
               <a:solidFill>
                 <a:schemeClr val="dk1"/>
               </a:solidFill>
@@ -7570,6 +8168,9 @@
           </a:p>
           <a:p>
             <a:pPr indent="-171450" lvl="0" marL="358775" marR="0" rtl="0" algn="l">
+              <a:lnSpc>
+                <a:spcPct val="100000"/>
+              </a:lnSpc>
               <a:spcBef>
                 <a:spcPts val="500"/>
               </a:spcBef>
@@ -7584,7 +8185,7 @@
               <a:buChar char="•"/>
             </a:pPr>
             <a:r>
-              <a:rPr lang="en-US" sz="1050">
+              <a:rPr b="0" i="0" lang="en-US" sz="1050" u="none" cap="none" strike="noStrike">
                 <a:solidFill>
                   <a:srgbClr val="1E293B"/>
                 </a:solidFill>
@@ -7595,7 +8196,7 @@
               </a:rPr>
               <a:t>MS_Description 주석을 추출하여 AI 분석의 비즈니스 맥락으로 활용</a:t>
             </a:r>
-            <a:endParaRPr sz="1050">
+            <a:endParaRPr b="0" i="0" sz="1050" u="none" cap="none" strike="noStrike">
               <a:solidFill>
                 <a:srgbClr val="1E293B"/>
               </a:solidFill>
@@ -7607,18 +8208,26 @@
           </a:p>
           <a:p>
             <a:pPr indent="0" lvl="0" marL="0" marR="0" rtl="0" algn="l">
+              <a:lnSpc>
+                <a:spcPct val="100000"/>
+              </a:lnSpc>
               <a:spcBef>
                 <a:spcPts val="500"/>
               </a:spcBef>
               <a:spcAft>
                 <a:spcPts val="0"/>
               </a:spcAft>
+              <a:buClr>
+                <a:srgbClr val="000000"/>
+              </a:buClr>
+              <a:buSzPts val="1050"/>
+              <a:buFont typeface="Arial"/>
               <a:buNone/>
             </a:pPr>
             <a:r>
               <a:t/>
             </a:r>
-            <a:endParaRPr sz="1050">
+            <a:endParaRPr b="0" i="0" sz="1050" u="none" cap="none" strike="noStrike">
               <a:solidFill>
                 <a:schemeClr val="dk1"/>
               </a:solidFill>
@@ -7630,6 +8239,9 @@
           </a:p>
           <a:p>
             <a:pPr indent="-171450" lvl="0" marL="171450" marR="0" rtl="0" algn="l">
+              <a:lnSpc>
+                <a:spcPct val="100000"/>
+              </a:lnSpc>
               <a:spcBef>
                 <a:spcPts val="500"/>
               </a:spcBef>
@@ -7644,7 +8256,7 @@
               <a:buChar char="✔"/>
             </a:pPr>
             <a:r>
-              <a:rPr b="1" lang="en-US" sz="1050">
+              <a:rPr b="1" i="0" lang="en-US" sz="1050" u="none" cap="none" strike="noStrike">
                 <a:solidFill>
                   <a:srgbClr val="1E293B"/>
                 </a:solidFill>
@@ -7655,7 +8267,7 @@
               </a:rPr>
               <a:t>Soft Fail 안정성 정책</a:t>
             </a:r>
-            <a:endParaRPr sz="1050">
+            <a:endParaRPr b="0" i="0" sz="1050" u="none" cap="none" strike="noStrike">
               <a:solidFill>
                 <a:schemeClr val="dk1"/>
               </a:solidFill>
@@ -7667,6 +8279,9 @@
           </a:p>
           <a:p>
             <a:pPr indent="-171450" lvl="0" marL="358775" marR="0" rtl="0" algn="l">
+              <a:lnSpc>
+                <a:spcPct val="100000"/>
+              </a:lnSpc>
               <a:spcBef>
                 <a:spcPts val="500"/>
               </a:spcBef>
@@ -7681,7 +8296,7 @@
               <a:buChar char="•"/>
             </a:pPr>
             <a:r>
-              <a:rPr lang="en-US" sz="1050">
+              <a:rPr b="0" i="0" lang="en-US" sz="1050" u="none" cap="none" strike="noStrike">
                 <a:solidFill>
                   <a:srgbClr val="1E293B"/>
                 </a:solidFill>
@@ -7692,7 +8307,7 @@
               </a:rPr>
               <a:t>조회 권한 누락 등 예외 발생 시, Warnings에 기록하고 정상 분석 진행</a:t>
             </a:r>
-            <a:endParaRPr sz="1050">
+            <a:endParaRPr b="0" i="0" sz="1050" u="none" cap="none" strike="noStrike">
               <a:solidFill>
                 <a:schemeClr val="dk1"/>
               </a:solidFill>
@@ -7762,6 +8377,9 @@
           <a:lstStyle/>
           <a:p>
             <a:pPr indent="0" lvl="0" marL="0" marR="0" rtl="0" algn="l">
+              <a:lnSpc>
+                <a:spcPct val="100000"/>
+              </a:lnSpc>
               <a:spcBef>
                 <a:spcPts val="0"/>
               </a:spcBef>
@@ -7776,7 +8394,7 @@
               <a:buNone/>
             </a:pPr>
             <a:r>
-              <a:rPr b="1" lang="en-US" sz="2400">
+              <a:rPr b="1" i="0" lang="en-US" sz="2400" u="none" cap="none" strike="noStrike">
                 <a:solidFill>
                   <a:srgbClr val="00294B"/>
                 </a:solidFill>
@@ -7787,7 +8405,7 @@
               </a:rPr>
               <a:t>3단계 신뢰성 검증 파이프라인</a:t>
             </a:r>
-            <a:endParaRPr sz="2400">
+            <a:endParaRPr b="0" i="0" sz="2400" u="none" cap="none" strike="noStrike">
               <a:solidFill>
                 <a:schemeClr val="dk1"/>
               </a:solidFill>
@@ -7840,18 +8458,26 @@
           <a:lstStyle/>
           <a:p>
             <a:pPr indent="0" lvl="0" marL="0" marR="0" rtl="0" algn="l">
-              <a:spcBef>
-                <a:spcPts val="0"/>
-              </a:spcBef>
-              <a:spcAft>
-                <a:spcPts val="0"/>
-              </a:spcAft>
+              <a:lnSpc>
+                <a:spcPct val="100000"/>
+              </a:lnSpc>
+              <a:spcBef>
+                <a:spcPts val="0"/>
+              </a:spcBef>
+              <a:spcAft>
+                <a:spcPts val="0"/>
+              </a:spcAft>
+              <a:buClr>
+                <a:srgbClr val="000000"/>
+              </a:buClr>
+              <a:buSzPts val="1800"/>
+              <a:buFont typeface="Arial"/>
               <a:buNone/>
             </a:pPr>
             <a:r>
               <a:t/>
             </a:r>
-            <a:endParaRPr sz="1800">
+            <a:endParaRPr b="0" i="0" sz="1800" u="none" cap="none" strike="noStrike">
               <a:solidFill>
                 <a:schemeClr val="dk1"/>
               </a:solidFill>
@@ -7891,18 +8517,26 @@
           <a:lstStyle/>
           <a:p>
             <a:pPr indent="0" lvl="0" marL="0" marR="0" rtl="0" algn="l">
-              <a:spcBef>
-                <a:spcPts val="0"/>
-              </a:spcBef>
-              <a:spcAft>
-                <a:spcPts val="0"/>
-              </a:spcAft>
+              <a:lnSpc>
+                <a:spcPct val="100000"/>
+              </a:lnSpc>
+              <a:spcBef>
+                <a:spcPts val="0"/>
+              </a:spcBef>
+              <a:spcAft>
+                <a:spcPts val="0"/>
+              </a:spcAft>
+              <a:buClr>
+                <a:srgbClr val="000000"/>
+              </a:buClr>
+              <a:buSzPts val="1800"/>
+              <a:buFont typeface="Arial"/>
               <a:buNone/>
             </a:pPr>
             <a:r>
               <a:t/>
             </a:r>
-            <a:endParaRPr sz="1800">
+            <a:endParaRPr b="0" i="0" sz="1800" u="none" cap="none" strike="noStrike">
               <a:solidFill>
                 <a:schemeClr val="dk1"/>
               </a:solidFill>
@@ -7940,6 +8574,9 @@
           <a:lstStyle/>
           <a:p>
             <a:pPr indent="0" lvl="0" marL="0" marR="0" rtl="0" algn="ctr">
+              <a:lnSpc>
+                <a:spcPct val="100000"/>
+              </a:lnSpc>
               <a:spcBef>
                 <a:spcPts val="0"/>
               </a:spcBef>
@@ -7954,7 +8591,7 @@
               <a:buNone/>
             </a:pPr>
             <a:r>
-              <a:rPr b="1" lang="en-US" sz="1300">
+              <a:rPr b="1" i="0" lang="en-US" sz="1300" u="none" cap="none" strike="noStrike">
                 <a:solidFill>
                   <a:srgbClr val="FFFFFF"/>
                 </a:solidFill>
@@ -7965,7 +8602,7 @@
               </a:rPr>
               <a:t>Level 1: 기계적 정적 검증</a:t>
             </a:r>
-            <a:endParaRPr sz="1300">
+            <a:endParaRPr b="0" i="0" sz="1300" u="none" cap="none" strike="noStrike">
               <a:solidFill>
                 <a:schemeClr val="dk1"/>
               </a:solidFill>
@@ -8003,6 +8640,9 @@
           <a:lstStyle/>
           <a:p>
             <a:pPr indent="-279400" lvl="0" marL="342900" marR="0" rtl="0" algn="l">
+              <a:lnSpc>
+                <a:spcPct val="100000"/>
+              </a:lnSpc>
               <a:spcBef>
                 <a:spcPts val="0"/>
               </a:spcBef>
@@ -8019,7 +8659,7 @@
             <a:r>
               <a:t/>
             </a:r>
-            <a:endParaRPr sz="1000">
+            <a:endParaRPr b="0" i="0" sz="1000" u="none" cap="none" strike="noStrike">
               <a:solidFill>
                 <a:srgbClr val="1E293B"/>
               </a:solidFill>
@@ -8031,6 +8671,9 @@
           </a:p>
           <a:p>
             <a:pPr indent="-182563" lvl="0" marL="182563" marR="0" rtl="0" algn="l">
+              <a:lnSpc>
+                <a:spcPct val="100000"/>
+              </a:lnSpc>
               <a:spcBef>
                 <a:spcPts val="500"/>
               </a:spcBef>
@@ -8045,7 +8688,7 @@
               <a:buChar char="✔"/>
             </a:pPr>
             <a:r>
-              <a:rPr lang="en-US" sz="1000">
+              <a:rPr b="0" i="0" lang="en-US" sz="1000" u="none" cap="none" strike="noStrike">
                 <a:solidFill>
                   <a:srgbClr val="1E293B"/>
                 </a:solidFill>
@@ -8056,7 +8699,7 @@
               </a:rPr>
               <a:t>Markdig AST 분석을 통한 5대 필수 헤더 누락 정적 검사</a:t>
             </a:r>
-            <a:endParaRPr sz="1000">
+            <a:endParaRPr b="0" i="0" sz="1000" u="none" cap="none" strike="noStrike">
               <a:solidFill>
                 <a:srgbClr val="1E293B"/>
               </a:solidFill>
@@ -8068,6 +8711,9 @@
           </a:p>
           <a:p>
             <a:pPr indent="-119063" lvl="0" marL="182563" marR="0" rtl="0" algn="l">
+              <a:lnSpc>
+                <a:spcPct val="100000"/>
+              </a:lnSpc>
               <a:spcBef>
                 <a:spcPts val="500"/>
               </a:spcBef>
@@ -8084,7 +8730,7 @@
             <a:r>
               <a:t/>
             </a:r>
-            <a:endParaRPr sz="1000">
+            <a:endParaRPr b="0" i="0" sz="1000" u="none" cap="none" strike="noStrike">
               <a:solidFill>
                 <a:schemeClr val="dk1"/>
               </a:solidFill>
@@ -8096,6 +8742,9 @@
           </a:p>
           <a:p>
             <a:pPr indent="-182563" lvl="0" marL="182563" marR="0" rtl="0" algn="l">
+              <a:lnSpc>
+                <a:spcPct val="100000"/>
+              </a:lnSpc>
               <a:spcBef>
                 <a:spcPts val="500"/>
               </a:spcBef>
@@ -8110,7 +8759,7 @@
               <a:buChar char="✔"/>
             </a:pPr>
             <a:r>
-              <a:rPr lang="en-US" sz="1000">
+              <a:rPr b="0" i="0" lang="en-US" sz="1000" u="none" cap="none" strike="noStrike">
                 <a:solidFill>
                   <a:srgbClr val="1E293B"/>
                 </a:solidFill>
@@ -8121,7 +8770,7 @@
               </a:rPr>
               <a:t>Mermaid 다이어그램 백그라운드 컴파일(mmdc) 검증</a:t>
             </a:r>
-            <a:endParaRPr sz="1000">
+            <a:endParaRPr b="0" i="0" sz="1000" u="none" cap="none" strike="noStrike">
               <a:solidFill>
                 <a:srgbClr val="1E293B"/>
               </a:solidFill>
@@ -8133,6 +8782,9 @@
           </a:p>
           <a:p>
             <a:pPr indent="-119063" lvl="0" marL="182563" marR="0" rtl="0" algn="l">
+              <a:lnSpc>
+                <a:spcPct val="100000"/>
+              </a:lnSpc>
               <a:spcBef>
                 <a:spcPts val="500"/>
               </a:spcBef>
@@ -8149,7 +8801,7 @@
             <a:r>
               <a:t/>
             </a:r>
-            <a:endParaRPr sz="1000">
+            <a:endParaRPr b="0" i="0" sz="1000" u="none" cap="none" strike="noStrike">
               <a:solidFill>
                 <a:schemeClr val="dk1"/>
               </a:solidFill>
@@ -8161,6 +8813,9 @@
           </a:p>
           <a:p>
             <a:pPr indent="-182563" lvl="0" marL="182563" marR="0" rtl="0" algn="l">
+              <a:lnSpc>
+                <a:spcPct val="100000"/>
+              </a:lnSpc>
               <a:spcBef>
                 <a:spcPts val="500"/>
               </a:spcBef>
@@ -8175,7 +8830,7 @@
               <a:buChar char="✔"/>
             </a:pPr>
             <a:r>
-              <a:rPr lang="en-US" sz="1000">
+              <a:rPr b="0" i="0" lang="en-US" sz="1000" u="none" cap="none" strike="noStrike">
                 <a:solidFill>
                   <a:srgbClr val="1E293B"/>
                 </a:solidFill>
@@ -8186,7 +8841,7 @@
               </a:rPr>
               <a:t>오류 감지 시 AI에 정형화된 피드백 전달 및 자가 수정 실행</a:t>
             </a:r>
-            <a:endParaRPr sz="1000">
+            <a:endParaRPr b="0" i="0" sz="1000" u="none" cap="none" strike="noStrike">
               <a:solidFill>
                 <a:schemeClr val="dk1"/>
               </a:solidFill>
@@ -8265,18 +8920,26 @@
           <a:lstStyle/>
           <a:p>
             <a:pPr indent="0" lvl="0" marL="0" marR="0" rtl="0" algn="l">
-              <a:spcBef>
-                <a:spcPts val="0"/>
-              </a:spcBef>
-              <a:spcAft>
-                <a:spcPts val="0"/>
-              </a:spcAft>
+              <a:lnSpc>
+                <a:spcPct val="100000"/>
+              </a:lnSpc>
+              <a:spcBef>
+                <a:spcPts val="0"/>
+              </a:spcBef>
+              <a:spcAft>
+                <a:spcPts val="0"/>
+              </a:spcAft>
+              <a:buClr>
+                <a:srgbClr val="000000"/>
+              </a:buClr>
+              <a:buSzPts val="1800"/>
+              <a:buFont typeface="Arial"/>
               <a:buNone/>
             </a:pPr>
             <a:r>
               <a:t/>
             </a:r>
-            <a:endParaRPr sz="1800">
+            <a:endParaRPr b="0" i="0" sz="1800" u="none" cap="none" strike="noStrike">
               <a:solidFill>
                 <a:schemeClr val="dk1"/>
               </a:solidFill>
@@ -8316,18 +8979,26 @@
           <a:lstStyle/>
           <a:p>
             <a:pPr indent="0" lvl="0" marL="0" marR="0" rtl="0" algn="l">
-              <a:spcBef>
-                <a:spcPts val="0"/>
-              </a:spcBef>
-              <a:spcAft>
-                <a:spcPts val="0"/>
-              </a:spcAft>
+              <a:lnSpc>
+                <a:spcPct val="100000"/>
+              </a:lnSpc>
+              <a:spcBef>
+                <a:spcPts val="0"/>
+              </a:spcBef>
+              <a:spcAft>
+                <a:spcPts val="0"/>
+              </a:spcAft>
+              <a:buClr>
+                <a:srgbClr val="000000"/>
+              </a:buClr>
+              <a:buSzPts val="1800"/>
+              <a:buFont typeface="Arial"/>
               <a:buNone/>
             </a:pPr>
             <a:r>
               <a:t/>
             </a:r>
-            <a:endParaRPr sz="1800">
+            <a:endParaRPr b="0" i="0" sz="1800" u="none" cap="none" strike="noStrike">
               <a:solidFill>
                 <a:schemeClr val="dk1"/>
               </a:solidFill>
@@ -8365,6 +9036,9 @@
           <a:lstStyle/>
           <a:p>
             <a:pPr indent="0" lvl="0" marL="0" marR="0" rtl="0" algn="ctr">
+              <a:lnSpc>
+                <a:spcPct val="100000"/>
+              </a:lnSpc>
               <a:spcBef>
                 <a:spcPts val="0"/>
               </a:spcBef>
@@ -8379,7 +9053,7 @@
               <a:buNone/>
             </a:pPr>
             <a:r>
-              <a:rPr b="1" lang="en-US" sz="1300">
+              <a:rPr b="1" i="0" lang="en-US" sz="1300" u="none" cap="none" strike="noStrike">
                 <a:solidFill>
                   <a:srgbClr val="FFFFFF"/>
                 </a:solidFill>
@@ -8390,7 +9064,7 @@
               </a:rPr>
               <a:t>Level 2: AI 교차 리뷰</a:t>
             </a:r>
-            <a:endParaRPr sz="1300">
+            <a:endParaRPr b="0" i="0" sz="1300" u="none" cap="none" strike="noStrike">
               <a:solidFill>
                 <a:schemeClr val="dk1"/>
               </a:solidFill>
@@ -8428,6 +9102,9 @@
           <a:lstStyle/>
           <a:p>
             <a:pPr indent="-279400" lvl="0" marL="342900" marR="0" rtl="0" algn="l">
+              <a:lnSpc>
+                <a:spcPct val="100000"/>
+              </a:lnSpc>
               <a:spcBef>
                 <a:spcPts val="0"/>
               </a:spcBef>
@@ -8444,7 +9121,7 @@
             <a:r>
               <a:t/>
             </a:r>
-            <a:endParaRPr sz="1000">
+            <a:endParaRPr b="0" i="0" sz="1000" u="none" cap="none" strike="noStrike">
               <a:solidFill>
                 <a:srgbClr val="1E293B"/>
               </a:solidFill>
@@ -8456,6 +9133,9 @@
           </a:p>
           <a:p>
             <a:pPr indent="-182563" lvl="0" marL="182563" marR="0" rtl="0" algn="l">
+              <a:lnSpc>
+                <a:spcPct val="100000"/>
+              </a:lnSpc>
               <a:spcBef>
                 <a:spcPts val="500"/>
               </a:spcBef>
@@ -8470,7 +9150,7 @@
               <a:buChar char="✔"/>
             </a:pPr>
             <a:r>
-              <a:rPr lang="en-US" sz="1000">
+              <a:rPr b="0" i="0" lang="en-US" sz="1000" u="none" cap="none" strike="noStrike">
                 <a:solidFill>
                   <a:srgbClr val="1E293B"/>
                 </a:solidFill>
@@ -8481,7 +9161,7 @@
               </a:rPr>
               <a:t>Actor-Critic 앙상블: dynamic 강도 모델 병렬 가동</a:t>
             </a:r>
-            <a:endParaRPr sz="1000">
+            <a:endParaRPr b="0" i="0" sz="1000" u="none" cap="none" strike="noStrike">
               <a:solidFill>
                 <a:srgbClr val="1E293B"/>
               </a:solidFill>
@@ -8493,6 +9173,9 @@
           </a:p>
           <a:p>
             <a:pPr indent="-119063" lvl="0" marL="182563" marR="0" rtl="0" algn="l">
+              <a:lnSpc>
+                <a:spcPct val="100000"/>
+              </a:lnSpc>
               <a:spcBef>
                 <a:spcPts val="500"/>
               </a:spcBef>
@@ -8509,7 +9192,7 @@
             <a:r>
               <a:t/>
             </a:r>
-            <a:endParaRPr sz="1000">
+            <a:endParaRPr b="0" i="0" sz="1000" u="none" cap="none" strike="noStrike">
               <a:solidFill>
                 <a:schemeClr val="dk1"/>
               </a:solidFill>
@@ -8521,6 +9204,9 @@
           </a:p>
           <a:p>
             <a:pPr indent="-182563" lvl="0" marL="182563" marR="0" rtl="0" algn="l">
+              <a:lnSpc>
+                <a:spcPct val="100000"/>
+              </a:lnSpc>
               <a:spcBef>
                 <a:spcPts val="500"/>
               </a:spcBef>
@@ -8535,7 +9221,7 @@
               <a:buChar char="✔"/>
             </a:pPr>
             <a:r>
-              <a:rPr lang="en-US" sz="1000">
+              <a:rPr b="0" i="0" lang="en-US" sz="1000" u="none" cap="none" strike="noStrike">
                 <a:solidFill>
                   <a:srgbClr val="1E293B"/>
                 </a:solidFill>
@@ -8546,7 +9232,7 @@
               </a:rPr>
               <a:t>Low/Med/High 3종 후보 중 Critic 에이전트 정량 채점</a:t>
             </a:r>
-            <a:endParaRPr sz="1000">
+            <a:endParaRPr b="0" i="0" sz="1000" u="none" cap="none" strike="noStrike">
               <a:solidFill>
                 <a:srgbClr val="1E293B"/>
               </a:solidFill>
@@ -8558,6 +9244,9 @@
           </a:p>
           <a:p>
             <a:pPr indent="-119063" lvl="0" marL="182563" marR="0" rtl="0" algn="l">
+              <a:lnSpc>
+                <a:spcPct val="100000"/>
+              </a:lnSpc>
               <a:spcBef>
                 <a:spcPts val="500"/>
               </a:spcBef>
@@ -8574,7 +9263,7 @@
             <a:r>
               <a:t/>
             </a:r>
-            <a:endParaRPr sz="1000">
+            <a:endParaRPr b="0" i="0" sz="1000" u="none" cap="none" strike="noStrike">
               <a:solidFill>
                 <a:schemeClr val="dk1"/>
               </a:solidFill>
@@ -8586,6 +9275,9 @@
           </a:p>
           <a:p>
             <a:pPr indent="-182563" lvl="0" marL="182563" marR="0" rtl="0" algn="l">
+              <a:lnSpc>
+                <a:spcPct val="100000"/>
+              </a:lnSpc>
               <a:spcBef>
                 <a:spcPts val="500"/>
               </a:spcBef>
@@ -8600,7 +9292,7 @@
               <a:buChar char="✔"/>
             </a:pPr>
             <a:r>
-              <a:rPr lang="en-US" sz="1000">
+              <a:rPr b="0" i="0" lang="en-US" sz="1000" u="none" cap="none" strike="noStrike">
                 <a:solidFill>
                   <a:srgbClr val="1E293B"/>
                 </a:solidFill>
@@ -8611,7 +9303,7 @@
               </a:rPr>
               <a:t>90점 이상 Fast-Pass 채택, 미달 시 Consolidator 부위별 합성</a:t>
             </a:r>
-            <a:endParaRPr sz="1000">
+            <a:endParaRPr b="0" i="0" sz="1000" u="none" cap="none" strike="noStrike">
               <a:solidFill>
                 <a:schemeClr val="dk1"/>
               </a:solidFill>
@@ -8690,18 +9382,26 @@
           <a:lstStyle/>
           <a:p>
             <a:pPr indent="0" lvl="0" marL="0" marR="0" rtl="0" algn="l">
-              <a:spcBef>
-                <a:spcPts val="0"/>
-              </a:spcBef>
-              <a:spcAft>
-                <a:spcPts val="0"/>
-              </a:spcAft>
+              <a:lnSpc>
+                <a:spcPct val="100000"/>
+              </a:lnSpc>
+              <a:spcBef>
+                <a:spcPts val="0"/>
+              </a:spcBef>
+              <a:spcAft>
+                <a:spcPts val="0"/>
+              </a:spcAft>
+              <a:buClr>
+                <a:srgbClr val="000000"/>
+              </a:buClr>
+              <a:buSzPts val="1800"/>
+              <a:buFont typeface="Arial"/>
               <a:buNone/>
             </a:pPr>
             <a:r>
               <a:t/>
             </a:r>
-            <a:endParaRPr sz="1800">
+            <a:endParaRPr b="0" i="0" sz="1800" u="none" cap="none" strike="noStrike">
               <a:solidFill>
                 <a:schemeClr val="dk1"/>
               </a:solidFill>
@@ -8741,18 +9441,26 @@
           <a:lstStyle/>
           <a:p>
             <a:pPr indent="0" lvl="0" marL="0" marR="0" rtl="0" algn="l">
-              <a:spcBef>
-                <a:spcPts val="0"/>
-              </a:spcBef>
-              <a:spcAft>
-                <a:spcPts val="0"/>
-              </a:spcAft>
+              <a:lnSpc>
+                <a:spcPct val="100000"/>
+              </a:lnSpc>
+              <a:spcBef>
+                <a:spcPts val="0"/>
+              </a:spcBef>
+              <a:spcAft>
+                <a:spcPts val="0"/>
+              </a:spcAft>
+              <a:buClr>
+                <a:srgbClr val="000000"/>
+              </a:buClr>
+              <a:buSzPts val="1800"/>
+              <a:buFont typeface="Arial"/>
               <a:buNone/>
             </a:pPr>
             <a:r>
               <a:t/>
             </a:r>
-            <a:endParaRPr sz="1800">
+            <a:endParaRPr b="0" i="0" sz="1800" u="none" cap="none" strike="noStrike">
               <a:solidFill>
                 <a:schemeClr val="dk1"/>
               </a:solidFill>
@@ -8790,6 +9498,9 @@
           <a:lstStyle/>
           <a:p>
             <a:pPr indent="0" lvl="0" marL="0" marR="0" rtl="0" algn="ctr">
+              <a:lnSpc>
+                <a:spcPct val="100000"/>
+              </a:lnSpc>
               <a:spcBef>
                 <a:spcPts val="0"/>
               </a:spcBef>
@@ -8804,7 +9515,7 @@
               <a:buNone/>
             </a:pPr>
             <a:r>
-              <a:rPr b="1" lang="en-US" sz="1300">
+              <a:rPr b="1" i="0" lang="en-US" sz="1300" u="none" cap="none" strike="noStrike">
                 <a:solidFill>
                   <a:srgbClr val="FFFFFF"/>
                 </a:solidFill>
@@ -8815,7 +9526,7 @@
               </a:rPr>
               <a:t>Level 3: 인간 승인 피드백</a:t>
             </a:r>
-            <a:endParaRPr sz="1300">
+            <a:endParaRPr b="0" i="0" sz="1300" u="none" cap="none" strike="noStrike">
               <a:solidFill>
                 <a:schemeClr val="dk1"/>
               </a:solidFill>
@@ -8853,6 +9564,9 @@
           <a:lstStyle/>
           <a:p>
             <a:pPr indent="-279400" lvl="0" marL="342900" marR="0" rtl="0" algn="l">
+              <a:lnSpc>
+                <a:spcPct val="100000"/>
+              </a:lnSpc>
               <a:spcBef>
                 <a:spcPts val="0"/>
               </a:spcBef>
@@ -8869,7 +9583,7 @@
             <a:r>
               <a:t/>
             </a:r>
-            <a:endParaRPr sz="1000">
+            <a:endParaRPr b="0" i="0" sz="1000" u="none" cap="none" strike="noStrike">
               <a:solidFill>
                 <a:srgbClr val="1E293B"/>
               </a:solidFill>
@@ -8881,6 +9595,9 @@
           </a:p>
           <a:p>
             <a:pPr indent="-182563" lvl="0" marL="182563" marR="0" rtl="0" algn="l">
+              <a:lnSpc>
+                <a:spcPct val="100000"/>
+              </a:lnSpc>
               <a:spcBef>
                 <a:spcPts val="500"/>
               </a:spcBef>
@@ -8895,7 +9612,7 @@
               <a:buChar char="✔"/>
             </a:pPr>
             <a:r>
-              <a:rPr lang="en-US" sz="1000">
+              <a:rPr b="0" i="0" lang="en-US" sz="1000" u="none" cap="none" strike="noStrike">
                 <a:solidFill>
                   <a:srgbClr val="1E293B"/>
                 </a:solidFill>
@@ -8906,7 +9623,7 @@
               </a:rPr>
               <a:t>TUI 실시간 미리보기 제공 및 승인/반려/수동 피드백 수렴</a:t>
             </a:r>
-            <a:endParaRPr sz="1000">
+            <a:endParaRPr b="0" i="0" sz="1000" u="none" cap="none" strike="noStrike">
               <a:solidFill>
                 <a:srgbClr val="1E293B"/>
               </a:solidFill>
@@ -8918,6 +9635,9 @@
           </a:p>
           <a:p>
             <a:pPr indent="-119063" lvl="0" marL="182563" marR="0" rtl="0" algn="l">
+              <a:lnSpc>
+                <a:spcPct val="100000"/>
+              </a:lnSpc>
               <a:spcBef>
                 <a:spcPts val="500"/>
               </a:spcBef>
@@ -8934,7 +9654,7 @@
             <a:r>
               <a:t/>
             </a:r>
-            <a:endParaRPr sz="1000">
+            <a:endParaRPr b="0" i="0" sz="1000" u="none" cap="none" strike="noStrike">
               <a:solidFill>
                 <a:schemeClr val="dk1"/>
               </a:solidFill>
@@ -8946,6 +9666,9 @@
           </a:p>
           <a:p>
             <a:pPr indent="-182563" lvl="0" marL="182563" marR="0" rtl="0" algn="l">
+              <a:lnSpc>
+                <a:spcPct val="100000"/>
+              </a:lnSpc>
               <a:spcBef>
                 <a:spcPts val="500"/>
               </a:spcBef>
@@ -8960,7 +9683,7 @@
               <a:buChar char="✔"/>
             </a:pPr>
             <a:r>
-              <a:rPr lang="en-US" sz="1000">
+              <a:rPr b="0" i="0" lang="en-US" sz="1000" u="none" cap="none" strike="noStrike">
                 <a:solidFill>
                   <a:srgbClr val="1E293B"/>
                 </a:solidFill>
@@ -8971,7 +9694,7 @@
               </a:rPr>
               <a:t>최종 승인 시 DB Extended Property 역동기화 지원</a:t>
             </a:r>
-            <a:endParaRPr sz="1000">
+            <a:endParaRPr b="0" i="0" sz="1000" u="none" cap="none" strike="noStrike">
               <a:solidFill>
                 <a:srgbClr val="1E293B"/>
               </a:solidFill>
@@ -8983,6 +9706,9 @@
           </a:p>
           <a:p>
             <a:pPr indent="-119063" lvl="0" marL="182563" marR="0" rtl="0" algn="l">
+              <a:lnSpc>
+                <a:spcPct val="100000"/>
+              </a:lnSpc>
               <a:spcBef>
                 <a:spcPts val="500"/>
               </a:spcBef>
@@ -8999,7 +9725,7 @@
             <a:r>
               <a:t/>
             </a:r>
-            <a:endParaRPr sz="1000">
+            <a:endParaRPr b="0" i="0" sz="1000" u="none" cap="none" strike="noStrike">
               <a:solidFill>
                 <a:schemeClr val="dk1"/>
               </a:solidFill>
@@ -9011,6 +9737,9 @@
           </a:p>
           <a:p>
             <a:pPr indent="-182563" lvl="0" marL="182563" marR="0" rtl="0" algn="l">
+              <a:lnSpc>
+                <a:spcPct val="100000"/>
+              </a:lnSpc>
               <a:spcBef>
                 <a:spcPts val="500"/>
               </a:spcBef>
@@ -9025,7 +9754,7 @@
               <a:buChar char="✔"/>
             </a:pPr>
             <a:r>
-              <a:rPr lang="en-US" sz="1000">
+              <a:rPr b="0" i="0" lang="en-US" sz="1000" u="none" cap="none" strike="noStrike">
                 <a:solidFill>
                   <a:srgbClr val="1E293B"/>
                 </a:solidFill>
@@ -9036,7 +9765,7 @@
               </a:rPr>
               <a:t>배치 실행 모드 시 L3 프롬프트 단계를 생략하고 자동 우회 승인</a:t>
             </a:r>
-            <a:endParaRPr sz="1000">
+            <a:endParaRPr b="0" i="0" sz="1000" u="none" cap="none" strike="noStrike">
               <a:solidFill>
                 <a:schemeClr val="dk1"/>
               </a:solidFill>
@@ -9106,6 +9835,9 @@
           <a:lstStyle/>
           <a:p>
             <a:pPr indent="0" lvl="0" marL="0" marR="0" rtl="0" algn="l">
+              <a:lnSpc>
+                <a:spcPct val="100000"/>
+              </a:lnSpc>
               <a:spcBef>
                 <a:spcPts val="0"/>
               </a:spcBef>
@@ -9120,7 +9852,7 @@
               <a:buNone/>
             </a:pPr>
             <a:r>
-              <a:rPr b="1" lang="en-US" sz="2400">
+              <a:rPr b="1" i="0" lang="en-US" sz="2400" u="none" cap="none" strike="noStrike">
                 <a:solidFill>
                   <a:srgbClr val="00294B"/>
                 </a:solidFill>
@@ -9131,7 +9863,7 @@
               </a:rPr>
               <a:t>AI 교차 리뷰 (L2 Actor-Critic) 메커니즘</a:t>
             </a:r>
-            <a:endParaRPr sz="2400">
+            <a:endParaRPr b="0" i="0" sz="2400" u="none" cap="none" strike="noStrike">
               <a:solidFill>
                 <a:schemeClr val="dk1"/>
               </a:solidFill>
@@ -9184,18 +9916,26 @@
           <a:lstStyle/>
           <a:p>
             <a:pPr indent="0" lvl="0" marL="0" marR="0" rtl="0" algn="l">
-              <a:spcBef>
-                <a:spcPts val="0"/>
-              </a:spcBef>
-              <a:spcAft>
-                <a:spcPts val="0"/>
-              </a:spcAft>
+              <a:lnSpc>
+                <a:spcPct val="100000"/>
+              </a:lnSpc>
+              <a:spcBef>
+                <a:spcPts val="0"/>
+              </a:spcBef>
+              <a:spcAft>
+                <a:spcPts val="0"/>
+              </a:spcAft>
+              <a:buClr>
+                <a:srgbClr val="000000"/>
+              </a:buClr>
+              <a:buSzPts val="1800"/>
+              <a:buFont typeface="Arial"/>
               <a:buNone/>
             </a:pPr>
             <a:r>
               <a:t/>
             </a:r>
-            <a:endParaRPr sz="1800">
+            <a:endParaRPr b="0" i="0" sz="1800" u="none" cap="none" strike="noStrike">
               <a:solidFill>
                 <a:schemeClr val="dk1"/>
               </a:solidFill>
@@ -9235,18 +9975,26 @@
           <a:lstStyle/>
           <a:p>
             <a:pPr indent="0" lvl="0" marL="0" marR="0" rtl="0" algn="l">
-              <a:spcBef>
-                <a:spcPts val="0"/>
-              </a:spcBef>
-              <a:spcAft>
-                <a:spcPts val="0"/>
-              </a:spcAft>
+              <a:lnSpc>
+                <a:spcPct val="100000"/>
+              </a:lnSpc>
+              <a:spcBef>
+                <a:spcPts val="0"/>
+              </a:spcBef>
+              <a:spcAft>
+                <a:spcPts val="0"/>
+              </a:spcAft>
+              <a:buClr>
+                <a:srgbClr val="000000"/>
+              </a:buClr>
+              <a:buSzPts val="1800"/>
+              <a:buFont typeface="Arial"/>
               <a:buNone/>
             </a:pPr>
             <a:r>
               <a:t/>
             </a:r>
-            <a:endParaRPr sz="1800">
+            <a:endParaRPr b="0" i="0" sz="1800" u="none" cap="none" strike="noStrike">
               <a:solidFill>
                 <a:schemeClr val="dk1"/>
               </a:solidFill>
@@ -9284,6 +10032,9 @@
           <a:lstStyle/>
           <a:p>
             <a:pPr indent="0" lvl="0" marL="0" marR="0" rtl="0" algn="l">
+              <a:lnSpc>
+                <a:spcPct val="100000"/>
+              </a:lnSpc>
               <a:spcBef>
                 <a:spcPts val="0"/>
               </a:spcBef>
@@ -9298,7 +10049,7 @@
               <a:buNone/>
             </a:pPr>
             <a:r>
-              <a:rPr b="1" lang="en-US" sz="1600">
+              <a:rPr b="1" i="0" lang="en-US" sz="1600" u="none" cap="none" strike="noStrike">
                 <a:solidFill>
                   <a:srgbClr val="00294B"/>
                 </a:solidFill>
@@ -9309,7 +10060,7 @@
               </a:rPr>
               <a:t>1. 실행 모드 이원화 (ActorEffort)</a:t>
             </a:r>
-            <a:endParaRPr sz="1600">
+            <a:endParaRPr b="0" i="0" sz="1600" u="none" cap="none" strike="noStrike">
               <a:solidFill>
                 <a:schemeClr val="dk1"/>
               </a:solidFill>
@@ -9347,6 +10098,9 @@
           <a:lstStyle/>
           <a:p>
             <a:pPr indent="-182563" lvl="0" marL="182563" marR="0" rtl="0" algn="l">
+              <a:lnSpc>
+                <a:spcPct val="100000"/>
+              </a:lnSpc>
               <a:spcBef>
                 <a:spcPts val="0"/>
               </a:spcBef>
@@ -9361,7 +10115,7 @@
               <a:buChar char="✔"/>
             </a:pPr>
             <a:r>
-              <a:rPr b="1" lang="en-US" sz="1050">
+              <a:rPr b="1" i="0" lang="en-US" sz="1050" u="none" cap="none" strike="noStrike">
                 <a:solidFill>
                   <a:srgbClr val="1E293B"/>
                 </a:solidFill>
@@ -9372,7 +10126,7 @@
               </a:rPr>
               <a:t>단일 모드 (Single Mode)</a:t>
             </a:r>
-            <a:endParaRPr sz="1050">
+            <a:endParaRPr b="0" i="0" sz="1050" u="none" cap="none" strike="noStrike">
               <a:solidFill>
                 <a:schemeClr val="dk1"/>
               </a:solidFill>
@@ -9384,6 +10138,9 @@
           </a:p>
           <a:p>
             <a:pPr indent="-160338" lvl="0" marL="342900" marR="0" rtl="0" algn="l">
+              <a:lnSpc>
+                <a:spcPct val="100000"/>
+              </a:lnSpc>
               <a:spcBef>
                 <a:spcPts val="500"/>
               </a:spcBef>
@@ -9398,7 +10155,7 @@
               <a:buChar char="•"/>
             </a:pPr>
             <a:r>
-              <a:rPr lang="en-US" sz="1050">
+              <a:rPr b="0" i="0" lang="en-US" sz="1050" u="none" cap="none" strike="noStrike">
                 <a:solidFill>
                   <a:srgbClr val="1E293B"/>
                 </a:solidFill>
@@ -9409,7 +10166,7 @@
               </a:rPr>
               <a:t>지정된 단일 LLM 모델로 1차 명세서 빌드 진행</a:t>
             </a:r>
-            <a:endParaRPr sz="1050">
+            <a:endParaRPr b="0" i="0" sz="1050" u="none" cap="none" strike="noStrike">
               <a:solidFill>
                 <a:schemeClr val="dk1"/>
               </a:solidFill>
@@ -9421,6 +10178,9 @@
           </a:p>
           <a:p>
             <a:pPr indent="-160338" lvl="0" marL="342900" marR="0" rtl="0" algn="l">
+              <a:lnSpc>
+                <a:spcPct val="100000"/>
+              </a:lnSpc>
               <a:spcBef>
                 <a:spcPts val="500"/>
               </a:spcBef>
@@ -9435,7 +10195,7 @@
               <a:buChar char="•"/>
             </a:pPr>
             <a:r>
-              <a:rPr lang="en-US" sz="1050">
+              <a:rPr b="0" i="0" lang="en-US" sz="1050" u="none" cap="none" strike="noStrike">
                 <a:solidFill>
                   <a:srgbClr val="1E293B"/>
                 </a:solidFill>
@@ -9446,7 +10206,7 @@
               </a:rPr>
               <a:t>이종 Critic 에이전트의 5대 기준 평가 피드백 획득</a:t>
             </a:r>
-            <a:endParaRPr sz="1050">
+            <a:endParaRPr b="0" i="0" sz="1050" u="none" cap="none" strike="noStrike">
               <a:solidFill>
                 <a:schemeClr val="dk1"/>
               </a:solidFill>
@@ -9458,6 +10218,9 @@
           </a:p>
           <a:p>
             <a:pPr indent="-160338" lvl="0" marL="342900" marR="0" rtl="0" algn="l">
+              <a:lnSpc>
+                <a:spcPct val="100000"/>
+              </a:lnSpc>
               <a:spcBef>
                 <a:spcPts val="500"/>
               </a:spcBef>
@@ -9472,7 +10235,7 @@
               <a:buChar char="•"/>
             </a:pPr>
             <a:r>
-              <a:rPr lang="en-US" sz="1050">
+              <a:rPr b="0" i="0" lang="en-US" sz="1050" u="none" cap="none" strike="noStrike">
                 <a:solidFill>
                   <a:srgbClr val="1E293B"/>
                 </a:solidFill>
@@ -9483,7 +10246,7 @@
               </a:rPr>
               <a:t>결함 시 maxAttempts 한도 내 자가 수정 루프 가동</a:t>
             </a:r>
-            <a:endParaRPr sz="1050">
+            <a:endParaRPr b="0" i="0" sz="1050" u="none" cap="none" strike="noStrike">
               <a:solidFill>
                 <a:srgbClr val="1E293B"/>
               </a:solidFill>
@@ -9495,6 +10258,9 @@
           </a:p>
           <a:p>
             <a:pPr indent="-276225" lvl="0" marL="342900" marR="0" rtl="0" algn="l">
+              <a:lnSpc>
+                <a:spcPct val="100000"/>
+              </a:lnSpc>
               <a:spcBef>
                 <a:spcPts val="500"/>
               </a:spcBef>
@@ -9511,7 +10277,7 @@
             <a:r>
               <a:t/>
             </a:r>
-            <a:endParaRPr sz="1050">
+            <a:endParaRPr b="0" i="0" sz="1050" u="none" cap="none" strike="noStrike">
               <a:solidFill>
                 <a:schemeClr val="dk1"/>
               </a:solidFill>
@@ -9523,6 +10289,9 @@
           </a:p>
           <a:p>
             <a:pPr indent="-171450" lvl="0" marL="171450" marR="0" rtl="0" algn="l">
+              <a:lnSpc>
+                <a:spcPct val="100000"/>
+              </a:lnSpc>
               <a:spcBef>
                 <a:spcPts val="500"/>
               </a:spcBef>
@@ -9537,7 +10306,7 @@
               <a:buChar char="✔"/>
             </a:pPr>
             <a:r>
-              <a:rPr b="1" lang="en-US" sz="1050">
+              <a:rPr b="1" i="0" lang="en-US" sz="1050" u="none" cap="none" strike="noStrike">
                 <a:solidFill>
                   <a:srgbClr val="1E293B"/>
                 </a:solidFill>
@@ -9548,7 +10317,7 @@
               </a:rPr>
               <a:t>dynamic 모드 (병렬 협업)</a:t>
             </a:r>
-            <a:endParaRPr sz="1050">
+            <a:endParaRPr b="0" i="0" sz="1050" u="none" cap="none" strike="noStrike">
               <a:solidFill>
                 <a:schemeClr val="dk1"/>
               </a:solidFill>
@@ -9560,6 +10329,9 @@
           </a:p>
           <a:p>
             <a:pPr indent="-160338" lvl="0" marL="342900" marR="0" rtl="0" algn="l">
+              <a:lnSpc>
+                <a:spcPct val="100000"/>
+              </a:lnSpc>
               <a:spcBef>
                 <a:spcPts val="500"/>
               </a:spcBef>
@@ -9574,7 +10346,7 @@
               <a:buChar char="•"/>
             </a:pPr>
             <a:r>
-              <a:rPr lang="en-US" sz="1050">
+              <a:rPr b="0" i="0" lang="en-US" sz="1050" u="none" cap="none" strike="noStrike">
                 <a:solidFill>
                   <a:srgbClr val="1E293B"/>
                 </a:solidFill>
@@ -9585,7 +10357,7 @@
               </a:rPr>
               <a:t>다형성 및 앙상블 효과 극대화를 위한 다단계 협업 프로세스</a:t>
             </a:r>
-            <a:endParaRPr sz="1050">
+            <a:endParaRPr b="0" i="0" sz="1050" u="none" cap="none" strike="noStrike">
               <a:solidFill>
                 <a:schemeClr val="dk1"/>
               </a:solidFill>
@@ -9597,6 +10369,9 @@
           </a:p>
           <a:p>
             <a:pPr indent="-160338" lvl="0" marL="342900" marR="0" rtl="0" algn="l">
+              <a:lnSpc>
+                <a:spcPct val="100000"/>
+              </a:lnSpc>
               <a:spcBef>
                 <a:spcPts val="500"/>
               </a:spcBef>
@@ -9611,7 +10386,7 @@
               <a:buChar char="•"/>
             </a:pPr>
             <a:r>
-              <a:rPr lang="en-US" sz="1050">
+              <a:rPr b="0" i="0" lang="en-US" sz="1050" u="none" cap="none" strike="noStrike">
                 <a:solidFill>
                   <a:srgbClr val="1E293B"/>
                 </a:solidFill>
@@ -9622,7 +10397,7 @@
               </a:rPr>
               <a:t>차등 생성, Critic 채점, Consolidator 합성을 결합하여 무결점 도출</a:t>
             </a:r>
-            <a:endParaRPr sz="1050">
+            <a:endParaRPr b="0" i="0" sz="1050" u="none" cap="none" strike="noStrike">
               <a:solidFill>
                 <a:schemeClr val="dk1"/>
               </a:solidFill>
@@ -9675,18 +10450,26 @@
           <a:lstStyle/>
           <a:p>
             <a:pPr indent="0" lvl="0" marL="0" marR="0" rtl="0" algn="l">
-              <a:spcBef>
-                <a:spcPts val="0"/>
-              </a:spcBef>
-              <a:spcAft>
-                <a:spcPts val="0"/>
-              </a:spcAft>
+              <a:lnSpc>
+                <a:spcPct val="100000"/>
+              </a:lnSpc>
+              <a:spcBef>
+                <a:spcPts val="0"/>
+              </a:spcBef>
+              <a:spcAft>
+                <a:spcPts val="0"/>
+              </a:spcAft>
+              <a:buClr>
+                <a:srgbClr val="000000"/>
+              </a:buClr>
+              <a:buSzPts val="1800"/>
+              <a:buFont typeface="Arial"/>
               <a:buNone/>
             </a:pPr>
             <a:r>
               <a:t/>
             </a:r>
-            <a:endParaRPr sz="1800">
+            <a:endParaRPr b="0" i="0" sz="1800" u="none" cap="none" strike="noStrike">
               <a:solidFill>
                 <a:schemeClr val="dk1"/>
               </a:solidFill>
@@ -9726,18 +10509,26 @@
           <a:lstStyle/>
           <a:p>
             <a:pPr indent="0" lvl="0" marL="0" marR="0" rtl="0" algn="l">
-              <a:spcBef>
-                <a:spcPts val="0"/>
-              </a:spcBef>
-              <a:spcAft>
-                <a:spcPts val="0"/>
-              </a:spcAft>
+              <a:lnSpc>
+                <a:spcPct val="100000"/>
+              </a:lnSpc>
+              <a:spcBef>
+                <a:spcPts val="0"/>
+              </a:spcBef>
+              <a:spcAft>
+                <a:spcPts val="0"/>
+              </a:spcAft>
+              <a:buClr>
+                <a:srgbClr val="000000"/>
+              </a:buClr>
+              <a:buSzPts val="1800"/>
+              <a:buFont typeface="Arial"/>
               <a:buNone/>
             </a:pPr>
             <a:r>
               <a:t/>
             </a:r>
-            <a:endParaRPr sz="1800">
+            <a:endParaRPr b="0" i="0" sz="1800" u="none" cap="none" strike="noStrike">
               <a:solidFill>
                 <a:schemeClr val="dk1"/>
               </a:solidFill>
@@ -9775,6 +10566,9 @@
           <a:lstStyle/>
           <a:p>
             <a:pPr indent="0" lvl="0" marL="0" marR="0" rtl="0" algn="l">
+              <a:lnSpc>
+                <a:spcPct val="100000"/>
+              </a:lnSpc>
               <a:spcBef>
                 <a:spcPts val="0"/>
               </a:spcBef>
@@ -9789,7 +10583,7 @@
               <a:buNone/>
             </a:pPr>
             <a:r>
-              <a:rPr b="1" lang="en-US" sz="1600">
+              <a:rPr b="1" i="0" lang="en-US" sz="1600" u="none" cap="none" strike="noStrike">
                 <a:solidFill>
                   <a:srgbClr val="00294B"/>
                 </a:solidFill>
@@ -9800,7 +10594,7 @@
               </a:rPr>
               <a:t>2. dynamic 모드 3단계 프로세스</a:t>
             </a:r>
-            <a:endParaRPr sz="1600">
+            <a:endParaRPr b="0" i="0" sz="1600" u="none" cap="none" strike="noStrike">
               <a:solidFill>
                 <a:schemeClr val="dk1"/>
               </a:solidFill>
@@ -9838,6 +10632,9 @@
           <a:lstStyle/>
           <a:p>
             <a:pPr indent="-171450" lvl="0" marL="171450" marR="0" rtl="0" algn="l">
+              <a:lnSpc>
+                <a:spcPct val="100000"/>
+              </a:lnSpc>
               <a:spcBef>
                 <a:spcPts val="0"/>
               </a:spcBef>
@@ -9852,7 +10649,7 @@
               <a:buChar char="✔"/>
             </a:pPr>
             <a:r>
-              <a:rPr b="1" lang="en-US" sz="1050">
+              <a:rPr b="1" i="0" lang="en-US" sz="1050" u="none" cap="none" strike="noStrike">
                 <a:solidFill>
                   <a:srgbClr val="1E293B"/>
                 </a:solidFill>
@@ -9863,7 +10660,7 @@
               </a:rPr>
               <a:t>1단계: 차등 Effort 병렬 생성</a:t>
             </a:r>
-            <a:endParaRPr sz="1050">
+            <a:endParaRPr b="0" i="0" sz="1050" u="none" cap="none" strike="noStrike">
               <a:solidFill>
                 <a:schemeClr val="dk1"/>
               </a:solidFill>
@@ -9875,6 +10672,9 @@
           </a:p>
           <a:p>
             <a:pPr indent="-160338" lvl="0" marL="342900" marR="0" rtl="0" algn="l">
+              <a:lnSpc>
+                <a:spcPct val="100000"/>
+              </a:lnSpc>
               <a:spcBef>
                 <a:spcPts val="500"/>
               </a:spcBef>
@@ -9889,7 +10689,7 @@
               <a:buChar char="•"/>
             </a:pPr>
             <a:r>
-              <a:rPr lang="en-US" sz="1050">
+              <a:rPr b="0" i="0" lang="en-US" sz="1050" u="none" cap="none" strike="noStrike">
                 <a:solidFill>
                   <a:srgbClr val="1E293B"/>
                 </a:solidFill>
@@ -9900,7 +10700,7 @@
               </a:rPr>
               <a:t>동일 SP에 대해 low, medium, high 추론 강도를 병렬 구동하여 다각적 장점을 가진 3종의 후보 명세서 확보</a:t>
             </a:r>
-            <a:endParaRPr sz="1050">
+            <a:endParaRPr b="0" i="0" sz="1050" u="none" cap="none" strike="noStrike">
               <a:solidFill>
                 <a:schemeClr val="dk1"/>
               </a:solidFill>
@@ -9912,6 +10712,9 @@
           </a:p>
           <a:p>
             <a:pPr indent="-171450" lvl="0" marL="171450" marR="0" rtl="0" algn="l">
+              <a:lnSpc>
+                <a:spcPct val="100000"/>
+              </a:lnSpc>
               <a:spcBef>
                 <a:spcPts val="500"/>
               </a:spcBef>
@@ -9926,7 +10729,7 @@
               <a:buChar char="✔"/>
             </a:pPr>
             <a:r>
-              <a:rPr b="1" lang="en-US" sz="1050">
+              <a:rPr b="1" i="0" lang="en-US" sz="1050" u="none" cap="none" strike="noStrike">
                 <a:solidFill>
                   <a:srgbClr val="1E293B"/>
                 </a:solidFill>
@@ -9937,7 +10740,7 @@
               </a:rPr>
               <a:t>2단계: Critic 채점 및 Fast-Pass 판정</a:t>
             </a:r>
-            <a:endParaRPr sz="1050">
+            <a:endParaRPr b="0" i="0" sz="1050" u="none" cap="none" strike="noStrike">
               <a:solidFill>
                 <a:schemeClr val="dk1"/>
               </a:solidFill>
@@ -9949,6 +10752,9 @@
           </a:p>
           <a:p>
             <a:pPr indent="-160338" lvl="0" marL="342900" marR="0" rtl="0" algn="l">
+              <a:lnSpc>
+                <a:spcPct val="100000"/>
+              </a:lnSpc>
               <a:spcBef>
                 <a:spcPts val="500"/>
               </a:spcBef>
@@ -9963,7 +10769,7 @@
               <a:buChar char="•"/>
             </a:pPr>
             <a:r>
-              <a:rPr lang="en-US" sz="1050">
+              <a:rPr b="0" i="0" lang="en-US" sz="1050" u="none" cap="none" strike="noStrike">
                 <a:solidFill>
                   <a:srgbClr val="1E293B"/>
                 </a:solidFill>
@@ -9974,7 +10780,7 @@
               </a:rPr>
               <a:t>정밀 채점(5대 기준 각 10점, 총 50점 만점) 후 100점 정규화</a:t>
             </a:r>
-            <a:endParaRPr sz="1050">
+            <a:endParaRPr b="0" i="0" sz="1050" u="none" cap="none" strike="noStrike">
               <a:solidFill>
                 <a:schemeClr val="dk1"/>
               </a:solidFill>
@@ -9986,6 +10792,9 @@
           </a:p>
           <a:p>
             <a:pPr indent="-160338" lvl="0" marL="342900" marR="0" rtl="0" algn="l">
+              <a:lnSpc>
+                <a:spcPct val="100000"/>
+              </a:lnSpc>
               <a:spcBef>
                 <a:spcPts val="500"/>
               </a:spcBef>
@@ -10000,7 +10809,7 @@
               <a:buChar char="•"/>
             </a:pPr>
             <a:r>
-              <a:rPr lang="en-US" sz="1050">
+              <a:rPr b="0" i="0" lang="en-US" sz="1050" u="none" cap="none" strike="noStrike">
                 <a:solidFill>
                   <a:srgbClr val="1E293B"/>
                 </a:solidFill>
@@ -10011,7 +10820,7 @@
               </a:rPr>
               <a:t>무결점 &amp; 90점 이상 후보는 Fast-Pass로 즉시 채택 (합성 생략)</a:t>
             </a:r>
-            <a:endParaRPr sz="1050">
+            <a:endParaRPr b="0" i="0" sz="1050" u="none" cap="none" strike="noStrike">
               <a:solidFill>
                 <a:schemeClr val="dk1"/>
               </a:solidFill>
@@ -10023,6 +10832,9 @@
           </a:p>
           <a:p>
             <a:pPr indent="-171450" lvl="0" marL="171450" marR="0" rtl="0" algn="l">
+              <a:lnSpc>
+                <a:spcPct val="100000"/>
+              </a:lnSpc>
               <a:spcBef>
                 <a:spcPts val="500"/>
               </a:spcBef>
@@ -10037,7 +10849,7 @@
               <a:buChar char="✔"/>
             </a:pPr>
             <a:r>
-              <a:rPr b="1" lang="en-US" sz="1050">
+              <a:rPr b="1" i="0" lang="en-US" sz="1050" u="none" cap="none" strike="noStrike">
                 <a:solidFill>
                   <a:srgbClr val="1E293B"/>
                 </a:solidFill>
@@ -10048,7 +10860,7 @@
               </a:rPr>
               <a:t>3단계: Consolidation 합성</a:t>
             </a:r>
-            <a:endParaRPr sz="1050">
+            <a:endParaRPr b="0" i="0" sz="1050" u="none" cap="none" strike="noStrike">
               <a:solidFill>
                 <a:schemeClr val="dk1"/>
               </a:solidFill>
@@ -10060,6 +10872,9 @@
           </a:p>
           <a:p>
             <a:pPr indent="-160338" lvl="0" marL="342900" marR="0" rtl="0" algn="l">
+              <a:lnSpc>
+                <a:spcPct val="100000"/>
+              </a:lnSpc>
               <a:spcBef>
                 <a:spcPts val="500"/>
               </a:spcBef>
@@ -10074,7 +10889,7 @@
               <a:buChar char="•"/>
             </a:pPr>
             <a:r>
-              <a:rPr lang="en-US" sz="1050">
+              <a:rPr b="0" i="0" lang="en-US" sz="1050" u="none" cap="none" strike="noStrike">
                 <a:solidFill>
                   <a:srgbClr val="1E293B"/>
                 </a:solidFill>
@@ -10085,7 +10900,7 @@
               </a:rPr>
               <a:t>우수 후보 부재 시, 각 후보별 최고 득점을 기록한 우수 영역을 진실의 원천으로 조립 및 단일 통합 명세서 합성</a:t>
             </a:r>
-            <a:endParaRPr sz="1050">
+            <a:endParaRPr b="0" i="0" sz="1050" u="none" cap="none" strike="noStrike">
               <a:solidFill>
                 <a:schemeClr val="dk1"/>
               </a:solidFill>
@@ -10155,6 +10970,9 @@
           <a:lstStyle/>
           <a:p>
             <a:pPr indent="0" lvl="0" marL="0" marR="0" rtl="0" algn="l">
+              <a:lnSpc>
+                <a:spcPct val="100000"/>
+              </a:lnSpc>
               <a:spcBef>
                 <a:spcPts val="0"/>
               </a:spcBef>
@@ -10169,7 +10987,7 @@
               <a:buNone/>
             </a:pPr>
             <a:r>
-              <a:rPr b="1" lang="en-US" sz="2400">
+              <a:rPr b="1" i="0" lang="en-US" sz="2400" u="none" cap="none" strike="noStrike">
                 <a:solidFill>
                   <a:srgbClr val="00294B"/>
                 </a:solidFill>
@@ -10180,7 +10998,7 @@
               </a:rPr>
               <a:t>메타데이터 정화 및 주석 보완</a:t>
             </a:r>
-            <a:endParaRPr sz="2400">
+            <a:endParaRPr b="0" i="0" sz="2400" u="none" cap="none" strike="noStrike">
               <a:solidFill>
                 <a:schemeClr val="dk1"/>
               </a:solidFill>
@@ -10233,18 +11051,26 @@
           <a:lstStyle/>
           <a:p>
             <a:pPr indent="0" lvl="0" marL="0" marR="0" rtl="0" algn="l">
-              <a:spcBef>
-                <a:spcPts val="0"/>
-              </a:spcBef>
-              <a:spcAft>
-                <a:spcPts val="0"/>
-              </a:spcAft>
+              <a:lnSpc>
+                <a:spcPct val="100000"/>
+              </a:lnSpc>
+              <a:spcBef>
+                <a:spcPts val="0"/>
+              </a:spcBef>
+              <a:spcAft>
+                <a:spcPts val="0"/>
+              </a:spcAft>
+              <a:buClr>
+                <a:srgbClr val="000000"/>
+              </a:buClr>
+              <a:buSzPts val="1800"/>
+              <a:buFont typeface="Arial"/>
               <a:buNone/>
             </a:pPr>
             <a:r>
               <a:t/>
             </a:r>
-            <a:endParaRPr sz="1800">
+            <a:endParaRPr b="0" i="0" sz="1800" u="none" cap="none" strike="noStrike">
               <a:solidFill>
                 <a:schemeClr val="dk1"/>
               </a:solidFill>
@@ -10284,18 +11110,26 @@
           <a:lstStyle/>
           <a:p>
             <a:pPr indent="0" lvl="0" marL="0" marR="0" rtl="0" algn="l">
-              <a:spcBef>
-                <a:spcPts val="0"/>
-              </a:spcBef>
-              <a:spcAft>
-                <a:spcPts val="0"/>
-              </a:spcAft>
+              <a:lnSpc>
+                <a:spcPct val="100000"/>
+              </a:lnSpc>
+              <a:spcBef>
+                <a:spcPts val="0"/>
+              </a:spcBef>
+              <a:spcAft>
+                <a:spcPts val="0"/>
+              </a:spcAft>
+              <a:buClr>
+                <a:srgbClr val="000000"/>
+              </a:buClr>
+              <a:buSzPts val="1800"/>
+              <a:buFont typeface="Arial"/>
               <a:buNone/>
             </a:pPr>
             <a:r>
               <a:t/>
             </a:r>
-            <a:endParaRPr sz="1800">
+            <a:endParaRPr b="0" i="0" sz="1800" u="none" cap="none" strike="noStrike">
               <a:solidFill>
                 <a:schemeClr val="dk1"/>
               </a:solidFill>
@@ -10333,6 +11167,9 @@
           <a:lstStyle/>
           <a:p>
             <a:pPr indent="0" lvl="0" marL="0" marR="0" rtl="0" algn="l">
+              <a:lnSpc>
+                <a:spcPct val="100000"/>
+              </a:lnSpc>
               <a:spcBef>
                 <a:spcPts val="0"/>
               </a:spcBef>
@@ -10347,7 +11184,7 @@
               <a:buNone/>
             </a:pPr>
             <a:r>
-              <a:rPr b="1" lang="en-US" sz="1600">
+              <a:rPr b="1" i="0" lang="en-US" sz="1600" u="none" cap="none" strike="noStrike">
                 <a:solidFill>
                   <a:srgbClr val="00294B"/>
                 </a:solidFill>
@@ -10358,7 +11195,7 @@
               </a:rPr>
               <a:t>지능형 도메인 보완 및 오류 감지</a:t>
             </a:r>
-            <a:endParaRPr sz="1600">
+            <a:endParaRPr b="0" i="0" sz="1600" u="none" cap="none" strike="noStrike">
               <a:solidFill>
                 <a:schemeClr val="dk1"/>
               </a:solidFill>
@@ -10396,6 +11233,9 @@
           <a:lstStyle/>
           <a:p>
             <a:pPr indent="-171450" lvl="0" marL="171450" marR="0" rtl="0" algn="l">
+              <a:lnSpc>
+                <a:spcPct val="100000"/>
+              </a:lnSpc>
               <a:spcBef>
                 <a:spcPts val="0"/>
               </a:spcBef>
@@ -10410,7 +11250,7 @@
               <a:buChar char="✔"/>
             </a:pPr>
             <a:r>
-              <a:rPr b="1" lang="en-US" sz="1050">
+              <a:rPr b="1" i="0" lang="en-US" sz="1050" u="none" cap="none" strike="noStrike">
                 <a:solidFill>
                   <a:srgbClr val="1E293B"/>
                 </a:solidFill>
@@ -10421,7 +11261,7 @@
               </a:rPr>
               <a:t>설명 누락 컬럼 역추론</a:t>
             </a:r>
-            <a:endParaRPr sz="1050">
+            <a:endParaRPr b="0" i="0" sz="1050" u="none" cap="none" strike="noStrike">
               <a:solidFill>
                 <a:schemeClr val="dk1"/>
               </a:solidFill>
@@ -10433,6 +11273,9 @@
           </a:p>
           <a:p>
             <a:pPr indent="-160338" lvl="0" marL="342900" marR="0" rtl="0" algn="l">
+              <a:lnSpc>
+                <a:spcPct val="100000"/>
+              </a:lnSpc>
               <a:spcBef>
                 <a:spcPts val="500"/>
               </a:spcBef>
@@ -10447,7 +11290,7 @@
               <a:buChar char="•"/>
             </a:pPr>
             <a:r>
-              <a:rPr lang="en-US" sz="1050">
+              <a:rPr b="0" i="0" lang="en-US" sz="1050" u="none" cap="none" strike="noStrike">
                 <a:solidFill>
                   <a:srgbClr val="1E293B"/>
                 </a:solidFill>
@@ -10458,7 +11301,7 @@
               </a:rPr>
               <a:t>JOIN, WHERE, 대입 등 SP 연산 문맥을 분석하여 용도 유추</a:t>
             </a:r>
-            <a:endParaRPr sz="1050">
+            <a:endParaRPr b="0" i="0" sz="1050" u="none" cap="none" strike="noStrike">
               <a:solidFill>
                 <a:schemeClr val="dk1"/>
               </a:solidFill>
@@ -10470,6 +11313,9 @@
           </a:p>
           <a:p>
             <a:pPr indent="-160338" lvl="0" marL="342900" marR="0" rtl="0" algn="l">
+              <a:lnSpc>
+                <a:spcPct val="100000"/>
+              </a:lnSpc>
               <a:spcBef>
                 <a:spcPts val="500"/>
               </a:spcBef>
@@ -10484,7 +11330,7 @@
               <a:buChar char="•"/>
             </a:pPr>
             <a:r>
-              <a:rPr lang="en-US" sz="1050">
+              <a:rPr b="0" i="0" lang="en-US" sz="1050" u="none" cap="none" strike="noStrike">
                 <a:solidFill>
                   <a:srgbClr val="1E293B"/>
                 </a:solidFill>
@@ -10495,7 +11341,7 @@
               </a:rPr>
               <a:t>[AI 추론 보완: Schema.Table.Column - 설명] 양식 자동 주입</a:t>
             </a:r>
-            <a:endParaRPr sz="1050">
+            <a:endParaRPr b="0" i="0" sz="1050" u="none" cap="none" strike="noStrike">
               <a:solidFill>
                 <a:srgbClr val="1E293B"/>
               </a:solidFill>
@@ -10507,6 +11353,9 @@
           </a:p>
           <a:p>
             <a:pPr indent="-93663" lvl="0" marL="342900" marR="0" rtl="0" algn="l">
+              <a:lnSpc>
+                <a:spcPct val="100000"/>
+              </a:lnSpc>
               <a:spcBef>
                 <a:spcPts val="500"/>
               </a:spcBef>
@@ -10523,7 +11372,7 @@
             <a:r>
               <a:t/>
             </a:r>
-            <a:endParaRPr sz="1050">
+            <a:endParaRPr b="0" i="0" sz="1050" u="none" cap="none" strike="noStrike">
               <a:solidFill>
                 <a:schemeClr val="dk1"/>
               </a:solidFill>
@@ -10535,6 +11384,9 @@
           </a:p>
           <a:p>
             <a:pPr indent="-171450" lvl="0" marL="171450" marR="0" rtl="0" algn="l">
+              <a:lnSpc>
+                <a:spcPct val="100000"/>
+              </a:lnSpc>
               <a:spcBef>
                 <a:spcPts val="500"/>
               </a:spcBef>
@@ -10549,7 +11401,7 @@
               <a:buChar char="✔"/>
             </a:pPr>
             <a:r>
-              <a:rPr b="1" lang="en-US" sz="1050">
+              <a:rPr b="1" i="0" lang="en-US" sz="1050" u="none" cap="none" strike="noStrike">
                 <a:solidFill>
                   <a:srgbClr val="1E293B"/>
                 </a:solidFill>
@@ -10560,7 +11412,7 @@
               </a:rPr>
               <a:t>코드-주석 불일치 감지</a:t>
             </a:r>
-            <a:endParaRPr sz="1050">
+            <a:endParaRPr b="0" i="0" sz="1050" u="none" cap="none" strike="noStrike">
               <a:solidFill>
                 <a:schemeClr val="dk1"/>
               </a:solidFill>
@@ -10572,6 +11424,9 @@
           </a:p>
           <a:p>
             <a:pPr indent="-160338" lvl="0" marL="342900" marR="0" rtl="0" algn="l">
+              <a:lnSpc>
+                <a:spcPct val="100000"/>
+              </a:lnSpc>
               <a:spcBef>
                 <a:spcPts val="500"/>
               </a:spcBef>
@@ -10586,7 +11441,7 @@
               <a:buChar char="•"/>
             </a:pPr>
             <a:r>
-              <a:rPr lang="en-US" sz="1050">
+              <a:rPr b="0" i="0" lang="en-US" sz="1050" u="none" cap="none" strike="noStrike">
                 <a:solidFill>
                   <a:srgbClr val="1E293B"/>
                 </a:solidFill>
@@ -10597,7 +11452,7 @@
               </a:rPr>
               <a:t>자연어 주석과 실제 SQL 실행 연산 간의 모순점 추적 및 감지</a:t>
             </a:r>
-            <a:endParaRPr sz="1050">
+            <a:endParaRPr b="0" i="0" sz="1050" u="none" cap="none" strike="noStrike">
               <a:solidFill>
                 <a:schemeClr val="dk1"/>
               </a:solidFill>
@@ -10609,6 +11464,9 @@
           </a:p>
           <a:p>
             <a:pPr indent="-160338" lvl="0" marL="342900" marR="0" rtl="0" algn="l">
+              <a:lnSpc>
+                <a:spcPct val="100000"/>
+              </a:lnSpc>
               <a:spcBef>
                 <a:spcPts val="500"/>
               </a:spcBef>
@@ -10623,7 +11481,7 @@
               <a:buChar char="•"/>
             </a:pPr>
             <a:r>
-              <a:rPr lang="en-US" sz="1050">
+              <a:rPr b="0" i="0" lang="en-US" sz="1050" u="none" cap="none" strike="noStrike">
                 <a:solidFill>
                   <a:srgbClr val="1E293B"/>
                 </a:solidFill>
@@ -10634,7 +11492,7 @@
               </a:rPr>
               <a:t>실제 쿼리 코드를 진실의 원천으로 개요 최상단에 경고 명시</a:t>
             </a:r>
-            <a:endParaRPr sz="1050">
+            <a:endParaRPr b="0" i="0" sz="1050" u="none" cap="none" strike="noStrike">
               <a:solidFill>
                 <a:schemeClr val="dk1"/>
               </a:solidFill>
@@ -10687,18 +11545,26 @@
           <a:lstStyle/>
           <a:p>
             <a:pPr indent="0" lvl="0" marL="0" marR="0" rtl="0" algn="l">
-              <a:spcBef>
-                <a:spcPts val="0"/>
-              </a:spcBef>
-              <a:spcAft>
-                <a:spcPts val="0"/>
-              </a:spcAft>
+              <a:lnSpc>
+                <a:spcPct val="100000"/>
+              </a:lnSpc>
+              <a:spcBef>
+                <a:spcPts val="0"/>
+              </a:spcBef>
+              <a:spcAft>
+                <a:spcPts val="0"/>
+              </a:spcAft>
+              <a:buClr>
+                <a:srgbClr val="000000"/>
+              </a:buClr>
+              <a:buSzPts val="1800"/>
+              <a:buFont typeface="Arial"/>
               <a:buNone/>
             </a:pPr>
             <a:r>
               <a:t/>
             </a:r>
-            <a:endParaRPr sz="1800">
+            <a:endParaRPr b="0" i="0" sz="1800" u="none" cap="none" strike="noStrike">
               <a:solidFill>
                 <a:schemeClr val="dk1"/>
               </a:solidFill>
@@ -10738,18 +11604,26 @@
           <a:lstStyle/>
           <a:p>
             <a:pPr indent="0" lvl="0" marL="0" marR="0" rtl="0" algn="l">
-              <a:spcBef>
-                <a:spcPts val="0"/>
-              </a:spcBef>
-              <a:spcAft>
-                <a:spcPts val="0"/>
-              </a:spcAft>
+              <a:lnSpc>
+                <a:spcPct val="100000"/>
+              </a:lnSpc>
+              <a:spcBef>
+                <a:spcPts val="0"/>
+              </a:spcBef>
+              <a:spcAft>
+                <a:spcPts val="0"/>
+              </a:spcAft>
+              <a:buClr>
+                <a:srgbClr val="000000"/>
+              </a:buClr>
+              <a:buSzPts val="1800"/>
+              <a:buFont typeface="Arial"/>
               <a:buNone/>
             </a:pPr>
             <a:r>
               <a:t/>
             </a:r>
-            <a:endParaRPr sz="1800">
+            <a:endParaRPr b="0" i="0" sz="1800" u="none" cap="none" strike="noStrike">
               <a:solidFill>
                 <a:schemeClr val="dk1"/>
               </a:solidFill>
@@ -10787,6 +11661,9 @@
           <a:lstStyle/>
           <a:p>
             <a:pPr indent="0" lvl="0" marL="0" marR="0" rtl="0" algn="l">
+              <a:lnSpc>
+                <a:spcPct val="100000"/>
+              </a:lnSpc>
               <a:spcBef>
                 <a:spcPts val="0"/>
               </a:spcBef>
@@ -10801,7 +11678,7 @@
               <a:buNone/>
             </a:pPr>
             <a:r>
-              <a:rPr b="1" lang="en-US" sz="1600">
+              <a:rPr b="1" i="0" lang="en-US" sz="1600" u="none" cap="none" strike="noStrike">
                 <a:solidFill>
                   <a:srgbClr val="00294B"/>
                 </a:solidFill>
@@ -10812,7 +11689,7 @@
               </a:rPr>
               <a:t>클렌징 스크립트 덤프 및 동기화</a:t>
             </a:r>
-            <a:endParaRPr sz="1600">
+            <a:endParaRPr b="0" i="0" sz="1600" u="none" cap="none" strike="noStrike">
               <a:solidFill>
                 <a:schemeClr val="dk1"/>
               </a:solidFill>
@@ -10850,6 +11727,9 @@
           <a:lstStyle/>
           <a:p>
             <a:pPr indent="-171450" lvl="0" marL="171450" marR="0" rtl="0" algn="l">
+              <a:lnSpc>
+                <a:spcPct val="100000"/>
+              </a:lnSpc>
               <a:spcBef>
                 <a:spcPts val="0"/>
               </a:spcBef>
@@ -10864,7 +11744,7 @@
               <a:buChar char="✔"/>
             </a:pPr>
             <a:r>
-              <a:rPr b="1" lang="en-US" sz="1050">
+              <a:rPr b="1" i="0" lang="en-US" sz="1050" u="none" cap="none" strike="noStrike">
                 <a:solidFill>
                   <a:srgbClr val="1E293B"/>
                 </a:solidFill>
@@ -10875,7 +11755,7 @@
               </a:rPr>
               <a:t>SQL 클렌징 스크립트 자동 생성</a:t>
             </a:r>
-            <a:endParaRPr sz="1050">
+            <a:endParaRPr b="0" i="0" sz="1050" u="none" cap="none" strike="noStrike">
               <a:solidFill>
                 <a:schemeClr val="dk1"/>
               </a:solidFill>
@@ -10887,6 +11767,9 @@
           </a:p>
           <a:p>
             <a:pPr indent="-160338" lvl="0" marL="342900" marR="0" rtl="0" algn="l">
+              <a:lnSpc>
+                <a:spcPct val="100000"/>
+              </a:lnSpc>
               <a:spcBef>
                 <a:spcPts val="500"/>
               </a:spcBef>
@@ -10901,7 +11784,7 @@
               <a:buChar char="•"/>
             </a:pPr>
             <a:r>
-              <a:rPr lang="en-US" sz="1050">
+              <a:rPr b="0" i="0" lang="en-US" sz="1050" u="none" cap="none" strike="noStrike">
                 <a:solidFill>
                   <a:srgbClr val="1E293B"/>
                 </a:solidFill>
@@ -10912,7 +11795,7 @@
               </a:rPr>
               <a:t>AI 역추론 설명을 DB 확장 속성에 채우기 위한 DDL 구성</a:t>
             </a:r>
-            <a:endParaRPr sz="1050">
+            <a:endParaRPr b="0" i="0" sz="1050" u="none" cap="none" strike="noStrike">
               <a:solidFill>
                 <a:schemeClr val="dk1"/>
               </a:solidFill>
@@ -10924,6 +11807,9 @@
           </a:p>
           <a:p>
             <a:pPr indent="-160338" lvl="0" marL="342900" marR="0" rtl="0" algn="l">
+              <a:lnSpc>
+                <a:spcPct val="100000"/>
+              </a:lnSpc>
               <a:spcBef>
                 <a:spcPts val="500"/>
               </a:spcBef>
@@ -10938,7 +11824,7 @@
               <a:buChar char="•"/>
             </a:pPr>
             <a:r>
-              <a:rPr lang="en-US" sz="1050">
+              <a:rPr b="0" i="0" lang="en-US" sz="1050" u="none" cap="none" strike="noStrike">
                 <a:solidFill>
                   <a:srgbClr val="1E293B"/>
                 </a:solidFill>
@@ -10949,7 +11835,7 @@
               </a:rPr>
               <a:t>sp_add/updateextendedproperty 기반 클렌징 쿼리 자동 덤프</a:t>
             </a:r>
-            <a:endParaRPr sz="1050">
+            <a:endParaRPr b="0" i="0" sz="1050" u="none" cap="none" strike="noStrike">
               <a:solidFill>
                 <a:srgbClr val="1E293B"/>
               </a:solidFill>
@@ -10961,6 +11847,9 @@
           </a:p>
           <a:p>
             <a:pPr indent="-93663" lvl="0" marL="342900" marR="0" rtl="0" algn="l">
+              <a:lnSpc>
+                <a:spcPct val="100000"/>
+              </a:lnSpc>
               <a:spcBef>
                 <a:spcPts val="500"/>
               </a:spcBef>
@@ -10977,7 +11866,7 @@
             <a:r>
               <a:t/>
             </a:r>
-            <a:endParaRPr sz="1050">
+            <a:endParaRPr b="0" i="0" sz="1050" u="none" cap="none" strike="noStrike">
               <a:solidFill>
                 <a:schemeClr val="dk1"/>
               </a:solidFill>
@@ -10989,6 +11878,9 @@
           </a:p>
           <a:p>
             <a:pPr indent="-171450" lvl="0" marL="171450" marR="0" rtl="0" algn="l">
+              <a:lnSpc>
+                <a:spcPct val="100000"/>
+              </a:lnSpc>
               <a:spcBef>
                 <a:spcPts val="500"/>
               </a:spcBef>
@@ -11003,7 +11895,7 @@
               <a:buChar char="✔"/>
             </a:pPr>
             <a:r>
-              <a:rPr b="1" lang="en-US" sz="1050">
+              <a:rPr b="1" i="0" lang="en-US" sz="1050" u="none" cap="none" strike="noStrike">
                 <a:solidFill>
                   <a:srgbClr val="1E293B"/>
                 </a:solidFill>
@@ -11014,7 +11906,7 @@
               </a:rPr>
               <a:t>선택적 DB 메타데이터 동기화</a:t>
             </a:r>
-            <a:endParaRPr sz="1050">
+            <a:endParaRPr b="0" i="0" sz="1050" u="none" cap="none" strike="noStrike">
               <a:solidFill>
                 <a:schemeClr val="dk1"/>
               </a:solidFill>
@@ -11026,6 +11918,9 @@
           </a:p>
           <a:p>
             <a:pPr indent="-160338" lvl="0" marL="342900" marR="0" rtl="0" algn="l">
+              <a:lnSpc>
+                <a:spcPct val="100000"/>
+              </a:lnSpc>
               <a:spcBef>
                 <a:spcPts val="500"/>
               </a:spcBef>
@@ -11040,7 +11935,7 @@
               <a:buChar char="•"/>
             </a:pPr>
             <a:r>
-              <a:rPr lang="en-US" sz="1050">
+              <a:rPr b="0" i="0" lang="en-US" sz="1050" u="none" cap="none" strike="noStrike">
                 <a:solidFill>
                   <a:srgbClr val="1E293B"/>
                 </a:solidFill>
@@ -11051,7 +11946,7 @@
               </a:rPr>
               <a:t>실제 DB 쓰기는 개발자가 최종 승인/동의할 경우에만 수행</a:t>
             </a:r>
-            <a:endParaRPr sz="1050">
+            <a:endParaRPr b="0" i="0" sz="1050" u="none" cap="none" strike="noStrike">
               <a:solidFill>
                 <a:schemeClr val="dk1"/>
               </a:solidFill>
@@ -11063,6 +11958,9 @@
           </a:p>
           <a:p>
             <a:pPr indent="-160338" lvl="0" marL="342900" marR="0" rtl="0" algn="l">
+              <a:lnSpc>
+                <a:spcPct val="100000"/>
+              </a:lnSpc>
               <a:spcBef>
                 <a:spcPts val="500"/>
               </a:spcBef>
@@ -11077,7 +11975,7 @@
               <a:buChar char="•"/>
             </a:pPr>
             <a:r>
-              <a:rPr lang="en-US" sz="1050">
+              <a:rPr b="0" i="0" lang="en-US" sz="1050" u="none" cap="none" strike="noStrike">
                 <a:solidFill>
                   <a:srgbClr val="1E293B"/>
                 </a:solidFill>
@@ -11088,7 +11986,7 @@
               </a:rPr>
               <a:t>동기화 후 차기 분석 시 정화된 메타데이터를 기반으로 정확도 제고</a:t>
             </a:r>
-            <a:endParaRPr sz="1050">
+            <a:endParaRPr b="0" i="0" sz="1050" u="none" cap="none" strike="noStrike">
               <a:solidFill>
                 <a:schemeClr val="dk1"/>
               </a:solidFill>
@@ -11158,6 +12056,9 @@
           <a:lstStyle/>
           <a:p>
             <a:pPr indent="0" lvl="0" marL="0" marR="0" rtl="0" algn="l">
+              <a:lnSpc>
+                <a:spcPct val="100000"/>
+              </a:lnSpc>
               <a:spcBef>
                 <a:spcPts val="0"/>
               </a:spcBef>
@@ -11172,7 +12073,7 @@
               <a:buNone/>
             </a:pPr>
             <a:r>
-              <a:rPr b="1" lang="en-US" sz="2400">
+              <a:rPr b="1" i="0" lang="en-US" sz="2400" u="none" cap="none" strike="noStrike">
                 <a:solidFill>
                   <a:srgbClr val="00294B"/>
                 </a:solidFill>
@@ -11183,7 +12084,7 @@
               </a:rPr>
               <a:t>정합성 검증 및 Sandbox Seeding 메커니즘</a:t>
             </a:r>
-            <a:endParaRPr sz="2400">
+            <a:endParaRPr b="0" i="0" sz="2400" u="none" cap="none" strike="noStrike">
               <a:solidFill>
                 <a:schemeClr val="dk1"/>
               </a:solidFill>
@@ -11236,18 +12137,26 @@
           <a:lstStyle/>
           <a:p>
             <a:pPr indent="0" lvl="0" marL="0" marR="0" rtl="0" algn="l">
-              <a:spcBef>
-                <a:spcPts val="0"/>
-              </a:spcBef>
-              <a:spcAft>
-                <a:spcPts val="0"/>
-              </a:spcAft>
+              <a:lnSpc>
+                <a:spcPct val="100000"/>
+              </a:lnSpc>
+              <a:spcBef>
+                <a:spcPts val="0"/>
+              </a:spcBef>
+              <a:spcAft>
+                <a:spcPts val="0"/>
+              </a:spcAft>
+              <a:buClr>
+                <a:srgbClr val="000000"/>
+              </a:buClr>
+              <a:buSzPts val="1800"/>
+              <a:buFont typeface="Arial"/>
               <a:buNone/>
             </a:pPr>
             <a:r>
               <a:t/>
             </a:r>
-            <a:endParaRPr sz="1800">
+            <a:endParaRPr b="0" i="0" sz="1800" u="none" cap="none" strike="noStrike">
               <a:solidFill>
                 <a:schemeClr val="dk1"/>
               </a:solidFill>
@@ -11285,6 +12194,9 @@
           <a:lstStyle/>
           <a:p>
             <a:pPr indent="0" lvl="0" marL="0" marR="0" rtl="0" algn="ctr">
+              <a:lnSpc>
+                <a:spcPct val="100000"/>
+              </a:lnSpc>
               <a:spcBef>
                 <a:spcPts val="0"/>
               </a:spcBef>
@@ -11299,7 +12211,7 @@
               <a:buNone/>
             </a:pPr>
             <a:r>
-              <a:rPr b="1" lang="en-US" sz="1300">
+              <a:rPr b="1" i="0" lang="en-US" sz="1300" u="none" cap="none" strike="noStrike">
                 <a:solidFill>
                   <a:srgbClr val="02B9AD"/>
                 </a:solidFill>
@@ -11310,7 +12222,7 @@
               </a:rPr>
               <a:t>Sandbox Seeding 라이프사이클</a:t>
             </a:r>
-            <a:endParaRPr sz="1300">
+            <a:endParaRPr b="0" i="0" sz="1300" u="none" cap="none" strike="noStrike">
               <a:solidFill>
                 <a:schemeClr val="dk1"/>
               </a:solidFill>
@@ -11348,6 +12260,9 @@
           <a:lstStyle/>
           <a:p>
             <a:pPr indent="0" lvl="0" marL="0" marR="0" rtl="0" algn="l">
+              <a:lnSpc>
+                <a:spcPct val="100000"/>
+              </a:lnSpc>
               <a:spcBef>
                 <a:spcPts val="0"/>
               </a:spcBef>
@@ -11362,7 +12277,7 @@
               <a:buNone/>
             </a:pPr>
             <a:r>
-              <a:rPr lang="en-US" sz="1000">
+              <a:rPr b="0" i="0" lang="en-US" sz="1000" u="none" cap="none" strike="noStrike">
                 <a:solidFill>
                   <a:srgbClr val="1E293B"/>
                 </a:solidFill>
@@ -11373,7 +12288,7 @@
               </a:rPr>
               <a:t>1. 참조 무결성을 준수하는 가상 데이터(Mock) 생성</a:t>
             </a:r>
-            <a:endParaRPr sz="1000">
+            <a:endParaRPr b="0" i="0" sz="1000" u="none" cap="none" strike="noStrike">
               <a:solidFill>
                 <a:schemeClr val="dk1"/>
               </a:solidFill>
@@ -11385,6 +12300,9 @@
           </a:p>
           <a:p>
             <a:pPr indent="0" lvl="0" marL="0" marR="0" rtl="0" algn="l">
+              <a:lnSpc>
+                <a:spcPct val="100000"/>
+              </a:lnSpc>
               <a:spcBef>
                 <a:spcPts val="300"/>
               </a:spcBef>
@@ -11399,7 +12317,7 @@
               <a:buNone/>
             </a:pPr>
             <a:r>
-              <a:rPr lang="en-US" sz="1000">
+              <a:rPr b="0" i="0" lang="en-US" sz="1000" u="none" cap="none" strike="noStrike">
                 <a:solidFill>
                   <a:srgbClr val="1E293B"/>
                 </a:solidFill>
@@ -11410,7 +12328,7 @@
               </a:rPr>
               <a:t>2. 테스트 시작 전 Sandbox DB에 자동 적재(Seed)</a:t>
             </a:r>
-            <a:endParaRPr sz="1000">
+            <a:endParaRPr b="0" i="0" sz="1000" u="none" cap="none" strike="noStrike">
               <a:solidFill>
                 <a:schemeClr val="dk1"/>
               </a:solidFill>
@@ -11422,6 +12340,9 @@
           </a:p>
           <a:p>
             <a:pPr indent="0" lvl="0" marL="0" marR="0" rtl="0" algn="l">
+              <a:lnSpc>
+                <a:spcPct val="100000"/>
+              </a:lnSpc>
               <a:spcBef>
                 <a:spcPts val="300"/>
               </a:spcBef>
@@ -11436,7 +12357,7 @@
               <a:buNone/>
             </a:pPr>
             <a:r>
-              <a:rPr lang="en-US" sz="1000">
+              <a:rPr b="0" i="0" lang="en-US" sz="1000" u="none" cap="none" strike="noStrike">
                 <a:solidFill>
                   <a:srgbClr val="1E293B"/>
                 </a:solidFill>
@@ -11447,7 +12368,7 @@
               </a:rPr>
               <a:t>3. 레거시 및 타겟 런타임 결과 수집 완료</a:t>
             </a:r>
-            <a:endParaRPr sz="1000">
+            <a:endParaRPr b="0" i="0" sz="1000" u="none" cap="none" strike="noStrike">
               <a:solidFill>
                 <a:schemeClr val="dk1"/>
               </a:solidFill>
@@ -11459,6 +12380,9 @@
           </a:p>
           <a:p>
             <a:pPr indent="0" lvl="0" marL="0" marR="0" rtl="0" algn="l">
+              <a:lnSpc>
+                <a:spcPct val="100000"/>
+              </a:lnSpc>
               <a:spcBef>
                 <a:spcPts val="300"/>
               </a:spcBef>
@@ -11473,7 +12397,7 @@
               <a:buNone/>
             </a:pPr>
             <a:r>
-              <a:rPr lang="en-US" sz="1000">
+              <a:rPr b="0" i="0" lang="en-US" sz="1000" u="none" cap="none" strike="noStrike">
                 <a:solidFill>
                   <a:srgbClr val="1E293B"/>
                 </a:solidFill>
@@ -11484,7 +12408,7 @@
               </a:rPr>
               <a:t>4. 적재 데이터 자동 소거(Cleanup) 상태 복원</a:t>
             </a:r>
-            <a:endParaRPr sz="1000">
+            <a:endParaRPr b="0" i="0" sz="1000" u="none" cap="none" strike="noStrike">
               <a:solidFill>
                 <a:schemeClr val="dk1"/>
               </a:solidFill>
@@ -11537,18 +12461,26 @@
           <a:lstStyle/>
           <a:p>
             <a:pPr indent="0" lvl="0" marL="0" marR="0" rtl="0" algn="l">
-              <a:spcBef>
-                <a:spcPts val="0"/>
-              </a:spcBef>
-              <a:spcAft>
-                <a:spcPts val="0"/>
-              </a:spcAft>
+              <a:lnSpc>
+                <a:spcPct val="100000"/>
+              </a:lnSpc>
+              <a:spcBef>
+                <a:spcPts val="0"/>
+              </a:spcBef>
+              <a:spcAft>
+                <a:spcPts val="0"/>
+              </a:spcAft>
+              <a:buClr>
+                <a:srgbClr val="000000"/>
+              </a:buClr>
+              <a:buSzPts val="1800"/>
+              <a:buFont typeface="Arial"/>
               <a:buNone/>
             </a:pPr>
             <a:r>
               <a:t/>
             </a:r>
-            <a:endParaRPr sz="1800">
+            <a:endParaRPr b="0" i="0" sz="1800" u="none" cap="none" strike="noStrike">
               <a:solidFill>
                 <a:schemeClr val="dk1"/>
               </a:solidFill>
@@ -11586,6 +12518,9 @@
           <a:lstStyle/>
           <a:p>
             <a:pPr indent="0" lvl="0" marL="0" marR="0" rtl="0" algn="l">
+              <a:lnSpc>
+                <a:spcPct val="100000"/>
+              </a:lnSpc>
               <a:spcBef>
                 <a:spcPts val="0"/>
               </a:spcBef>
@@ -11600,7 +12535,7 @@
               <a:buNone/>
             </a:pPr>
             <a:r>
-              <a:rPr b="1" lang="en-US" sz="1300">
+              <a:rPr b="1" i="0" lang="en-US" sz="1300" u="none" cap="none" strike="noStrike">
                 <a:solidFill>
                   <a:srgbClr val="00294B"/>
                 </a:solidFill>
@@ -11611,7 +12546,7 @@
               </a:rPr>
               <a:t>Legacy SQL Server</a:t>
             </a:r>
-            <a:endParaRPr sz="1300">
+            <a:endParaRPr b="0" i="0" sz="1300" u="none" cap="none" strike="noStrike">
               <a:solidFill>
                 <a:schemeClr val="dk1"/>
               </a:solidFill>
@@ -11649,6 +12584,9 @@
           <a:lstStyle/>
           <a:p>
             <a:pPr indent="0" lvl="0" marL="0" marR="0" rtl="0" algn="l">
+              <a:lnSpc>
+                <a:spcPct val="100000"/>
+              </a:lnSpc>
               <a:spcBef>
                 <a:spcPts val="0"/>
               </a:spcBef>
@@ -11663,7 +12601,7 @@
               <a:buNone/>
             </a:pPr>
             <a:r>
-              <a:rPr lang="en-US" sz="1050">
+              <a:rPr b="0" i="0" lang="en-US" sz="1050" u="none" cap="none" strike="noStrike">
                 <a:solidFill>
                   <a:srgbClr val="64748B"/>
                 </a:solidFill>
@@ -11674,7 +12612,7 @@
               </a:rPr>
               <a:t>설계된 테스트 파라미터로 레거시 DB Stored Procedure를 동적 실행하여 ResultSet을 JSON 덤프로 수집</a:t>
             </a:r>
-            <a:endParaRPr sz="1050">
+            <a:endParaRPr b="0" i="0" sz="1050" u="none" cap="none" strike="noStrike">
               <a:solidFill>
                 <a:schemeClr val="dk1"/>
               </a:solidFill>
@@ -11727,18 +12665,26 @@
           <a:lstStyle/>
           <a:p>
             <a:pPr indent="0" lvl="0" marL="0" marR="0" rtl="0" algn="l">
-              <a:spcBef>
-                <a:spcPts val="0"/>
-              </a:spcBef>
-              <a:spcAft>
-                <a:spcPts val="0"/>
-              </a:spcAft>
+              <a:lnSpc>
+                <a:spcPct val="100000"/>
+              </a:lnSpc>
+              <a:spcBef>
+                <a:spcPts val="0"/>
+              </a:spcBef>
+              <a:spcAft>
+                <a:spcPts val="0"/>
+              </a:spcAft>
+              <a:buClr>
+                <a:srgbClr val="000000"/>
+              </a:buClr>
+              <a:buSzPts val="1800"/>
+              <a:buFont typeface="Arial"/>
               <a:buNone/>
             </a:pPr>
             <a:r>
               <a:t/>
             </a:r>
-            <a:endParaRPr sz="1800">
+            <a:endParaRPr b="0" i="0" sz="1800" u="none" cap="none" strike="noStrike">
               <a:solidFill>
                 <a:schemeClr val="dk1"/>
               </a:solidFill>
@@ -11776,6 +12722,9 @@
           <a:lstStyle/>
           <a:p>
             <a:pPr indent="0" lvl="0" marL="0" marR="0" rtl="0" algn="l">
+              <a:lnSpc>
+                <a:spcPct val="100000"/>
+              </a:lnSpc>
               <a:spcBef>
                 <a:spcPts val="0"/>
               </a:spcBef>
@@ -11790,7 +12739,7 @@
               <a:buNone/>
             </a:pPr>
             <a:r>
-              <a:rPr b="1" lang="en-US" sz="1300">
+              <a:rPr b="1" i="0" lang="en-US" sz="1300" u="none" cap="none" strike="noStrike">
                 <a:solidFill>
                   <a:srgbClr val="00294B"/>
                 </a:solidFill>
@@ -11801,7 +12750,7 @@
               </a:rPr>
               <a:t>Target Runtime (C#/Java)</a:t>
             </a:r>
-            <a:endParaRPr sz="1300">
+            <a:endParaRPr b="0" i="0" sz="1300" u="none" cap="none" strike="noStrike">
               <a:solidFill>
                 <a:schemeClr val="dk1"/>
               </a:solidFill>
@@ -11839,6 +12788,9 @@
           <a:lstStyle/>
           <a:p>
             <a:pPr indent="0" lvl="0" marL="0" marR="0" rtl="0" algn="l">
+              <a:lnSpc>
+                <a:spcPct val="100000"/>
+              </a:lnSpc>
               <a:spcBef>
                 <a:spcPts val="0"/>
               </a:spcBef>
@@ -11853,7 +12805,7 @@
               <a:buNone/>
             </a:pPr>
             <a:r>
-              <a:rPr lang="en-US" sz="1050">
+              <a:rPr b="0" i="0" lang="en-US" sz="1050" u="none" cap="none" strike="noStrike">
                 <a:solidFill>
                   <a:srgbClr val="64748B"/>
                 </a:solidFill>
@@ -11864,7 +12816,7 @@
               </a:rPr>
               <a:t>동적 라이브러리 로딩 및 트랜잭션 강제 롤백을 통한 데이터베이스 격리, 또는 독립 프로세스 기동 및 타임아웃 제어를 통한 런타임 격리를 적용하여 대상 로직의 수행 결과를 JSON 포맷의 스트림으로 수집</a:t>
             </a:r>
-            <a:endParaRPr sz="1050">
+            <a:endParaRPr b="0" i="0" sz="1050" u="none" cap="none" strike="noStrike">
               <a:solidFill>
                 <a:schemeClr val="dk1"/>
               </a:solidFill>
@@ -11910,18 +12862,26 @@
           <a:lstStyle/>
           <a:p>
             <a:pPr indent="0" lvl="0" marL="0" marR="0" rtl="0" algn="l">
-              <a:spcBef>
-                <a:spcPts val="0"/>
-              </a:spcBef>
-              <a:spcAft>
-                <a:spcPts val="0"/>
-              </a:spcAft>
+              <a:lnSpc>
+                <a:spcPct val="100000"/>
+              </a:lnSpc>
+              <a:spcBef>
+                <a:spcPts val="0"/>
+              </a:spcBef>
+              <a:spcAft>
+                <a:spcPts val="0"/>
+              </a:spcAft>
+              <a:buClr>
+                <a:srgbClr val="000000"/>
+              </a:buClr>
+              <a:buSzPts val="1800"/>
+              <a:buFont typeface="Arial"/>
               <a:buNone/>
             </a:pPr>
             <a:r>
               <a:t/>
             </a:r>
-            <a:endParaRPr sz="1800">
+            <a:endParaRPr b="0" i="0" sz="1800" u="none" cap="none" strike="noStrike">
               <a:solidFill>
                 <a:schemeClr val="dk1"/>
               </a:solidFill>
@@ -11959,6 +12919,9 @@
           <a:lstStyle/>
           <a:p>
             <a:pPr indent="0" lvl="0" marL="0" marR="0" rtl="0" algn="l">
+              <a:lnSpc>
+                <a:spcPct val="100000"/>
+              </a:lnSpc>
               <a:spcBef>
                 <a:spcPts val="0"/>
               </a:spcBef>
@@ -11973,7 +12936,7 @@
               <a:buNone/>
             </a:pPr>
             <a:r>
-              <a:rPr b="1" lang="en-US" sz="1400">
+              <a:rPr b="1" i="0" lang="en-US" sz="1400" u="none" cap="none" strike="noStrike">
                 <a:solidFill>
                   <a:srgbClr val="B45309"/>
                 </a:solidFill>
@@ -11984,7 +12947,7 @@
               </a:rPr>
               <a:t>양방향 결과셋 1:1 값 정밀 대조 검증 (DataComparisonService)</a:t>
             </a:r>
-            <a:endParaRPr sz="1400">
+            <a:endParaRPr b="0" i="0" sz="1400" u="none" cap="none" strike="noStrike">
               <a:solidFill>
                 <a:schemeClr val="dk1"/>
               </a:solidFill>
@@ -12022,6 +12985,9 @@
           <a:lstStyle/>
           <a:p>
             <a:pPr indent="0" lvl="0" marL="0" marR="0" rtl="0" algn="l">
+              <a:lnSpc>
+                <a:spcPct val="100000"/>
+              </a:lnSpc>
               <a:spcBef>
                 <a:spcPts val="0"/>
               </a:spcBef>
@@ -12036,7 +13002,7 @@
               <a:buNone/>
             </a:pPr>
             <a:r>
-              <a:rPr lang="en-US" sz="1100">
+              <a:rPr b="0" i="0" lang="en-US" sz="1100" u="none" cap="none" strike="noStrike">
                 <a:solidFill>
                   <a:srgbClr val="78350F"/>
                 </a:solidFill>
@@ -12047,7 +13013,7 @@
               </a:rPr>
               <a:t>소수점 끝자리 차이 및 날짜 포맷팅에 따른 거짓 불일치(False Positive) 방지를 위해 NormalizeValueString을 적용하여 데이터 타입을 정형화한 후, 1:1 대조 비교 보고서(*_CompareReport.md)를 발행합니다.</a:t>
             </a:r>
-            <a:endParaRPr sz="1100">
+            <a:endParaRPr b="0" i="0" sz="1100" u="none" cap="none" strike="noStrike">
               <a:solidFill>
                 <a:schemeClr val="dk1"/>
               </a:solidFill>
@@ -12169,6 +13135,9 @@
           <a:lstStyle/>
           <a:p>
             <a:pPr indent="0" lvl="0" marL="0" marR="0" rtl="0" algn="l">
+              <a:lnSpc>
+                <a:spcPct val="100000"/>
+              </a:lnSpc>
               <a:spcBef>
                 <a:spcPts val="0"/>
               </a:spcBef>
@@ -12183,7 +13152,7 @@
               <a:buNone/>
             </a:pPr>
             <a:r>
-              <a:rPr b="1" lang="en-US" sz="2400">
+              <a:rPr b="1" i="0" lang="en-US" sz="2400" u="none" cap="none" strike="noStrike">
                 <a:solidFill>
                   <a:srgbClr val="00294B"/>
                 </a:solidFill>
@@ -12194,7 +13163,7 @@
               </a:rPr>
               <a:t>마이그레이션 프로세스 및 로드맵</a:t>
             </a:r>
-            <a:endParaRPr sz="2400">
+            <a:endParaRPr b="0" i="0" sz="2400" u="none" cap="none" strike="noStrike">
               <a:solidFill>
                 <a:schemeClr val="dk1"/>
               </a:solidFill>
@@ -12247,18 +13216,26 @@
           <a:lstStyle/>
           <a:p>
             <a:pPr indent="0" lvl="0" marL="0" marR="0" rtl="0" algn="l">
-              <a:spcBef>
-                <a:spcPts val="0"/>
-              </a:spcBef>
-              <a:spcAft>
-                <a:spcPts val="0"/>
-              </a:spcAft>
+              <a:lnSpc>
+                <a:spcPct val="100000"/>
+              </a:lnSpc>
+              <a:spcBef>
+                <a:spcPts val="0"/>
+              </a:spcBef>
+              <a:spcAft>
+                <a:spcPts val="0"/>
+              </a:spcAft>
+              <a:buClr>
+                <a:srgbClr val="000000"/>
+              </a:buClr>
+              <a:buSzPts val="1800"/>
+              <a:buFont typeface="Arial"/>
               <a:buNone/>
             </a:pPr>
             <a:r>
               <a:t/>
             </a:r>
-            <a:endParaRPr sz="1800">
+            <a:endParaRPr b="0" i="0" sz="1800" u="none" cap="none" strike="noStrike">
               <a:solidFill>
                 <a:schemeClr val="dk1"/>
               </a:solidFill>
@@ -12298,18 +13275,26 @@
           <a:lstStyle/>
           <a:p>
             <a:pPr indent="0" lvl="0" marL="0" marR="0" rtl="0" algn="l">
-              <a:spcBef>
-                <a:spcPts val="0"/>
-              </a:spcBef>
-              <a:spcAft>
-                <a:spcPts val="0"/>
-              </a:spcAft>
+              <a:lnSpc>
+                <a:spcPct val="100000"/>
+              </a:lnSpc>
+              <a:spcBef>
+                <a:spcPts val="0"/>
+              </a:spcBef>
+              <a:spcAft>
+                <a:spcPts val="0"/>
+              </a:spcAft>
+              <a:buClr>
+                <a:srgbClr val="000000"/>
+              </a:buClr>
+              <a:buSzPts val="1800"/>
+              <a:buFont typeface="Arial"/>
               <a:buNone/>
             </a:pPr>
             <a:r>
               <a:t/>
             </a:r>
-            <a:endParaRPr sz="1800">
+            <a:endParaRPr b="0" i="0" sz="1800" u="none" cap="none" strike="noStrike">
               <a:solidFill>
                 <a:schemeClr val="dk1"/>
               </a:solidFill>
@@ -12347,6 +13332,9 @@
           <a:lstStyle/>
           <a:p>
             <a:pPr indent="0" lvl="0" marL="0" marR="0" rtl="0" algn="ctr">
+              <a:lnSpc>
+                <a:spcPct val="100000"/>
+              </a:lnSpc>
               <a:spcBef>
                 <a:spcPts val="0"/>
               </a:spcBef>
@@ -12361,7 +13349,7 @@
               <a:buNone/>
             </a:pPr>
             <a:r>
-              <a:rPr b="1" lang="en-US" sz="1300">
+              <a:rPr b="1" i="0" lang="en-US" sz="1300" u="none" cap="none" strike="noStrike">
                 <a:solidFill>
                   <a:srgbClr val="FFFFFF"/>
                 </a:solidFill>
@@ -12372,7 +13360,7 @@
               </a:rPr>
               <a:t>Phase 1. 분석</a:t>
             </a:r>
-            <a:endParaRPr sz="1300">
+            <a:endParaRPr b="0" i="0" sz="1300" u="none" cap="none" strike="noStrike">
               <a:solidFill>
                 <a:schemeClr val="dk1"/>
               </a:solidFill>
@@ -12410,6 +13398,9 @@
           <a:lstStyle/>
           <a:p>
             <a:pPr indent="-182563" lvl="0" marL="182563" marR="0" rtl="0" algn="l">
+              <a:lnSpc>
+                <a:spcPct val="100000"/>
+              </a:lnSpc>
               <a:spcBef>
                 <a:spcPts val="0"/>
               </a:spcBef>
@@ -12424,7 +13415,7 @@
               <a:buChar char="✔"/>
             </a:pPr>
             <a:r>
-              <a:rPr lang="en-US" sz="1050">
+              <a:rPr b="0" i="0" lang="en-US" sz="1050" u="none" cap="none" strike="noStrike">
                 <a:solidFill>
                   <a:srgbClr val="1E293B"/>
                 </a:solidFill>
@@ -12435,7 +13426,7 @@
               </a:rPr>
               <a:t>SP DDL 및 스키마 정보 재귀 수집</a:t>
             </a:r>
-            <a:endParaRPr sz="1050">
+            <a:endParaRPr b="0" i="0" sz="1050" u="none" cap="none" strike="noStrike">
               <a:solidFill>
                 <a:schemeClr val="dk1"/>
               </a:solidFill>
@@ -12447,6 +13438,9 @@
           </a:p>
           <a:p>
             <a:pPr indent="-182563" lvl="0" marL="182563" marR="0" rtl="0" algn="l">
+              <a:lnSpc>
+                <a:spcPct val="100000"/>
+              </a:lnSpc>
               <a:spcBef>
                 <a:spcPts val="500"/>
               </a:spcBef>
@@ -12461,7 +13455,7 @@
               <a:buChar char="✔"/>
             </a:pPr>
             <a:r>
-              <a:rPr lang="en-US" sz="1050">
+              <a:rPr b="0" i="0" lang="en-US" sz="1050" u="none" cap="none" strike="noStrike">
                 <a:solidFill>
                   <a:srgbClr val="1E293B"/>
                 </a:solidFill>
@@ -12472,7 +13466,7 @@
               </a:rPr>
               <a:t>DDL 해시 시그니처 기반 로컬 증분 분석 캐싱</a:t>
             </a:r>
-            <a:endParaRPr sz="1050">
+            <a:endParaRPr b="0" i="0" sz="1050" u="none" cap="none" strike="noStrike">
               <a:solidFill>
                 <a:schemeClr val="dk1"/>
               </a:solidFill>
@@ -12484,16 +13478,24 @@
           </a:p>
           <a:p>
             <a:pPr indent="-142875" lvl="1" marL="325438" marR="0" rtl="0" algn="l">
+              <a:lnSpc>
+                <a:spcPct val="100000"/>
+              </a:lnSpc>
               <a:spcBef>
                 <a:spcPts val="200"/>
               </a:spcBef>
               <a:spcAft>
                 <a:spcPts val="0"/>
               </a:spcAft>
+              <a:buClr>
+                <a:srgbClr val="000000"/>
+              </a:buClr>
+              <a:buSzPts val="950"/>
+              <a:buFont typeface="Arial"/>
               <a:buNone/>
             </a:pPr>
             <a:r>
-              <a:rPr lang="en-US" sz="950">
+              <a:rPr b="0" i="0" lang="en-US" sz="950" u="none" cap="none" strike="noStrike">
                 <a:solidFill>
                   <a:srgbClr val="475569"/>
                 </a:solidFill>
@@ -12504,7 +13506,7 @@
               </a:rPr>
               <a:t>- API 토큰 비용 및 대기 시간 최소화</a:t>
             </a:r>
-            <a:endParaRPr sz="950">
+            <a:endParaRPr b="0" i="0" sz="950" u="none" cap="none" strike="noStrike">
               <a:solidFill>
                 <a:schemeClr val="dk1"/>
               </a:solidFill>
@@ -12516,6 +13518,9 @@
           </a:p>
           <a:p>
             <a:pPr indent="-182563" lvl="0" marL="182563" marR="0" rtl="0" algn="l">
+              <a:lnSpc>
+                <a:spcPct val="100000"/>
+              </a:lnSpc>
               <a:spcBef>
                 <a:spcPts val="500"/>
               </a:spcBef>
@@ -12530,7 +13535,7 @@
               <a:buChar char="✔"/>
             </a:pPr>
             <a:r>
-              <a:rPr lang="en-US" sz="1050">
+              <a:rPr b="0" i="0" lang="en-US" sz="1050" u="none" cap="none" strike="noStrike">
                 <a:solidFill>
                   <a:srgbClr val="1E293B"/>
                 </a:solidFill>
@@ -12541,7 +13546,7 @@
               </a:rPr>
               <a:t>3단계 신뢰성 검증 파이프라인 (L1~L3) 명세서 확정</a:t>
             </a:r>
-            <a:endParaRPr sz="1050">
+            <a:endParaRPr b="0" i="0" sz="1050" u="none" cap="none" strike="noStrike">
               <a:solidFill>
                 <a:schemeClr val="dk1"/>
               </a:solidFill>
@@ -12553,6 +13558,9 @@
           </a:p>
           <a:p>
             <a:pPr indent="-182563" lvl="0" marL="182563" marR="0" rtl="0" algn="l">
+              <a:lnSpc>
+                <a:spcPct val="100000"/>
+              </a:lnSpc>
               <a:spcBef>
                 <a:spcPts val="500"/>
               </a:spcBef>
@@ -12567,7 +13575,7 @@
               <a:buChar char="✔"/>
             </a:pPr>
             <a:r>
-              <a:rPr lang="en-US" sz="1050">
+              <a:rPr b="0" i="0" lang="en-US" sz="1050" u="none" cap="none" strike="noStrike">
                 <a:solidFill>
                   <a:srgbClr val="1E293B"/>
                 </a:solidFill>
@@ -12578,7 +13586,7 @@
               </a:rPr>
               <a:t>상수 분기 및 데이터 프로파일링 기반 통합 정산 정책서 도출</a:t>
             </a:r>
-            <a:endParaRPr sz="1050">
+            <a:endParaRPr b="0" i="0" sz="1050" u="none" cap="none" strike="noStrike">
               <a:solidFill>
                 <a:schemeClr val="dk1"/>
               </a:solidFill>
@@ -12657,18 +13665,26 @@
           <a:lstStyle/>
           <a:p>
             <a:pPr indent="0" lvl="0" marL="0" marR="0" rtl="0" algn="l">
-              <a:spcBef>
-                <a:spcPts val="0"/>
-              </a:spcBef>
-              <a:spcAft>
-                <a:spcPts val="0"/>
-              </a:spcAft>
+              <a:lnSpc>
+                <a:spcPct val="100000"/>
+              </a:lnSpc>
+              <a:spcBef>
+                <a:spcPts val="0"/>
+              </a:spcBef>
+              <a:spcAft>
+                <a:spcPts val="0"/>
+              </a:spcAft>
+              <a:buClr>
+                <a:srgbClr val="000000"/>
+              </a:buClr>
+              <a:buSzPts val="1800"/>
+              <a:buFont typeface="Arial"/>
               <a:buNone/>
             </a:pPr>
             <a:r>
               <a:t/>
             </a:r>
-            <a:endParaRPr sz="1800">
+            <a:endParaRPr b="0" i="0" sz="1800" u="none" cap="none" strike="noStrike">
               <a:solidFill>
                 <a:schemeClr val="dk1"/>
               </a:solidFill>
@@ -12708,18 +13724,26 @@
           <a:lstStyle/>
           <a:p>
             <a:pPr indent="0" lvl="0" marL="0" marR="0" rtl="0" algn="l">
-              <a:spcBef>
-                <a:spcPts val="0"/>
-              </a:spcBef>
-              <a:spcAft>
-                <a:spcPts val="0"/>
-              </a:spcAft>
+              <a:lnSpc>
+                <a:spcPct val="100000"/>
+              </a:lnSpc>
+              <a:spcBef>
+                <a:spcPts val="0"/>
+              </a:spcBef>
+              <a:spcAft>
+                <a:spcPts val="0"/>
+              </a:spcAft>
+              <a:buClr>
+                <a:srgbClr val="000000"/>
+              </a:buClr>
+              <a:buSzPts val="1800"/>
+              <a:buFont typeface="Arial"/>
               <a:buNone/>
             </a:pPr>
             <a:r>
               <a:t/>
             </a:r>
-            <a:endParaRPr sz="1800">
+            <a:endParaRPr b="0" i="0" sz="1800" u="none" cap="none" strike="noStrike">
               <a:solidFill>
                 <a:schemeClr val="dk1"/>
               </a:solidFill>
@@ -12757,6 +13781,9 @@
           <a:lstStyle/>
           <a:p>
             <a:pPr indent="0" lvl="0" marL="0" marR="0" rtl="0" algn="ctr">
+              <a:lnSpc>
+                <a:spcPct val="100000"/>
+              </a:lnSpc>
               <a:spcBef>
                 <a:spcPts val="0"/>
               </a:spcBef>
@@ -12771,7 +13798,7 @@
               <a:buNone/>
             </a:pPr>
             <a:r>
-              <a:rPr b="1" lang="en-US" sz="1300">
+              <a:rPr b="1" i="0" lang="en-US" sz="1300" u="none" cap="none" strike="noStrike">
                 <a:solidFill>
                   <a:srgbClr val="FFFFFF"/>
                 </a:solidFill>
@@ -12782,7 +13809,7 @@
               </a:rPr>
               <a:t>Phase 2. 코드 생성</a:t>
             </a:r>
-            <a:endParaRPr sz="1300">
+            <a:endParaRPr b="0" i="0" sz="1300" u="none" cap="none" strike="noStrike">
               <a:solidFill>
                 <a:schemeClr val="dk1"/>
               </a:solidFill>
@@ -12820,6 +13847,9 @@
           <a:lstStyle/>
           <a:p>
             <a:pPr indent="-182563" lvl="0" marL="182563" marR="0" rtl="0" algn="l">
+              <a:lnSpc>
+                <a:spcPct val="100000"/>
+              </a:lnSpc>
               <a:spcBef>
                 <a:spcPts val="0"/>
               </a:spcBef>
@@ -12834,7 +13864,7 @@
               <a:buChar char="✔"/>
             </a:pPr>
             <a:r>
-              <a:rPr lang="en-US" sz="1050">
+              <a:rPr b="0" i="0" lang="en-US" sz="1050" u="none" cap="none" strike="noStrike">
                 <a:solidFill>
                   <a:srgbClr val="1E293B"/>
                 </a:solidFill>
@@ -12845,7 +13875,7 @@
               </a:rPr>
               <a:t>TUI 순차 선택 기반 배치 실행 단계 순서 확보</a:t>
             </a:r>
-            <a:endParaRPr sz="1050">
+            <a:endParaRPr b="0" i="0" sz="1050" u="none" cap="none" strike="noStrike">
               <a:solidFill>
                 <a:schemeClr val="dk1"/>
               </a:solidFill>
@@ -12857,6 +13887,9 @@
           </a:p>
           <a:p>
             <a:pPr indent="-182563" lvl="0" marL="182563" marR="0" rtl="0" algn="l">
+              <a:lnSpc>
+                <a:spcPct val="100000"/>
+              </a:lnSpc>
               <a:spcBef>
                 <a:spcPts val="500"/>
               </a:spcBef>
@@ -12871,7 +13904,7 @@
               <a:buChar char="✔"/>
             </a:pPr>
             <a:r>
-              <a:rPr lang="en-US" sz="1050">
+              <a:rPr b="0" i="0" lang="en-US" sz="1050" u="none" cap="none" strike="noStrike">
                 <a:solidFill>
                   <a:srgbClr val="1E293B"/>
                 </a:solidFill>
@@ -12882,7 +13915,7 @@
               </a:rPr>
               <a:t>마이그레이션 지시서 번들 패키징 (설계서, DDL, 스키마 통합)</a:t>
             </a:r>
-            <a:endParaRPr sz="1050">
+            <a:endParaRPr b="0" i="0" sz="1050" u="none" cap="none" strike="noStrike">
               <a:solidFill>
                 <a:schemeClr val="dk1"/>
               </a:solidFill>
@@ -12894,6 +13927,9 @@
           </a:p>
           <a:p>
             <a:pPr indent="-182563" lvl="0" marL="182563" marR="0" rtl="0" algn="l">
+              <a:lnSpc>
+                <a:spcPct val="100000"/>
+              </a:lnSpc>
               <a:spcBef>
                 <a:spcPts val="500"/>
               </a:spcBef>
@@ -12908,7 +13944,7 @@
               <a:buChar char="✔"/>
             </a:pPr>
             <a:r>
-              <a:rPr lang="en-US" sz="1050">
+              <a:rPr b="0" i="0" lang="en-US" sz="1050" u="none" cap="none" strike="noStrike">
                 <a:solidFill>
                   <a:srgbClr val="1E293B"/>
                 </a:solidFill>
@@ -12919,7 +13955,7 @@
               </a:rPr>
               <a:t>TDD용 단위 테스트 및 ArchUnit 아키텍처 규칙 코드 선제 공급</a:t>
             </a:r>
-            <a:endParaRPr sz="1050">
+            <a:endParaRPr b="0" i="0" sz="1050" u="none" cap="none" strike="noStrike">
               <a:solidFill>
                 <a:schemeClr val="dk1"/>
               </a:solidFill>
@@ -12931,6 +13967,9 @@
           </a:p>
           <a:p>
             <a:pPr indent="-182563" lvl="0" marL="182563" marR="0" rtl="0" algn="l">
+              <a:lnSpc>
+                <a:spcPct val="100000"/>
+              </a:lnSpc>
               <a:spcBef>
                 <a:spcPts val="500"/>
               </a:spcBef>
@@ -12945,7 +13984,7 @@
               <a:buChar char="✔"/>
             </a:pPr>
             <a:r>
-              <a:rPr lang="en-US" sz="1050">
+              <a:rPr b="0" i="0" lang="en-US" sz="1050" u="none" cap="none" strike="noStrike">
                 <a:solidFill>
                   <a:srgbClr val="1E293B"/>
                 </a:solidFill>
@@ -12956,7 +13995,7 @@
               </a:rPr>
               <a:t>외부 코딩 에이전트 자동 기동 및 자가 수정 피드백 루프 가동</a:t>
             </a:r>
-            <a:endParaRPr sz="1050">
+            <a:endParaRPr b="0" i="0" sz="1050" u="none" cap="none" strike="noStrike">
               <a:solidFill>
                 <a:schemeClr val="dk1"/>
               </a:solidFill>
@@ -12968,6 +14007,9 @@
           </a:p>
           <a:p>
             <a:pPr indent="-182563" lvl="0" marL="182563" marR="0" rtl="0" algn="l">
+              <a:lnSpc>
+                <a:spcPct val="100000"/>
+              </a:lnSpc>
               <a:spcBef>
                 <a:spcPts val="500"/>
               </a:spcBef>
@@ -12982,7 +14024,7 @@
               <a:buChar char="✔"/>
             </a:pPr>
             <a:r>
-              <a:rPr lang="en-US" sz="1050">
+              <a:rPr b="0" i="0" lang="en-US" sz="1050" u="none" cap="none" strike="noStrike">
                 <a:solidFill>
                   <a:srgbClr val="1E293B"/>
                 </a:solidFill>
@@ -12993,7 +14035,7 @@
               </a:rPr>
               <a:t>부모 콘솔 상속 연동 및 좀비 프로세스 방지 트리 강제 정리</a:t>
             </a:r>
-            <a:endParaRPr sz="1050">
+            <a:endParaRPr b="0" i="0" sz="1050" u="none" cap="none" strike="noStrike">
               <a:solidFill>
                 <a:schemeClr val="dk1"/>
               </a:solidFill>
@@ -13072,18 +14114,26 @@
           <a:lstStyle/>
           <a:p>
             <a:pPr indent="0" lvl="0" marL="0" marR="0" rtl="0" algn="l">
-              <a:spcBef>
-                <a:spcPts val="0"/>
-              </a:spcBef>
-              <a:spcAft>
-                <a:spcPts val="0"/>
-              </a:spcAft>
+              <a:lnSpc>
+                <a:spcPct val="100000"/>
+              </a:lnSpc>
+              <a:spcBef>
+                <a:spcPts val="0"/>
+              </a:spcBef>
+              <a:spcAft>
+                <a:spcPts val="0"/>
+              </a:spcAft>
+              <a:buClr>
+                <a:srgbClr val="000000"/>
+              </a:buClr>
+              <a:buSzPts val="1800"/>
+              <a:buFont typeface="Arial"/>
               <a:buNone/>
             </a:pPr>
             <a:r>
               <a:t/>
             </a:r>
-            <a:endParaRPr sz="1800">
+            <a:endParaRPr b="0" i="0" sz="1800" u="none" cap="none" strike="noStrike">
               <a:solidFill>
                 <a:schemeClr val="dk1"/>
               </a:solidFill>
@@ -13123,18 +14173,26 @@
           <a:lstStyle/>
           <a:p>
             <a:pPr indent="0" lvl="0" marL="0" marR="0" rtl="0" algn="l">
-              <a:spcBef>
-                <a:spcPts val="0"/>
-              </a:spcBef>
-              <a:spcAft>
-                <a:spcPts val="0"/>
-              </a:spcAft>
+              <a:lnSpc>
+                <a:spcPct val="100000"/>
+              </a:lnSpc>
+              <a:spcBef>
+                <a:spcPts val="0"/>
+              </a:spcBef>
+              <a:spcAft>
+                <a:spcPts val="0"/>
+              </a:spcAft>
+              <a:buClr>
+                <a:srgbClr val="000000"/>
+              </a:buClr>
+              <a:buSzPts val="1800"/>
+              <a:buFont typeface="Arial"/>
               <a:buNone/>
             </a:pPr>
             <a:r>
               <a:t/>
             </a:r>
-            <a:endParaRPr sz="1800">
+            <a:endParaRPr b="0" i="0" sz="1800" u="none" cap="none" strike="noStrike">
               <a:solidFill>
                 <a:schemeClr val="dk1"/>
               </a:solidFill>
@@ -13172,6 +14230,9 @@
           <a:lstStyle/>
           <a:p>
             <a:pPr indent="0" lvl="0" marL="0" marR="0" rtl="0" algn="ctr">
+              <a:lnSpc>
+                <a:spcPct val="100000"/>
+              </a:lnSpc>
               <a:spcBef>
                 <a:spcPts val="0"/>
               </a:spcBef>
@@ -13186,7 +14247,7 @@
               <a:buNone/>
             </a:pPr>
             <a:r>
-              <a:rPr b="1" lang="en-US" sz="1300">
+              <a:rPr b="1" i="0" lang="en-US" sz="1300" u="none" cap="none" strike="noStrike">
                 <a:solidFill>
                   <a:srgbClr val="FFFFFF"/>
                 </a:solidFill>
@@ -13197,7 +14258,7 @@
               </a:rPr>
               <a:t>Phase 3. 검증</a:t>
             </a:r>
-            <a:endParaRPr sz="1300">
+            <a:endParaRPr b="0" i="0" sz="1300" u="none" cap="none" strike="noStrike">
               <a:solidFill>
                 <a:schemeClr val="dk1"/>
               </a:solidFill>
@@ -13235,6 +14296,9 @@
           <a:lstStyle/>
           <a:p>
             <a:pPr indent="-182563" lvl="0" marL="182563" marR="0" rtl="0" algn="l">
+              <a:lnSpc>
+                <a:spcPct val="100000"/>
+              </a:lnSpc>
               <a:spcBef>
                 <a:spcPts val="0"/>
               </a:spcBef>
@@ -13249,7 +14313,7 @@
               <a:buChar char="✔"/>
             </a:pPr>
             <a:r>
-              <a:rPr lang="en-US" sz="1050">
+              <a:rPr b="0" i="0" lang="en-US" sz="1050" u="none" cap="none" strike="noStrike">
                 <a:solidFill>
                   <a:srgbClr val="1E293B"/>
                 </a:solidFill>
@@ -13260,7 +14324,7 @@
               </a:rPr>
               <a:t>소스코드 vs 설계서 구조 및 논리 일치성 Gap 분석</a:t>
             </a:r>
-            <a:endParaRPr sz="1050">
+            <a:endParaRPr b="0" i="0" sz="1050" u="none" cap="none" strike="noStrike">
               <a:solidFill>
                 <a:schemeClr val="dk1"/>
               </a:solidFill>
@@ -13272,6 +14336,9 @@
           </a:p>
           <a:p>
             <a:pPr indent="-182563" lvl="0" marL="182563" marR="0" rtl="0" algn="l">
+              <a:lnSpc>
+                <a:spcPct val="100000"/>
+              </a:lnSpc>
               <a:spcBef>
                 <a:spcPts val="500"/>
               </a:spcBef>
@@ -13286,7 +14353,7 @@
               <a:buChar char="✔"/>
             </a:pPr>
             <a:r>
-              <a:rPr lang="en-US" sz="1050">
+              <a:rPr b="0" i="0" lang="en-US" sz="1050" u="none" cap="none" strike="noStrike">
                 <a:solidFill>
                   <a:srgbClr val="1E293B"/>
                 </a:solidFill>
@@ -13297,7 +14364,7 @@
               </a:rPr>
               <a:t>관계지향 모의 데이터(Mock Data) 자동 설계 및 Sandbox DB 적재</a:t>
             </a:r>
-            <a:endParaRPr sz="1050">
+            <a:endParaRPr b="0" i="0" sz="1050" u="none" cap="none" strike="noStrike">
               <a:solidFill>
                 <a:schemeClr val="dk1"/>
               </a:solidFill>
@@ -13309,6 +14376,9 @@
           </a:p>
           <a:p>
             <a:pPr indent="-182563" lvl="0" marL="182563" marR="0" rtl="0" algn="l">
+              <a:lnSpc>
+                <a:spcPct val="100000"/>
+              </a:lnSpc>
               <a:spcBef>
                 <a:spcPts val="500"/>
               </a:spcBef>
@@ -13323,7 +14393,7 @@
               <a:buChar char="✔"/>
             </a:pPr>
             <a:r>
-              <a:rPr lang="en-US" sz="1050">
+              <a:rPr b="0" i="0" lang="en-US" sz="1050" u="none" cap="none" strike="noStrike">
                 <a:solidFill>
                   <a:srgbClr val="1E293B"/>
                 </a:solidFill>
@@ -13334,7 +14404,7 @@
               </a:rPr>
               <a:t>양방향(Legacy vs Target) 실행 결과 데이터 수집 및 Sandbox Cleanup</a:t>
             </a:r>
-            <a:endParaRPr sz="1050">
+            <a:endParaRPr b="0" i="0" sz="1050" u="none" cap="none" strike="noStrike">
               <a:solidFill>
                 <a:schemeClr val="dk1"/>
               </a:solidFill>
@@ -13346,6 +14416,9 @@
           </a:p>
           <a:p>
             <a:pPr indent="-182563" lvl="0" marL="182563" marR="0" rtl="0" algn="l">
+              <a:lnSpc>
+                <a:spcPct val="100000"/>
+              </a:lnSpc>
               <a:spcBef>
                 <a:spcPts val="500"/>
               </a:spcBef>
@@ -13360,7 +14433,7 @@
               <a:buChar char="✔"/>
             </a:pPr>
             <a:r>
-              <a:rPr lang="en-US" sz="1050">
+              <a:rPr b="0" i="0" lang="en-US" sz="1050" u="none" cap="none" strike="noStrike">
                 <a:solidFill>
                   <a:srgbClr val="1E293B"/>
                 </a:solidFill>
@@ -13371,7 +14444,7 @@
               </a:rPr>
               <a:t>결과셋 데이터 1:1 정밀 대조 및 데이터 정합성 비교 보고서 발행</a:t>
             </a:r>
-            <a:endParaRPr sz="1050">
+            <a:endParaRPr b="0" i="0" sz="1050" u="none" cap="none" strike="noStrike">
               <a:solidFill>
                 <a:schemeClr val="dk1"/>
               </a:solidFill>
@@ -13383,6 +14456,9 @@
           </a:p>
           <a:p>
             <a:pPr indent="-182563" lvl="0" marL="182563" marR="0" rtl="0" algn="l">
+              <a:lnSpc>
+                <a:spcPct val="100000"/>
+              </a:lnSpc>
               <a:spcBef>
                 <a:spcPts val="500"/>
               </a:spcBef>
@@ -13397,7 +14473,7 @@
               <a:buChar char="✔"/>
             </a:pPr>
             <a:r>
-              <a:rPr lang="en-US" sz="1050">
+              <a:rPr b="0" i="0" lang="en-US" sz="1050" u="none" cap="none" strike="noStrike">
                 <a:solidFill>
                   <a:srgbClr val="1E293B"/>
                 </a:solidFill>
@@ -13419,107 +14495,92 @@
             </a:endParaRPr>
           </a:p>
           <a:p>
-            <a:pPr indent="-160338" lvl="0" marL="342900" rtl="0" algn="l">
-              <a:spcBef>
-                <a:spcPts val="500"/>
-              </a:spcBef>
-              <a:spcAft>
-                <a:spcPts val="0"/>
-              </a:spcAft>
-              <a:buClr>
-                <a:srgbClr val="1E293B"/>
-              </a:buClr>
-              <a:buSzPts val="1050"/>
-              <a:buFont typeface="Calibri"/>
-              <a:buChar char="•"/>
-            </a:pPr>
-            <a:r>
-              <a:rPr lang="en-US" sz="1050">
-                <a:solidFill>
-                  <a:srgbClr val="1E293B"/>
+            <a:pPr indent="-142875" lvl="0" marL="325438" rtl="0" algn="l">
+              <a:spcBef>
+                <a:spcPts val="200"/>
+              </a:spcBef>
+              <a:spcAft>
+                <a:spcPts val="0"/>
+              </a:spcAft>
+              <a:buNone/>
+            </a:pPr>
+            <a:r>
+              <a:rPr lang="en-US" sz="950">
+                <a:solidFill>
+                  <a:srgbClr val="475569"/>
                 </a:solidFill>
                 <a:latin typeface="Calibri"/>
                 <a:ea typeface="Calibri"/>
                 <a:cs typeface="Calibri"/>
                 <a:sym typeface="Calibri"/>
               </a:rPr>
-              <a:t>루프 A (설계서 재수립)</a:t>
+              <a:t>- 루프 A (설계서 재수립)</a:t>
             </a:r>
             <a:endParaRPr sz="1050">
               <a:solidFill>
-                <a:srgbClr val="1E293B"/>
-              </a:solidFill>
-              <a:latin typeface="Calibri"/>
-              <a:ea typeface="Calibri"/>
-              <a:cs typeface="Calibri"/>
-              <a:sym typeface="Calibri"/>
-            </a:endParaRPr>
-          </a:p>
-          <a:p>
-            <a:pPr indent="-160338" lvl="0" marL="342900" rtl="0" algn="l">
-              <a:spcBef>
-                <a:spcPts val="500"/>
-              </a:spcBef>
-              <a:spcAft>
-                <a:spcPts val="0"/>
-              </a:spcAft>
-              <a:buClr>
-                <a:srgbClr val="1E293B"/>
-              </a:buClr>
-              <a:buSzPts val="1050"/>
-              <a:buFont typeface="Calibri"/>
-              <a:buChar char="•"/>
-            </a:pPr>
-            <a:r>
-              <a:rPr lang="en-US" sz="1050">
-                <a:solidFill>
-                  <a:srgbClr val="1E293B"/>
+                <a:schemeClr val="dk1"/>
+              </a:solidFill>
+              <a:latin typeface="Calibri"/>
+              <a:ea typeface="Calibri"/>
+              <a:cs typeface="Calibri"/>
+              <a:sym typeface="Calibri"/>
+            </a:endParaRPr>
+          </a:p>
+          <a:p>
+            <a:pPr indent="-142875" lvl="1" marL="325438" rtl="0" algn="l">
+              <a:spcBef>
+                <a:spcPts val="200"/>
+              </a:spcBef>
+              <a:spcAft>
+                <a:spcPts val="0"/>
+              </a:spcAft>
+              <a:buNone/>
+            </a:pPr>
+            <a:r>
+              <a:rPr lang="en-US" sz="950">
+                <a:solidFill>
+                  <a:srgbClr val="475569"/>
                 </a:solidFill>
                 <a:latin typeface="Calibri"/>
                 <a:ea typeface="Calibri"/>
                 <a:cs typeface="Calibri"/>
                 <a:sym typeface="Calibri"/>
               </a:rPr>
-              <a:t>루프 B (소스코드 보완)</a:t>
+              <a:t>- 루프 B (소스코드 보완)</a:t>
             </a:r>
             <a:endParaRPr sz="1050">
               <a:solidFill>
-                <a:srgbClr val="1E293B"/>
-              </a:solidFill>
-              <a:latin typeface="Calibri"/>
-              <a:ea typeface="Calibri"/>
-              <a:cs typeface="Calibri"/>
-              <a:sym typeface="Calibri"/>
-            </a:endParaRPr>
-          </a:p>
-          <a:p>
-            <a:pPr indent="-160338" lvl="0" marL="342900" rtl="0" algn="l">
-              <a:spcBef>
-                <a:spcPts val="500"/>
-              </a:spcBef>
-              <a:spcAft>
-                <a:spcPts val="0"/>
-              </a:spcAft>
-              <a:buClr>
-                <a:srgbClr val="1E293B"/>
-              </a:buClr>
-              <a:buSzPts val="1050"/>
-              <a:buFont typeface="Calibri"/>
-              <a:buChar char="•"/>
-            </a:pPr>
-            <a:r>
-              <a:rPr lang="en-US" sz="1050">
-                <a:solidFill>
-                  <a:srgbClr val="1E293B"/>
+                <a:schemeClr val="dk1"/>
+              </a:solidFill>
+              <a:latin typeface="Calibri"/>
+              <a:ea typeface="Calibri"/>
+              <a:cs typeface="Calibri"/>
+              <a:sym typeface="Calibri"/>
+            </a:endParaRPr>
+          </a:p>
+          <a:p>
+            <a:pPr indent="-142875" lvl="1" marL="325438" rtl="0" algn="l">
+              <a:spcBef>
+                <a:spcPts val="200"/>
+              </a:spcBef>
+              <a:spcAft>
+                <a:spcPts val="0"/>
+              </a:spcAft>
+              <a:buNone/>
+            </a:pPr>
+            <a:r>
+              <a:rPr lang="en-US" sz="950">
+                <a:solidFill>
+                  <a:srgbClr val="475569"/>
                 </a:solidFill>
                 <a:latin typeface="Calibri"/>
                 <a:ea typeface="Calibri"/>
                 <a:cs typeface="Calibri"/>
                 <a:sym typeface="Calibri"/>
               </a:rPr>
-              <a:t>루프 C (테스트 튜닝)</a:t>
-            </a:r>
-            <a:endParaRPr sz="1050">
+              <a:t>- 루프 C (테스트 튜닝)</a:t>
+            </a:r>
+            <a:endParaRPr b="0" i="0" sz="1050" u="none" cap="none" strike="noStrike">
               <a:solidFill>
                 <a:srgbClr val="1E293B"/>
               </a:solidFill>
